--- a/MECH151_techDesign/slideDeck/MECH151_Unit_Reference_Deck.pptx
+++ b/MECH151_techDesign/slideDeck/MECH151_Unit_Reference_Deck.pptx
@@ -56,6 +56,8 @@
     <p:sldId id="304" r:id="rId50"/>
     <p:sldId id="305" r:id="rId51"/>
     <p:sldId id="306" r:id="rId52"/>
+    <p:sldId id="311" r:id="rId62"/>
+    <p:sldId id="312" r:id="rId63"/>
     <p:sldId id="307" r:id="rId53"/>
     <p:sldId id="308" r:id="rId54"/>
     <p:sldId id="309" r:id="rId55"/>
@@ -5703,6 +5705,10 @@
             <a:prstDash val="solid"/>
           </a:ln>
         </p:spPr>
+        <p:txBody>
+          <a:bodyPr/>
+          <a:p/>
+        </p:txBody>
       </p:sp>
       <p:sp>
         <p:nvSpPr>
@@ -5726,6 +5732,10 @@
             <a:prstDash val="solid"/>
           </a:ln>
         </p:spPr>
+        <p:txBody>
+          <a:bodyPr/>
+          <a:p/>
+        </p:txBody>
       </p:sp>
       <p:sp>
         <p:nvSpPr>
@@ -5749,6 +5759,10 @@
             <a:prstDash val="solid"/>
           </a:ln>
         </p:spPr>
+        <p:txBody>
+          <a:bodyPr/>
+          <a:p/>
+        </p:txBody>
       </p:sp>
       <p:sp>
         <p:nvSpPr>
@@ -5772,6 +5786,10 @@
             <a:prstDash val="solid"/>
           </a:ln>
         </p:spPr>
+        <p:txBody>
+          <a:bodyPr/>
+          <a:p/>
+        </p:txBody>
       </p:sp>
       <p:sp>
         <p:nvSpPr>
@@ -5795,6 +5813,10 @@
             <a:prstDash val="solid"/>
           </a:ln>
         </p:spPr>
+        <p:txBody>
+          <a:bodyPr/>
+          <a:p/>
+        </p:txBody>
       </p:sp>
       <p:sp>
         <p:nvSpPr>
@@ -5818,6 +5840,10 @@
             <a:prstDash val="solid"/>
           </a:ln>
         </p:spPr>
+        <p:txBody>
+          <a:bodyPr/>
+          <a:p/>
+        </p:txBody>
       </p:sp>
       <p:sp>
         <p:nvSpPr>
@@ -5841,6 +5867,10 @@
             <a:prstDash val="solid"/>
           </a:ln>
         </p:spPr>
+        <p:txBody>
+          <a:bodyPr/>
+          <a:p/>
+        </p:txBody>
       </p:sp>
       <p:sp>
         <p:nvSpPr>
@@ -5864,6 +5894,10 @@
             <a:prstDash val="solid"/>
           </a:ln>
         </p:spPr>
+        <p:txBody>
+          <a:bodyPr/>
+          <a:p/>
+        </p:txBody>
       </p:sp>
       <p:sp>
         <p:nvSpPr>
@@ -5887,6 +5921,10 @@
             <a:prstDash val="solid"/>
           </a:ln>
         </p:spPr>
+        <p:txBody>
+          <a:bodyPr/>
+          <a:p/>
+        </p:txBody>
       </p:sp>
       <p:sp>
         <p:nvSpPr>
@@ -5910,6 +5948,10 @@
             <a:prstDash val="solid"/>
           </a:ln>
         </p:spPr>
+        <p:txBody>
+          <a:bodyPr/>
+          <a:p/>
+        </p:txBody>
       </p:sp>
       <p:sp>
         <p:nvSpPr>
@@ -5933,6 +5975,10 @@
             <a:prstDash val="solid"/>
           </a:ln>
         </p:spPr>
+        <p:txBody>
+          <a:bodyPr/>
+          <a:p/>
+        </p:txBody>
       </p:sp>
       <p:sp>
         <p:nvSpPr>
@@ -5956,6 +6002,10 @@
             <a:prstDash val="solid"/>
           </a:ln>
         </p:spPr>
+        <p:txBody>
+          <a:bodyPr/>
+          <a:p/>
+        </p:txBody>
       </p:sp>
       <p:sp>
         <p:nvSpPr>
@@ -5979,6 +6029,10 @@
             <a:prstDash val="solid"/>
           </a:ln>
         </p:spPr>
+        <p:txBody>
+          <a:bodyPr/>
+          <a:p/>
+        </p:txBody>
       </p:sp>
       <p:sp>
         <p:nvSpPr>
@@ -6002,6 +6056,10 @@
             <a:prstDash val="solid"/>
           </a:ln>
         </p:spPr>
+        <p:txBody>
+          <a:bodyPr/>
+          <a:p/>
+        </p:txBody>
       </p:sp>
       <p:sp>
         <p:nvSpPr>
@@ -6025,6 +6083,10 @@
             <a:prstDash val="solid"/>
           </a:ln>
         </p:spPr>
+        <p:txBody>
+          <a:bodyPr/>
+          <a:p/>
+        </p:txBody>
       </p:sp>
       <p:sp>
         <p:nvSpPr>
@@ -6048,6 +6110,10 @@
             <a:prstDash val="solid"/>
           </a:ln>
         </p:spPr>
+        <p:txBody>
+          <a:bodyPr/>
+          <a:p/>
+        </p:txBody>
       </p:sp>
       <p:sp>
         <p:nvSpPr>
@@ -6071,6 +6137,10 @@
             <a:prstDash val="solid"/>
           </a:ln>
         </p:spPr>
+        <p:txBody>
+          <a:bodyPr/>
+          <a:p/>
+        </p:txBody>
       </p:sp>
       <p:sp>
         <p:nvSpPr>
@@ -6094,6 +6164,10 @@
             <a:prstDash val="solid"/>
           </a:ln>
         </p:spPr>
+        <p:txBody>
+          <a:bodyPr/>
+          <a:p/>
+        </p:txBody>
       </p:sp>
       <p:sp>
         <p:nvSpPr>
@@ -6117,6 +6191,10 @@
             <a:prstDash val="solid"/>
           </a:ln>
         </p:spPr>
+        <p:txBody>
+          <a:bodyPr/>
+          <a:p/>
+        </p:txBody>
       </p:sp>
       <p:sp>
         <p:nvSpPr>
@@ -6140,6 +6218,10 @@
             <a:prstDash val="solid"/>
           </a:ln>
         </p:spPr>
+        <p:txBody>
+          <a:bodyPr/>
+          <a:p/>
+        </p:txBody>
       </p:sp>
       <p:sp>
         <p:nvSpPr>
@@ -6163,6 +6245,10 @@
             <a:prstDash val="solid"/>
           </a:ln>
         </p:spPr>
+        <p:txBody>
+          <a:bodyPr/>
+          <a:p/>
+        </p:txBody>
       </p:sp>
       <p:sp>
         <p:nvSpPr>
@@ -6186,6 +6272,10 @@
             <a:prstDash val="solid"/>
           </a:ln>
         </p:spPr>
+        <p:txBody>
+          <a:bodyPr/>
+          <a:p/>
+        </p:txBody>
       </p:sp>
       <p:sp>
         <p:nvSpPr>
@@ -6209,6 +6299,10 @@
             <a:prstDash val="solid"/>
           </a:ln>
         </p:spPr>
+        <p:txBody>
+          <a:bodyPr/>
+          <a:p/>
+        </p:txBody>
       </p:sp>
       <p:sp>
         <p:nvSpPr>
@@ -6232,6 +6326,10 @@
             <a:prstDash val="solid"/>
           </a:ln>
         </p:spPr>
+        <p:txBody>
+          <a:bodyPr/>
+          <a:p/>
+        </p:txBody>
       </p:sp>
       <p:sp>
         <p:nvSpPr>
@@ -6255,6 +6353,10 @@
             <a:prstDash val="solid"/>
           </a:ln>
         </p:spPr>
+        <p:txBody>
+          <a:bodyPr/>
+          <a:p/>
+        </p:txBody>
       </p:sp>
       <p:sp>
         <p:nvSpPr>
@@ -6277,6 +6379,10 @@
           </a:solidFill>
           <a:ln/>
         </p:spPr>
+        <p:txBody>
+          <a:bodyPr/>
+          <a:p/>
+        </p:txBody>
       </p:sp>
       <p:sp>
         <p:nvSpPr>
@@ -6463,6 +6569,10 @@
             <a:prstDash val="solid"/>
           </a:ln>
         </p:spPr>
+        <p:txBody>
+          <a:bodyPr/>
+          <a:p/>
+        </p:txBody>
       </p:sp>
       <p:sp>
         <p:nvSpPr>
@@ -6529,6 +6639,10 @@
             <a:prstDash val="solid"/>
           </a:ln>
         </p:spPr>
+        <p:txBody>
+          <a:bodyPr/>
+          <a:p/>
+        </p:txBody>
       </p:sp>
       <p:sp>
         <p:nvSpPr>
@@ -6595,6 +6709,10 @@
             <a:prstDash val="solid"/>
           </a:ln>
         </p:spPr>
+        <p:txBody>
+          <a:bodyPr/>
+          <a:p/>
+        </p:txBody>
       </p:sp>
       <p:sp>
         <p:nvSpPr>
@@ -6661,6 +6779,10 @@
             <a:prstDash val="solid"/>
           </a:ln>
         </p:spPr>
+        <p:txBody>
+          <a:bodyPr/>
+          <a:p/>
+        </p:txBody>
       </p:sp>
       <p:sp>
         <p:nvSpPr>
@@ -6727,6 +6849,10 @@
             <a:prstDash val="solid"/>
           </a:ln>
         </p:spPr>
+        <p:txBody>
+          <a:bodyPr/>
+          <a:p/>
+        </p:txBody>
       </p:sp>
       <p:sp>
         <p:nvSpPr>
@@ -6793,6 +6919,10 @@
             <a:prstDash val="solid"/>
           </a:ln>
         </p:spPr>
+        <p:txBody>
+          <a:bodyPr/>
+          <a:p/>
+        </p:txBody>
       </p:sp>
       <p:sp>
         <p:nvSpPr>
@@ -6886,6 +7016,10 @@
           </a:solidFill>
           <a:ln/>
         </p:spPr>
+        <p:txBody>
+          <a:bodyPr/>
+          <a:p/>
+        </p:txBody>
       </p:sp>
       <p:sp>
         <p:nvSpPr>
@@ -7069,6 +7203,10 @@
             <a:prstDash val="solid"/>
           </a:ln>
         </p:spPr>
+        <p:txBody>
+          <a:bodyPr/>
+          <a:p/>
+        </p:txBody>
       </p:sp>
       <p:sp>
         <p:nvSpPr>
@@ -7280,6 +7418,10 @@
             <a:prstDash val="solid"/>
           </a:ln>
         </p:spPr>
+        <p:txBody>
+          <a:bodyPr/>
+          <a:p/>
+        </p:txBody>
       </p:sp>
       <p:sp>
         <p:nvSpPr>
@@ -7548,6 +7690,10 @@
             <a:prstDash val="solid"/>
           </a:ln>
         </p:spPr>
+        <p:txBody>
+          <a:bodyPr/>
+          <a:p/>
+        </p:txBody>
       </p:sp>
       <p:sp>
         <p:nvSpPr>
@@ -7661,6 +7807,10 @@
           </a:solidFill>
           <a:ln/>
         </p:spPr>
+        <p:txBody>
+          <a:bodyPr/>
+          <a:p/>
+        </p:txBody>
       </p:sp>
       <p:sp>
         <p:nvSpPr>
@@ -7805,6 +7955,10 @@
             <a:prstDash val="solid"/>
           </a:ln>
         </p:spPr>
+        <p:txBody>
+          <a:bodyPr/>
+          <a:p/>
+        </p:txBody>
       </p:sp>
       <p:sp>
         <p:nvSpPr>
@@ -7825,6 +7979,10 @@
           </a:solidFill>
           <a:ln/>
         </p:spPr>
+        <p:txBody>
+          <a:bodyPr/>
+          <a:p/>
+        </p:txBody>
       </p:sp>
       <p:sp>
         <p:nvSpPr>
@@ -7972,6 +8130,10 @@
             <a:prstDash val="solid"/>
           </a:ln>
         </p:spPr>
+        <p:txBody>
+          <a:bodyPr/>
+          <a:p/>
+        </p:txBody>
       </p:sp>
       <p:sp>
         <p:nvSpPr>
@@ -7992,6 +8154,10 @@
           </a:solidFill>
           <a:ln/>
         </p:spPr>
+        <p:txBody>
+          <a:bodyPr/>
+          <a:p/>
+        </p:txBody>
       </p:sp>
       <p:sp>
         <p:nvSpPr>
@@ -8139,6 +8305,10 @@
             <a:prstDash val="solid"/>
           </a:ln>
         </p:spPr>
+        <p:txBody>
+          <a:bodyPr/>
+          <a:p/>
+        </p:txBody>
       </p:sp>
       <p:sp>
         <p:nvSpPr>
@@ -8159,6 +8329,10 @@
           </a:solidFill>
           <a:ln/>
         </p:spPr>
+        <p:txBody>
+          <a:bodyPr/>
+          <a:p/>
+        </p:txBody>
       </p:sp>
       <p:sp>
         <p:nvSpPr>
@@ -8306,6 +8480,10 @@
             <a:prstDash val="solid"/>
           </a:ln>
         </p:spPr>
+        <p:txBody>
+          <a:bodyPr/>
+          <a:p/>
+        </p:txBody>
       </p:sp>
       <p:sp>
         <p:nvSpPr>
@@ -8326,6 +8504,10 @@
           </a:solidFill>
           <a:ln/>
         </p:spPr>
+        <p:txBody>
+          <a:bodyPr/>
+          <a:p/>
+        </p:txBody>
       </p:sp>
       <p:sp>
         <p:nvSpPr>
@@ -8473,6 +8655,10 @@
             <a:prstDash val="solid"/>
           </a:ln>
         </p:spPr>
+        <p:txBody>
+          <a:bodyPr/>
+          <a:p/>
+        </p:txBody>
       </p:sp>
       <p:sp>
         <p:nvSpPr>
@@ -8493,6 +8679,10 @@
           </a:solidFill>
           <a:ln/>
         </p:spPr>
+        <p:txBody>
+          <a:bodyPr/>
+          <a:p/>
+        </p:txBody>
       </p:sp>
       <p:sp>
         <p:nvSpPr>
@@ -8640,6 +8830,10 @@
             <a:prstDash val="solid"/>
           </a:ln>
         </p:spPr>
+        <p:txBody>
+          <a:bodyPr/>
+          <a:p/>
+        </p:txBody>
       </p:sp>
       <p:sp>
         <p:nvSpPr>
@@ -8660,6 +8854,10 @@
           </a:solidFill>
           <a:ln/>
         </p:spPr>
+        <p:txBody>
+          <a:bodyPr/>
+          <a:p/>
+        </p:txBody>
       </p:sp>
       <p:sp>
         <p:nvSpPr>
@@ -8835,6 +9033,10 @@
             <a:prstDash val="solid"/>
           </a:ln>
         </p:spPr>
+        <p:txBody>
+          <a:bodyPr/>
+          <a:p/>
+        </p:txBody>
       </p:sp>
       <p:sp>
         <p:nvSpPr>
@@ -8858,6 +9060,10 @@
             <a:prstDash val="solid"/>
           </a:ln>
         </p:spPr>
+        <p:txBody>
+          <a:bodyPr/>
+          <a:p/>
+        </p:txBody>
       </p:sp>
       <p:sp>
         <p:nvSpPr>
@@ -8881,6 +9087,10 @@
             <a:prstDash val="solid"/>
           </a:ln>
         </p:spPr>
+        <p:txBody>
+          <a:bodyPr/>
+          <a:p/>
+        </p:txBody>
       </p:sp>
       <p:sp>
         <p:nvSpPr>
@@ -8904,6 +9114,10 @@
             <a:prstDash val="solid"/>
           </a:ln>
         </p:spPr>
+        <p:txBody>
+          <a:bodyPr/>
+          <a:p/>
+        </p:txBody>
       </p:sp>
       <p:sp>
         <p:nvSpPr>
@@ -8927,6 +9141,10 @@
             <a:prstDash val="solid"/>
           </a:ln>
         </p:spPr>
+        <p:txBody>
+          <a:bodyPr/>
+          <a:p/>
+        </p:txBody>
       </p:sp>
       <p:sp>
         <p:nvSpPr>
@@ -8950,6 +9168,10 @@
             <a:prstDash val="solid"/>
           </a:ln>
         </p:spPr>
+        <p:txBody>
+          <a:bodyPr/>
+          <a:p/>
+        </p:txBody>
       </p:sp>
       <p:sp>
         <p:nvSpPr>
@@ -8973,6 +9195,10 @@
             <a:prstDash val="solid"/>
           </a:ln>
         </p:spPr>
+        <p:txBody>
+          <a:bodyPr/>
+          <a:p/>
+        </p:txBody>
       </p:sp>
       <p:sp>
         <p:nvSpPr>
@@ -8996,6 +9222,10 @@
             <a:prstDash val="solid"/>
           </a:ln>
         </p:spPr>
+        <p:txBody>
+          <a:bodyPr/>
+          <a:p/>
+        </p:txBody>
       </p:sp>
       <p:sp>
         <p:nvSpPr>
@@ -9019,6 +9249,10 @@
             <a:prstDash val="solid"/>
           </a:ln>
         </p:spPr>
+        <p:txBody>
+          <a:bodyPr/>
+          <a:p/>
+        </p:txBody>
       </p:sp>
       <p:sp>
         <p:nvSpPr>
@@ -9042,6 +9276,10 @@
             <a:prstDash val="solid"/>
           </a:ln>
         </p:spPr>
+        <p:txBody>
+          <a:bodyPr/>
+          <a:p/>
+        </p:txBody>
       </p:sp>
       <p:sp>
         <p:nvSpPr>
@@ -9065,6 +9303,10 @@
             <a:prstDash val="solid"/>
           </a:ln>
         </p:spPr>
+        <p:txBody>
+          <a:bodyPr/>
+          <a:p/>
+        </p:txBody>
       </p:sp>
       <p:sp>
         <p:nvSpPr>
@@ -9088,6 +9330,10 @@
             <a:prstDash val="solid"/>
           </a:ln>
         </p:spPr>
+        <p:txBody>
+          <a:bodyPr/>
+          <a:p/>
+        </p:txBody>
       </p:sp>
       <p:sp>
         <p:nvSpPr>
@@ -9111,6 +9357,10 @@
             <a:prstDash val="solid"/>
           </a:ln>
         </p:spPr>
+        <p:txBody>
+          <a:bodyPr/>
+          <a:p/>
+        </p:txBody>
       </p:sp>
       <p:sp>
         <p:nvSpPr>
@@ -9134,6 +9384,10 @@
             <a:prstDash val="solid"/>
           </a:ln>
         </p:spPr>
+        <p:txBody>
+          <a:bodyPr/>
+          <a:p/>
+        </p:txBody>
       </p:sp>
       <p:sp>
         <p:nvSpPr>
@@ -9157,6 +9411,10 @@
             <a:prstDash val="solid"/>
           </a:ln>
         </p:spPr>
+        <p:txBody>
+          <a:bodyPr/>
+          <a:p/>
+        </p:txBody>
       </p:sp>
       <p:sp>
         <p:nvSpPr>
@@ -9180,6 +9438,10 @@
             <a:prstDash val="solid"/>
           </a:ln>
         </p:spPr>
+        <p:txBody>
+          <a:bodyPr/>
+          <a:p/>
+        </p:txBody>
       </p:sp>
       <p:sp>
         <p:nvSpPr>
@@ -9203,6 +9465,10 @@
             <a:prstDash val="solid"/>
           </a:ln>
         </p:spPr>
+        <p:txBody>
+          <a:bodyPr/>
+          <a:p/>
+        </p:txBody>
       </p:sp>
       <p:sp>
         <p:nvSpPr>
@@ -9226,6 +9492,10 @@
             <a:prstDash val="solid"/>
           </a:ln>
         </p:spPr>
+        <p:txBody>
+          <a:bodyPr/>
+          <a:p/>
+        </p:txBody>
       </p:sp>
       <p:sp>
         <p:nvSpPr>
@@ -9249,6 +9519,10 @@
             <a:prstDash val="solid"/>
           </a:ln>
         </p:spPr>
+        <p:txBody>
+          <a:bodyPr/>
+          <a:p/>
+        </p:txBody>
       </p:sp>
       <p:sp>
         <p:nvSpPr>
@@ -9272,6 +9546,10 @@
             <a:prstDash val="solid"/>
           </a:ln>
         </p:spPr>
+        <p:txBody>
+          <a:bodyPr/>
+          <a:p/>
+        </p:txBody>
       </p:sp>
       <p:sp>
         <p:nvSpPr>
@@ -9295,6 +9573,10 @@
             <a:prstDash val="solid"/>
           </a:ln>
         </p:spPr>
+        <p:txBody>
+          <a:bodyPr/>
+          <a:p/>
+        </p:txBody>
       </p:sp>
       <p:sp>
         <p:nvSpPr>
@@ -9318,6 +9600,10 @@
             <a:prstDash val="solid"/>
           </a:ln>
         </p:spPr>
+        <p:txBody>
+          <a:bodyPr/>
+          <a:p/>
+        </p:txBody>
       </p:sp>
       <p:sp>
         <p:nvSpPr>
@@ -9341,6 +9627,10 @@
             <a:prstDash val="solid"/>
           </a:ln>
         </p:spPr>
+        <p:txBody>
+          <a:bodyPr/>
+          <a:p/>
+        </p:txBody>
       </p:sp>
       <p:sp>
         <p:nvSpPr>
@@ -9364,6 +9654,10 @@
             <a:prstDash val="solid"/>
           </a:ln>
         </p:spPr>
+        <p:txBody>
+          <a:bodyPr/>
+          <a:p/>
+        </p:txBody>
       </p:sp>
       <p:sp>
         <p:nvSpPr>
@@ -9387,6 +9681,10 @@
             <a:prstDash val="solid"/>
           </a:ln>
         </p:spPr>
+        <p:txBody>
+          <a:bodyPr/>
+          <a:p/>
+        </p:txBody>
       </p:sp>
       <p:sp>
         <p:nvSpPr>
@@ -9448,6 +9746,10 @@
           </a:solidFill>
           <a:ln/>
         </p:spPr>
+        <p:txBody>
+          <a:bodyPr/>
+          <a:p/>
+        </p:txBody>
       </p:sp>
       <p:sp>
         <p:nvSpPr>
@@ -9595,6 +9897,10 @@
             <a:prstDash val="solid"/>
           </a:ln>
         </p:spPr>
+        <p:txBody>
+          <a:bodyPr/>
+          <a:p/>
+        </p:txBody>
       </p:sp>
       <p:sp>
         <p:nvSpPr>
@@ -9688,6 +9994,10 @@
           </a:solidFill>
           <a:ln/>
         </p:spPr>
+        <p:txBody>
+          <a:bodyPr/>
+          <a:p/>
+        </p:txBody>
       </p:sp>
       <p:sp>
         <p:nvSpPr>
@@ -9871,6 +10181,10 @@
             <a:prstDash val="solid"/>
           </a:ln>
         </p:spPr>
+        <p:txBody>
+          <a:bodyPr/>
+          <a:p/>
+        </p:txBody>
       </p:sp>
       <p:sp>
         <p:nvSpPr>
@@ -10076,6 +10390,10 @@
           </a:solidFill>
           <a:ln/>
         </p:spPr>
+        <p:txBody>
+          <a:bodyPr/>
+          <a:p/>
+        </p:txBody>
       </p:sp>
       <p:sp>
         <p:nvSpPr>
@@ -10456,6 +10774,10 @@
             <a:prstDash val="solid"/>
           </a:ln>
         </p:spPr>
+        <p:txBody>
+          <a:bodyPr/>
+          <a:p/>
+        </p:txBody>
       </p:sp>
       <p:sp>
         <p:nvSpPr>
@@ -10476,6 +10798,10 @@
           </a:solidFill>
           <a:ln/>
         </p:spPr>
+        <p:txBody>
+          <a:bodyPr/>
+          <a:p/>
+        </p:txBody>
       </p:sp>
       <p:sp>
         <p:nvSpPr>
@@ -10538,6 +10864,10 @@
             <a:prstDash val="solid"/>
           </a:ln>
         </p:spPr>
+        <p:txBody>
+          <a:bodyPr/>
+          <a:p/>
+        </p:txBody>
       </p:sp>
       <p:sp>
         <p:nvSpPr>
@@ -10558,6 +10888,10 @@
           </a:solidFill>
           <a:ln/>
         </p:spPr>
+        <p:txBody>
+          <a:bodyPr/>
+          <a:p/>
+        </p:txBody>
       </p:sp>
       <p:sp>
         <p:nvSpPr>
@@ -10620,6 +10954,10 @@
             <a:prstDash val="solid"/>
           </a:ln>
         </p:spPr>
+        <p:txBody>
+          <a:bodyPr/>
+          <a:p/>
+        </p:txBody>
       </p:sp>
       <p:sp>
         <p:nvSpPr>
@@ -10640,6 +10978,10 @@
           </a:solidFill>
           <a:ln/>
         </p:spPr>
+        <p:txBody>
+          <a:bodyPr/>
+          <a:p/>
+        </p:txBody>
       </p:sp>
       <p:sp>
         <p:nvSpPr>
@@ -10699,6 +11041,10 @@
           </a:solidFill>
           <a:ln/>
         </p:spPr>
+        <p:txBody>
+          <a:bodyPr/>
+          <a:p/>
+        </p:txBody>
       </p:sp>
       <p:sp>
         <p:nvSpPr>
@@ -10765,6 +11111,10 @@
             <a:prstDash val="solid"/>
           </a:ln>
         </p:spPr>
+        <p:txBody>
+          <a:bodyPr/>
+          <a:p/>
+        </p:txBody>
       </p:sp>
       <p:sp>
         <p:nvSpPr>
@@ -10878,6 +11228,10 @@
           </a:solidFill>
           <a:ln/>
         </p:spPr>
+        <p:txBody>
+          <a:bodyPr/>
+          <a:p/>
+        </p:txBody>
       </p:sp>
       <p:sp>
         <p:nvSpPr>
@@ -11061,6 +11415,10 @@
             <a:prstDash val="solid"/>
           </a:ln>
         </p:spPr>
+        <p:txBody>
+          <a:bodyPr/>
+          <a:p/>
+        </p:txBody>
       </p:sp>
       <p:sp>
         <p:nvSpPr>
@@ -11083,6 +11441,10 @@
           </a:solidFill>
           <a:ln/>
         </p:spPr>
+        <p:txBody>
+          <a:bodyPr/>
+          <a:p/>
+        </p:txBody>
       </p:sp>
       <p:sp>
         <p:nvSpPr>
@@ -11142,6 +11504,10 @@
           </a:solidFill>
           <a:ln/>
         </p:spPr>
+        <p:txBody>
+          <a:bodyPr/>
+          <a:p/>
+        </p:txBody>
       </p:sp>
       <p:sp>
         <p:nvSpPr>
@@ -11162,6 +11528,10 @@
           </a:solidFill>
           <a:ln/>
         </p:spPr>
+        <p:txBody>
+          <a:bodyPr/>
+          <a:p/>
+        </p:txBody>
       </p:sp>
       <p:sp>
         <p:nvSpPr>
@@ -11270,6 +11640,10 @@
             <a:prstDash val="solid"/>
           </a:ln>
         </p:spPr>
+        <p:txBody>
+          <a:bodyPr/>
+          <a:p/>
+        </p:txBody>
       </p:sp>
       <p:sp>
         <p:nvSpPr>
@@ -11292,6 +11666,10 @@
           </a:solidFill>
           <a:ln/>
         </p:spPr>
+        <p:txBody>
+          <a:bodyPr/>
+          <a:p/>
+        </p:txBody>
       </p:sp>
       <p:sp>
         <p:nvSpPr>
@@ -11354,6 +11732,10 @@
             <a:prstDash val="solid"/>
           </a:ln>
         </p:spPr>
+        <p:txBody>
+          <a:bodyPr/>
+          <a:p/>
+        </p:txBody>
       </p:sp>
       <p:sp>
         <p:nvSpPr>
@@ -11374,6 +11756,10 @@
           </a:solidFill>
           <a:ln/>
         </p:spPr>
+        <p:txBody>
+          <a:bodyPr/>
+          <a:p/>
+        </p:txBody>
       </p:sp>
       <p:sp>
         <p:nvSpPr>
@@ -11482,6 +11868,10 @@
             <a:prstDash val="solid"/>
           </a:ln>
         </p:spPr>
+        <p:txBody>
+          <a:bodyPr/>
+          <a:p/>
+        </p:txBody>
       </p:sp>
       <p:sp>
         <p:nvSpPr>
@@ -11504,6 +11894,10 @@
           </a:solidFill>
           <a:ln/>
         </p:spPr>
+        <p:txBody>
+          <a:bodyPr/>
+          <a:p/>
+        </p:txBody>
       </p:sp>
       <p:sp>
         <p:nvSpPr>
@@ -11565,6 +11959,10 @@
             <a:prstDash val="solid"/>
           </a:ln>
         </p:spPr>
+        <p:txBody>
+          <a:bodyPr/>
+          <a:p/>
+        </p:txBody>
       </p:sp>
       <p:sp>
         <p:nvSpPr>
@@ -11585,6 +11983,10 @@
           </a:solidFill>
           <a:ln/>
         </p:spPr>
+        <p:txBody>
+          <a:bodyPr/>
+          <a:p/>
+        </p:txBody>
       </p:sp>
       <p:sp>
         <p:nvSpPr>
@@ -11693,6 +12095,10 @@
             <a:prstDash val="solid"/>
           </a:ln>
         </p:spPr>
+        <p:txBody>
+          <a:bodyPr/>
+          <a:p/>
+        </p:txBody>
       </p:sp>
       <p:sp>
         <p:nvSpPr>
@@ -11715,6 +12121,10 @@
           </a:solidFill>
           <a:ln/>
         </p:spPr>
+        <p:txBody>
+          <a:bodyPr/>
+          <a:p/>
+        </p:txBody>
       </p:sp>
       <p:sp>
         <p:nvSpPr>
@@ -11776,6 +12186,10 @@
             <a:prstDash val="solid"/>
           </a:ln>
         </p:spPr>
+        <p:txBody>
+          <a:bodyPr/>
+          <a:p/>
+        </p:txBody>
       </p:sp>
       <p:sp>
         <p:nvSpPr>
@@ -11801,6 +12215,10 @@
             <a:prstDash val="solid"/>
           </a:ln>
         </p:spPr>
+        <p:txBody>
+          <a:bodyPr/>
+          <a:p/>
+        </p:txBody>
       </p:sp>
       <p:sp>
         <p:nvSpPr>
@@ -11909,6 +12327,10 @@
             <a:prstDash val="solid"/>
           </a:ln>
         </p:spPr>
+        <p:txBody>
+          <a:bodyPr/>
+          <a:p/>
+        </p:txBody>
       </p:sp>
       <p:sp>
         <p:nvSpPr>
@@ -12022,6 +12444,10 @@
           </a:solidFill>
           <a:ln/>
         </p:spPr>
+        <p:txBody>
+          <a:bodyPr/>
+          <a:p/>
+        </p:txBody>
       </p:sp>
       <p:sp>
         <p:nvSpPr>
@@ -12198,6 +12624,10 @@
           </a:solidFill>
           <a:ln/>
         </p:spPr>
+        <p:txBody>
+          <a:bodyPr/>
+          <a:p/>
+        </p:txBody>
       </p:sp>
       <p:sp>
         <p:nvSpPr>
@@ -12260,6 +12690,10 @@
           </a:solidFill>
           <a:ln/>
         </p:spPr>
+        <p:txBody>
+          <a:bodyPr/>
+          <a:p/>
+        </p:txBody>
       </p:sp>
       <p:sp>
         <p:nvSpPr>
@@ -12280,6 +12714,10 @@
           </a:solidFill>
           <a:ln/>
         </p:spPr>
+        <p:txBody>
+          <a:bodyPr/>
+          <a:p/>
+        </p:txBody>
       </p:sp>
       <p:sp>
         <p:nvSpPr>
@@ -12342,6 +12780,10 @@
           </a:solidFill>
           <a:ln/>
         </p:spPr>
+        <p:txBody>
+          <a:bodyPr/>
+          <a:p/>
+        </p:txBody>
       </p:sp>
       <p:sp>
         <p:nvSpPr>
@@ -12362,6 +12804,10 @@
           </a:solidFill>
           <a:ln/>
         </p:spPr>
+        <p:txBody>
+          <a:bodyPr/>
+          <a:p/>
+        </p:txBody>
       </p:sp>
       <p:sp>
         <p:nvSpPr>
@@ -12424,6 +12870,10 @@
           </a:solidFill>
           <a:ln/>
         </p:spPr>
+        <p:txBody>
+          <a:bodyPr/>
+          <a:p/>
+        </p:txBody>
       </p:sp>
       <p:sp>
         <p:nvSpPr>
@@ -12444,6 +12894,10 @@
           </a:solidFill>
           <a:ln/>
         </p:spPr>
+        <p:txBody>
+          <a:bodyPr/>
+          <a:p/>
+        </p:txBody>
       </p:sp>
       <p:sp>
         <p:nvSpPr>
@@ -12714,6 +13168,10 @@
             <a:prstDash val="solid"/>
           </a:ln>
         </p:spPr>
+        <p:txBody>
+          <a:bodyPr/>
+          <a:p/>
+        </p:txBody>
       </p:sp>
       <p:sp>
         <p:nvSpPr>
@@ -12827,6 +13285,10 @@
           </a:solidFill>
           <a:ln/>
         </p:spPr>
+        <p:txBody>
+          <a:bodyPr/>
+          <a:p/>
+        </p:txBody>
       </p:sp>
       <p:sp>
         <p:nvSpPr>
@@ -13010,6 +13472,10 @@
             <a:prstDash val="solid"/>
           </a:ln>
         </p:spPr>
+        <p:txBody>
+          <a:bodyPr/>
+          <a:p/>
+        </p:txBody>
       </p:sp>
       <p:sp>
         <p:nvSpPr>
@@ -13030,6 +13496,10 @@
           </a:solidFill>
           <a:ln/>
         </p:spPr>
+        <p:txBody>
+          <a:bodyPr/>
+          <a:p/>
+        </p:txBody>
       </p:sp>
       <p:sp>
         <p:nvSpPr>
@@ -13177,6 +13647,10 @@
             <a:prstDash val="solid"/>
           </a:ln>
         </p:spPr>
+        <p:txBody>
+          <a:bodyPr/>
+          <a:p/>
+        </p:txBody>
       </p:sp>
       <p:sp>
         <p:nvSpPr>
@@ -13197,6 +13671,10 @@
           </a:solidFill>
           <a:ln/>
         </p:spPr>
+        <p:txBody>
+          <a:bodyPr/>
+          <a:p/>
+        </p:txBody>
       </p:sp>
       <p:sp>
         <p:nvSpPr>
@@ -13344,6 +13822,10 @@
             <a:prstDash val="solid"/>
           </a:ln>
         </p:spPr>
+        <p:txBody>
+          <a:bodyPr/>
+          <a:p/>
+        </p:txBody>
       </p:sp>
       <p:sp>
         <p:nvSpPr>
@@ -13364,6 +13846,10 @@
           </a:solidFill>
           <a:ln/>
         </p:spPr>
+        <p:txBody>
+          <a:bodyPr/>
+          <a:p/>
+        </p:txBody>
       </p:sp>
       <p:sp>
         <p:nvSpPr>
@@ -13511,6 +13997,10 @@
             <a:prstDash val="solid"/>
           </a:ln>
         </p:spPr>
+        <p:txBody>
+          <a:bodyPr/>
+          <a:p/>
+        </p:txBody>
       </p:sp>
       <p:sp>
         <p:nvSpPr>
@@ -13624,6 +14114,10 @@
           </a:solidFill>
           <a:ln/>
         </p:spPr>
+        <p:txBody>
+          <a:bodyPr/>
+          <a:p/>
+        </p:txBody>
       </p:sp>
       <p:sp>
         <p:nvSpPr>
@@ -13807,6 +14301,10 @@
             <a:prstDash val="solid"/>
           </a:ln>
         </p:spPr>
+        <p:txBody>
+          <a:bodyPr/>
+          <a:p/>
+        </p:txBody>
       </p:sp>
       <p:pic>
         <p:nvPicPr>
@@ -13939,6 +14437,10 @@
             <a:prstDash val="solid"/>
           </a:ln>
         </p:spPr>
+        <p:txBody>
+          <a:bodyPr/>
+          <a:p/>
+        </p:txBody>
       </p:sp>
       <p:pic>
         <p:nvPicPr>
@@ -14071,6 +14573,10 @@
             <a:prstDash val="solid"/>
           </a:ln>
         </p:spPr>
+        <p:txBody>
+          <a:bodyPr/>
+          <a:p/>
+        </p:txBody>
       </p:sp>
       <p:pic>
         <p:nvPicPr>
@@ -14203,6 +14709,10 @@
             <a:prstDash val="solid"/>
           </a:ln>
         </p:spPr>
+        <p:txBody>
+          <a:bodyPr/>
+          <a:p/>
+        </p:txBody>
       </p:sp>
       <p:pic>
         <p:nvPicPr>
@@ -14335,6 +14845,10 @@
             <a:prstDash val="solid"/>
           </a:ln>
         </p:spPr>
+        <p:txBody>
+          <a:bodyPr/>
+          <a:p/>
+        </p:txBody>
       </p:sp>
       <p:pic>
         <p:nvPicPr>
@@ -14467,6 +14981,10 @@
             <a:prstDash val="solid"/>
           </a:ln>
         </p:spPr>
+        <p:txBody>
+          <a:bodyPr/>
+          <a:p/>
+        </p:txBody>
       </p:sp>
       <p:pic>
         <p:nvPicPr>
@@ -14626,6 +15144,10 @@
           </a:solidFill>
           <a:ln/>
         </p:spPr>
+        <p:txBody>
+          <a:bodyPr/>
+          <a:p/>
+        </p:txBody>
       </p:sp>
       <p:sp>
         <p:nvSpPr>
@@ -14809,6 +15331,10 @@
             <a:prstDash val="solid"/>
           </a:ln>
         </p:spPr>
+        <p:txBody>
+          <a:bodyPr/>
+          <a:p/>
+        </p:txBody>
       </p:sp>
       <p:sp>
         <p:nvSpPr>
@@ -14939,6 +15465,10 @@
             <a:prstDash val="solid"/>
           </a:ln>
         </p:spPr>
+        <p:txBody>
+          <a:bodyPr/>
+          <a:p/>
+        </p:txBody>
       </p:sp>
       <p:sp>
         <p:nvSpPr>
@@ -15069,6 +15599,10 @@
             <a:prstDash val="solid"/>
           </a:ln>
         </p:spPr>
+        <p:txBody>
+          <a:bodyPr/>
+          <a:p/>
+        </p:txBody>
       </p:sp>
       <p:sp>
         <p:nvSpPr>
@@ -15291,6 +15825,10 @@
             <a:prstDash val="solid"/>
           </a:ln>
         </p:spPr>
+        <p:txBody>
+          <a:bodyPr/>
+          <a:p/>
+        </p:txBody>
       </p:sp>
       <p:sp>
         <p:nvSpPr>
@@ -15404,6 +15942,10 @@
           </a:solidFill>
           <a:ln/>
         </p:spPr>
+        <p:txBody>
+          <a:bodyPr/>
+          <a:p/>
+        </p:txBody>
       </p:sp>
       <p:sp>
         <p:nvSpPr>
@@ -15582,6 +16124,10 @@
           </a:solidFill>
           <a:ln/>
         </p:spPr>
+        <p:txBody>
+          <a:bodyPr/>
+          <a:p/>
+        </p:txBody>
       </p:sp>
       <p:sp>
         <p:nvSpPr>
@@ -15643,6 +16189,10 @@
           </a:solidFill>
           <a:ln/>
         </p:spPr>
+        <p:txBody>
+          <a:bodyPr/>
+          <a:p/>
+        </p:txBody>
       </p:sp>
       <p:sp>
         <p:nvSpPr>
@@ -15704,6 +16254,10 @@
           </a:solidFill>
           <a:ln/>
         </p:spPr>
+        <p:txBody>
+          <a:bodyPr/>
+          <a:p/>
+        </p:txBody>
       </p:sp>
       <p:sp>
         <p:nvSpPr>
@@ -15765,6 +16319,10 @@
           </a:solidFill>
           <a:ln/>
         </p:spPr>
+        <p:txBody>
+          <a:bodyPr/>
+          <a:p/>
+        </p:txBody>
       </p:sp>
       <p:sp>
         <p:nvSpPr>
@@ -15826,6 +16384,10 @@
           </a:solidFill>
           <a:ln/>
         </p:spPr>
+        <p:txBody>
+          <a:bodyPr/>
+          <a:p/>
+        </p:txBody>
       </p:sp>
       <p:sp>
         <p:nvSpPr>
@@ -15887,6 +16449,10 @@
           </a:solidFill>
           <a:ln/>
         </p:spPr>
+        <p:txBody>
+          <a:bodyPr/>
+          <a:p/>
+        </p:txBody>
       </p:sp>
       <p:sp>
         <p:nvSpPr>
@@ -15946,6 +16512,10 @@
           </a:solidFill>
           <a:ln/>
         </p:spPr>
+        <p:txBody>
+          <a:bodyPr/>
+          <a:p/>
+        </p:txBody>
       </p:sp>
       <p:sp>
         <p:nvSpPr>
@@ -16005,6 +16575,10 @@
           </a:solidFill>
           <a:ln/>
         </p:spPr>
+        <p:txBody>
+          <a:bodyPr/>
+          <a:p/>
+        </p:txBody>
       </p:sp>
       <p:sp>
         <p:nvSpPr>
@@ -16064,6 +16638,10 @@
           </a:solidFill>
           <a:ln/>
         </p:spPr>
+        <p:txBody>
+          <a:bodyPr/>
+          <a:p/>
+        </p:txBody>
       </p:sp>
       <p:sp>
         <p:nvSpPr>
@@ -16123,6 +16701,10 @@
           </a:solidFill>
           <a:ln/>
         </p:spPr>
+        <p:txBody>
+          <a:bodyPr/>
+          <a:p/>
+        </p:txBody>
       </p:sp>
       <p:sp>
         <p:nvSpPr>
@@ -16182,6 +16764,10 @@
           </a:solidFill>
           <a:ln/>
         </p:spPr>
+        <p:txBody>
+          <a:bodyPr/>
+          <a:p/>
+        </p:txBody>
       </p:sp>
       <p:sp>
         <p:nvSpPr>
@@ -16241,6 +16827,10 @@
           </a:solidFill>
           <a:ln/>
         </p:spPr>
+        <p:txBody>
+          <a:bodyPr/>
+          <a:p/>
+        </p:txBody>
       </p:sp>
       <p:sp>
         <p:nvSpPr>
@@ -16307,6 +16897,10 @@
             <a:prstDash val="solid"/>
           </a:ln>
         </p:spPr>
+        <p:txBody>
+          <a:bodyPr/>
+          <a:p/>
+        </p:txBody>
       </p:sp>
       <p:sp>
         <p:nvSpPr>
@@ -16420,6 +17014,10 @@
           </a:solidFill>
           <a:ln/>
         </p:spPr>
+        <p:txBody>
+          <a:bodyPr/>
+          <a:p/>
+        </p:txBody>
       </p:sp>
       <p:sp>
         <p:nvSpPr>
@@ -16601,6 +17199,10 @@
             <a:prstDash val="solid"/>
           </a:ln>
         </p:spPr>
+        <p:txBody>
+          <a:bodyPr/>
+          <a:p/>
+        </p:txBody>
       </p:sp>
       <p:sp>
         <p:nvSpPr>
@@ -16665,6 +17267,10 @@
             <a:prstDash val="solid"/>
           </a:ln>
         </p:spPr>
+        <p:txBody>
+          <a:bodyPr/>
+          <a:p/>
+        </p:txBody>
       </p:sp>
       <p:sp>
         <p:nvSpPr>
@@ -16729,6 +17335,10 @@
             <a:prstDash val="solid"/>
           </a:ln>
         </p:spPr>
+        <p:txBody>
+          <a:bodyPr/>
+          <a:p/>
+        </p:txBody>
       </p:sp>
       <p:sp>
         <p:nvSpPr>
@@ -17019,6 +17629,10 @@
           </a:solidFill>
           <a:ln/>
         </p:spPr>
+        <p:txBody>
+          <a:bodyPr/>
+          <a:p/>
+        </p:txBody>
       </p:sp>
       <p:sp>
         <p:nvSpPr>
@@ -17202,6 +17816,10 @@
             <a:prstDash val="solid"/>
           </a:ln>
         </p:spPr>
+        <p:txBody>
+          <a:bodyPr/>
+          <a:p/>
+        </p:txBody>
       </p:sp>
       <p:sp>
         <p:nvSpPr>
@@ -17222,6 +17840,10 @@
           </a:solidFill>
           <a:ln/>
         </p:spPr>
+        <p:txBody>
+          <a:bodyPr/>
+          <a:p/>
+        </p:txBody>
       </p:sp>
       <p:sp>
         <p:nvSpPr>
@@ -17369,6 +17991,10 @@
             <a:prstDash val="solid"/>
           </a:ln>
         </p:spPr>
+        <p:txBody>
+          <a:bodyPr/>
+          <a:p/>
+        </p:txBody>
       </p:sp>
       <p:sp>
         <p:nvSpPr>
@@ -17389,6 +18015,10 @@
           </a:solidFill>
           <a:ln/>
         </p:spPr>
+        <p:txBody>
+          <a:bodyPr/>
+          <a:p/>
+        </p:txBody>
       </p:sp>
       <p:sp>
         <p:nvSpPr>
@@ -17536,6 +18166,10 @@
             <a:prstDash val="solid"/>
           </a:ln>
         </p:spPr>
+        <p:txBody>
+          <a:bodyPr/>
+          <a:p/>
+        </p:txBody>
       </p:sp>
       <p:sp>
         <p:nvSpPr>
@@ -17556,6 +18190,10 @@
           </a:solidFill>
           <a:ln/>
         </p:spPr>
+        <p:txBody>
+          <a:bodyPr/>
+          <a:p/>
+        </p:txBody>
       </p:sp>
       <p:sp>
         <p:nvSpPr>
@@ -17703,6 +18341,10 @@
             <a:prstDash val="solid"/>
           </a:ln>
         </p:spPr>
+        <p:txBody>
+          <a:bodyPr/>
+          <a:p/>
+        </p:txBody>
       </p:sp>
       <p:sp>
         <p:nvSpPr>
@@ -17723,6 +18365,10 @@
           </a:solidFill>
           <a:ln/>
         </p:spPr>
+        <p:txBody>
+          <a:bodyPr/>
+          <a:p/>
+        </p:txBody>
       </p:sp>
       <p:sp>
         <p:nvSpPr>
@@ -17897,6 +18543,10 @@
           </a:solidFill>
           <a:ln/>
         </p:spPr>
+        <p:txBody>
+          <a:bodyPr/>
+          <a:p/>
+        </p:txBody>
       </p:sp>
       <p:sp>
         <p:nvSpPr>
@@ -18080,6 +18730,10 @@
             <a:prstDash val="solid"/>
           </a:ln>
         </p:spPr>
+        <p:txBody>
+          <a:bodyPr/>
+          <a:p/>
+        </p:txBody>
       </p:sp>
       <p:sp>
         <p:nvSpPr>
@@ -18212,6 +18866,10 @@
             <a:prstDash val="solid"/>
           </a:ln>
         </p:spPr>
+        <p:txBody>
+          <a:bodyPr/>
+          <a:p/>
+        </p:txBody>
       </p:sp>
       <p:sp>
         <p:nvSpPr>
@@ -18344,6 +19002,10 @@
             <a:prstDash val="solid"/>
           </a:ln>
         </p:spPr>
+        <p:txBody>
+          <a:bodyPr/>
+          <a:p/>
+        </p:txBody>
       </p:sp>
       <p:sp>
         <p:nvSpPr>
@@ -18476,6 +19138,10 @@
             <a:prstDash val="solid"/>
           </a:ln>
         </p:spPr>
+        <p:txBody>
+          <a:bodyPr/>
+          <a:p/>
+        </p:txBody>
       </p:sp>
       <p:sp>
         <p:nvSpPr>
@@ -18608,6 +19274,10 @@
             <a:prstDash val="solid"/>
           </a:ln>
         </p:spPr>
+        <p:txBody>
+          <a:bodyPr/>
+          <a:p/>
+        </p:txBody>
       </p:sp>
       <p:sp>
         <p:nvSpPr>
@@ -18698,6 +19368,10 @@
             <a:prstDash val="solid"/>
           </a:ln>
         </p:spPr>
+        <p:txBody>
+          <a:bodyPr/>
+          <a:p/>
+        </p:txBody>
       </p:sp>
       <p:sp>
         <p:nvSpPr>
@@ -18854,6 +19528,10 @@
           </a:solidFill>
           <a:ln/>
         </p:spPr>
+        <p:txBody>
+          <a:bodyPr/>
+          <a:p/>
+        </p:txBody>
       </p:sp>
       <p:sp>
         <p:nvSpPr>
@@ -19199,6 +19877,10 @@
             <a:prstDash val="solid"/>
           </a:ln>
         </p:spPr>
+        <p:txBody>
+          <a:bodyPr/>
+          <a:p/>
+        </p:txBody>
       </p:sp>
       <p:sp>
         <p:nvSpPr>
@@ -19312,6 +19994,10 @@
           </a:solidFill>
           <a:ln/>
         </p:spPr>
+        <p:txBody>
+          <a:bodyPr/>
+          <a:p/>
+        </p:txBody>
       </p:sp>
       <p:sp>
         <p:nvSpPr>
@@ -19495,6 +20181,10 @@
             <a:prstDash val="solid"/>
           </a:ln>
         </p:spPr>
+        <p:txBody>
+          <a:bodyPr/>
+          <a:p/>
+        </p:txBody>
       </p:sp>
       <p:sp>
         <p:nvSpPr>
@@ -19646,6 +20336,10 @@
             <a:prstDash val="solid"/>
           </a:ln>
         </p:spPr>
+        <p:txBody>
+          <a:bodyPr/>
+          <a:p/>
+        </p:txBody>
       </p:sp>
       <p:sp>
         <p:nvSpPr>
@@ -19797,6 +20491,10 @@
             <a:prstDash val="solid"/>
           </a:ln>
         </p:spPr>
+        <p:txBody>
+          <a:bodyPr/>
+          <a:p/>
+        </p:txBody>
       </p:sp>
       <p:sp>
         <p:nvSpPr>
@@ -19910,6 +20608,10 @@
           </a:solidFill>
           <a:ln/>
         </p:spPr>
+        <p:txBody>
+          <a:bodyPr/>
+          <a:p/>
+        </p:txBody>
       </p:sp>
       <p:sp>
         <p:nvSpPr>
@@ -20054,6 +20756,10 @@
             <a:prstDash val="solid"/>
           </a:ln>
         </p:spPr>
+        <p:txBody>
+          <a:bodyPr/>
+          <a:p/>
+        </p:txBody>
       </p:sp>
       <p:sp>
         <p:nvSpPr>
@@ -20074,6 +20780,10 @@
           </a:solidFill>
           <a:ln/>
         </p:spPr>
+        <p:txBody>
+          <a:bodyPr/>
+          <a:p/>
+        </p:txBody>
       </p:sp>
       <p:sp>
         <p:nvSpPr>
@@ -20221,6 +20931,10 @@
             <a:prstDash val="solid"/>
           </a:ln>
         </p:spPr>
+        <p:txBody>
+          <a:bodyPr/>
+          <a:p/>
+        </p:txBody>
       </p:sp>
       <p:sp>
         <p:nvSpPr>
@@ -20241,6 +20955,10 @@
           </a:solidFill>
           <a:ln/>
         </p:spPr>
+        <p:txBody>
+          <a:bodyPr/>
+          <a:p/>
+        </p:txBody>
       </p:sp>
       <p:sp>
         <p:nvSpPr>
@@ -20388,6 +21106,10 @@
             <a:prstDash val="solid"/>
           </a:ln>
         </p:spPr>
+        <p:txBody>
+          <a:bodyPr/>
+          <a:p/>
+        </p:txBody>
       </p:sp>
       <p:sp>
         <p:nvSpPr>
@@ -20408,6 +21130,10 @@
           </a:solidFill>
           <a:ln/>
         </p:spPr>
+        <p:txBody>
+          <a:bodyPr/>
+          <a:p/>
+        </p:txBody>
       </p:sp>
       <p:sp>
         <p:nvSpPr>
@@ -20555,6 +21281,10 @@
             <a:prstDash val="solid"/>
           </a:ln>
         </p:spPr>
+        <p:txBody>
+          <a:bodyPr/>
+          <a:p/>
+        </p:txBody>
       </p:sp>
       <p:sp>
         <p:nvSpPr>
@@ -20575,6 +21305,10 @@
           </a:solidFill>
           <a:ln/>
         </p:spPr>
+        <p:txBody>
+          <a:bodyPr/>
+          <a:p/>
+        </p:txBody>
       </p:sp>
       <p:sp>
         <p:nvSpPr>
@@ -20765,6 +21499,10 @@
             <a:prstDash val="solid"/>
           </a:ln>
         </p:spPr>
+        <p:txBody>
+          <a:bodyPr/>
+          <a:p/>
+        </p:txBody>
       </p:sp>
       <p:sp>
         <p:nvSpPr>
@@ -20788,6 +21526,10 @@
             <a:prstDash val="solid"/>
           </a:ln>
         </p:spPr>
+        <p:txBody>
+          <a:bodyPr/>
+          <a:p/>
+        </p:txBody>
       </p:sp>
       <p:sp>
         <p:nvSpPr>
@@ -20811,6 +21553,10 @@
             <a:prstDash val="solid"/>
           </a:ln>
         </p:spPr>
+        <p:txBody>
+          <a:bodyPr/>
+          <a:p/>
+        </p:txBody>
       </p:sp>
       <p:sp>
         <p:nvSpPr>
@@ -20834,6 +21580,10 @@
             <a:prstDash val="solid"/>
           </a:ln>
         </p:spPr>
+        <p:txBody>
+          <a:bodyPr/>
+          <a:p/>
+        </p:txBody>
       </p:sp>
       <p:sp>
         <p:nvSpPr>
@@ -20857,6 +21607,10 @@
             <a:prstDash val="solid"/>
           </a:ln>
         </p:spPr>
+        <p:txBody>
+          <a:bodyPr/>
+          <a:p/>
+        </p:txBody>
       </p:sp>
       <p:sp>
         <p:nvSpPr>
@@ -20880,6 +21634,10 @@
             <a:prstDash val="solid"/>
           </a:ln>
         </p:spPr>
+        <p:txBody>
+          <a:bodyPr/>
+          <a:p/>
+        </p:txBody>
       </p:sp>
       <p:sp>
         <p:nvSpPr>
@@ -20903,6 +21661,10 @@
             <a:prstDash val="solid"/>
           </a:ln>
         </p:spPr>
+        <p:txBody>
+          <a:bodyPr/>
+          <a:p/>
+        </p:txBody>
       </p:sp>
       <p:sp>
         <p:nvSpPr>
@@ -20926,6 +21688,10 @@
             <a:prstDash val="solid"/>
           </a:ln>
         </p:spPr>
+        <p:txBody>
+          <a:bodyPr/>
+          <a:p/>
+        </p:txBody>
       </p:sp>
       <p:sp>
         <p:nvSpPr>
@@ -20949,6 +21715,10 @@
             <a:prstDash val="solid"/>
           </a:ln>
         </p:spPr>
+        <p:txBody>
+          <a:bodyPr/>
+          <a:p/>
+        </p:txBody>
       </p:sp>
       <p:sp>
         <p:nvSpPr>
@@ -20972,6 +21742,10 @@
             <a:prstDash val="solid"/>
           </a:ln>
         </p:spPr>
+        <p:txBody>
+          <a:bodyPr/>
+          <a:p/>
+        </p:txBody>
       </p:sp>
       <p:sp>
         <p:nvSpPr>
@@ -20995,6 +21769,10 @@
             <a:prstDash val="solid"/>
           </a:ln>
         </p:spPr>
+        <p:txBody>
+          <a:bodyPr/>
+          <a:p/>
+        </p:txBody>
       </p:sp>
       <p:sp>
         <p:nvSpPr>
@@ -21018,6 +21796,10 @@
             <a:prstDash val="solid"/>
           </a:ln>
         </p:spPr>
+        <p:txBody>
+          <a:bodyPr/>
+          <a:p/>
+        </p:txBody>
       </p:sp>
       <p:sp>
         <p:nvSpPr>
@@ -21041,6 +21823,10 @@
             <a:prstDash val="solid"/>
           </a:ln>
         </p:spPr>
+        <p:txBody>
+          <a:bodyPr/>
+          <a:p/>
+        </p:txBody>
       </p:sp>
       <p:sp>
         <p:nvSpPr>
@@ -21064,6 +21850,10 @@
             <a:prstDash val="solid"/>
           </a:ln>
         </p:spPr>
+        <p:txBody>
+          <a:bodyPr/>
+          <a:p/>
+        </p:txBody>
       </p:sp>
       <p:sp>
         <p:nvSpPr>
@@ -21087,6 +21877,10 @@
             <a:prstDash val="solid"/>
           </a:ln>
         </p:spPr>
+        <p:txBody>
+          <a:bodyPr/>
+          <a:p/>
+        </p:txBody>
       </p:sp>
       <p:sp>
         <p:nvSpPr>
@@ -21110,6 +21904,10 @@
             <a:prstDash val="solid"/>
           </a:ln>
         </p:spPr>
+        <p:txBody>
+          <a:bodyPr/>
+          <a:p/>
+        </p:txBody>
       </p:sp>
       <p:sp>
         <p:nvSpPr>
@@ -21133,6 +21931,10 @@
             <a:prstDash val="solid"/>
           </a:ln>
         </p:spPr>
+        <p:txBody>
+          <a:bodyPr/>
+          <a:p/>
+        </p:txBody>
       </p:sp>
       <p:sp>
         <p:nvSpPr>
@@ -21156,6 +21958,10 @@
             <a:prstDash val="solid"/>
           </a:ln>
         </p:spPr>
+        <p:txBody>
+          <a:bodyPr/>
+          <a:p/>
+        </p:txBody>
       </p:sp>
       <p:sp>
         <p:nvSpPr>
@@ -21179,6 +21985,10 @@
             <a:prstDash val="solid"/>
           </a:ln>
         </p:spPr>
+        <p:txBody>
+          <a:bodyPr/>
+          <a:p/>
+        </p:txBody>
       </p:sp>
       <p:sp>
         <p:nvSpPr>
@@ -21202,6 +22012,10 @@
             <a:prstDash val="solid"/>
           </a:ln>
         </p:spPr>
+        <p:txBody>
+          <a:bodyPr/>
+          <a:p/>
+        </p:txBody>
       </p:sp>
       <p:sp>
         <p:nvSpPr>
@@ -21225,6 +22039,10 @@
             <a:prstDash val="solid"/>
           </a:ln>
         </p:spPr>
+        <p:txBody>
+          <a:bodyPr/>
+          <a:p/>
+        </p:txBody>
       </p:sp>
       <p:sp>
         <p:nvSpPr>
@@ -21248,6 +22066,10 @@
             <a:prstDash val="solid"/>
           </a:ln>
         </p:spPr>
+        <p:txBody>
+          <a:bodyPr/>
+          <a:p/>
+        </p:txBody>
       </p:sp>
       <p:sp>
         <p:nvSpPr>
@@ -21271,6 +22093,10 @@
             <a:prstDash val="solid"/>
           </a:ln>
         </p:spPr>
+        <p:txBody>
+          <a:bodyPr/>
+          <a:p/>
+        </p:txBody>
       </p:sp>
       <p:sp>
         <p:nvSpPr>
@@ -21294,6 +22120,10 @@
             <a:prstDash val="solid"/>
           </a:ln>
         </p:spPr>
+        <p:txBody>
+          <a:bodyPr/>
+          <a:p/>
+        </p:txBody>
       </p:sp>
       <p:sp>
         <p:nvSpPr>
@@ -21317,6 +22147,10 @@
             <a:prstDash val="solid"/>
           </a:ln>
         </p:spPr>
+        <p:txBody>
+          <a:bodyPr/>
+          <a:p/>
+        </p:txBody>
       </p:sp>
       <p:sp>
         <p:nvSpPr>
@@ -21378,6 +22212,10 @@
           </a:solidFill>
           <a:ln/>
         </p:spPr>
+        <p:txBody>
+          <a:bodyPr/>
+          <a:p/>
+        </p:txBody>
       </p:sp>
       <p:sp>
         <p:nvSpPr>
@@ -21525,6 +22363,10 @@
             <a:prstDash val="solid"/>
           </a:ln>
         </p:spPr>
+        <p:txBody>
+          <a:bodyPr/>
+          <a:p/>
+        </p:txBody>
       </p:sp>
       <p:sp>
         <p:nvSpPr>
@@ -21618,6 +22460,10 @@
           </a:solidFill>
           <a:ln/>
         </p:spPr>
+        <p:txBody>
+          <a:bodyPr/>
+          <a:p/>
+        </p:txBody>
       </p:sp>
       <p:sp>
         <p:nvSpPr>
@@ -21801,6 +22647,10 @@
             <a:prstDash val="solid"/>
           </a:ln>
         </p:spPr>
+        <p:txBody>
+          <a:bodyPr/>
+          <a:p/>
+        </p:txBody>
       </p:sp>
       <p:sp>
         <p:nvSpPr>
@@ -21933,6 +22783,10 @@
             <a:prstDash val="solid"/>
           </a:ln>
         </p:spPr>
+        <p:txBody>
+          <a:bodyPr/>
+          <a:p/>
+        </p:txBody>
       </p:sp>
       <p:sp>
         <p:nvSpPr>
@@ -22065,6 +22919,10 @@
             <a:prstDash val="solid"/>
           </a:ln>
         </p:spPr>
+        <p:txBody>
+          <a:bodyPr/>
+          <a:p/>
+        </p:txBody>
       </p:sp>
       <p:sp>
         <p:nvSpPr>
@@ -22197,6 +23055,10 @@
             <a:prstDash val="solid"/>
           </a:ln>
         </p:spPr>
+        <p:txBody>
+          <a:bodyPr/>
+          <a:p/>
+        </p:txBody>
       </p:sp>
       <p:sp>
         <p:nvSpPr>
@@ -22329,6 +23191,10 @@
             <a:prstDash val="solid"/>
           </a:ln>
         </p:spPr>
+        <p:txBody>
+          <a:bodyPr/>
+          <a:p/>
+        </p:txBody>
       </p:sp>
       <p:sp>
         <p:nvSpPr>
@@ -22442,6 +23308,10 @@
           </a:solidFill>
           <a:ln/>
         </p:spPr>
+        <p:txBody>
+          <a:bodyPr/>
+          <a:p/>
+        </p:txBody>
       </p:sp>
       <p:sp>
         <p:nvSpPr>
@@ -22649,6 +23519,10 @@
             <a:prstDash val="solid"/>
           </a:ln>
         </p:spPr>
+        <p:txBody>
+          <a:bodyPr/>
+          <a:p/>
+        </p:txBody>
       </p:sp>
       <p:sp>
         <p:nvSpPr>
@@ -22821,6 +23695,10 @@
             <a:prstDash val="solid"/>
           </a:ln>
         </p:spPr>
+        <p:txBody>
+          <a:bodyPr/>
+          <a:p/>
+        </p:txBody>
       </p:sp>
       <p:pic>
         <p:nvPicPr>
@@ -22899,6 +23777,10 @@
           </a:solidFill>
           <a:ln/>
         </p:spPr>
+        <p:txBody>
+          <a:bodyPr/>
+          <a:p/>
+        </p:txBody>
       </p:sp>
       <p:sp>
         <p:nvSpPr>
@@ -23082,6 +23964,10 @@
             <a:prstDash val="solid"/>
           </a:ln>
         </p:spPr>
+        <p:txBody>
+          <a:bodyPr/>
+          <a:p/>
+        </p:txBody>
       </p:sp>
       <p:sp>
         <p:nvSpPr>
@@ -23172,6 +24058,10 @@
             <a:prstDash val="solid"/>
           </a:ln>
         </p:spPr>
+        <p:txBody>
+          <a:bodyPr/>
+          <a:p/>
+        </p:txBody>
       </p:sp>
       <p:sp>
         <p:nvSpPr>
@@ -23262,6 +24152,10 @@
             <a:prstDash val="solid"/>
           </a:ln>
         </p:spPr>
+        <p:txBody>
+          <a:bodyPr/>
+          <a:p/>
+        </p:txBody>
       </p:sp>
       <p:sp>
         <p:nvSpPr>
@@ -23475,6 +24369,10 @@
             <a:prstDash val="solid"/>
           </a:ln>
         </p:spPr>
+        <p:txBody>
+          <a:bodyPr/>
+          <a:p/>
+        </p:txBody>
       </p:sp>
       <p:sp>
         <p:nvSpPr>
@@ -23592,6 +24490,10 @@
           </a:solidFill>
           <a:ln/>
         </p:spPr>
+        <p:txBody>
+          <a:bodyPr/>
+          <a:p/>
+        </p:txBody>
       </p:sp>
       <p:sp>
         <p:nvSpPr>
@@ -23980,6 +24882,10 @@
             <a:prstDash val="solid"/>
           </a:ln>
         </p:spPr>
+        <p:txBody>
+          <a:bodyPr/>
+          <a:p/>
+        </p:txBody>
       </p:sp>
       <p:sp>
         <p:nvSpPr>
@@ -24085,6 +24991,10 @@
             <a:prstDash val="solid"/>
           </a:ln>
         </p:spPr>
+        <p:txBody>
+          <a:bodyPr/>
+          <a:p/>
+        </p:txBody>
       </p:sp>
       <p:sp>
         <p:nvSpPr>
@@ -24190,6 +25100,10 @@
             <a:prstDash val="solid"/>
           </a:ln>
         </p:spPr>
+        <p:txBody>
+          <a:bodyPr/>
+          <a:p/>
+        </p:txBody>
       </p:sp>
       <p:sp>
         <p:nvSpPr>
@@ -24295,6 +25209,10 @@
             <a:prstDash val="solid"/>
           </a:ln>
         </p:spPr>
+        <p:txBody>
+          <a:bodyPr/>
+          <a:p/>
+        </p:txBody>
       </p:sp>
       <p:sp>
         <p:nvSpPr>
@@ -24400,6 +25318,10 @@
             <a:prstDash val="solid"/>
           </a:ln>
         </p:spPr>
+        <p:txBody>
+          <a:bodyPr/>
+          <a:p/>
+        </p:txBody>
       </p:sp>
       <p:sp>
         <p:nvSpPr>
@@ -24505,6 +25427,10 @@
             <a:prstDash val="solid"/>
           </a:ln>
         </p:spPr>
+        <p:txBody>
+          <a:bodyPr/>
+          <a:p/>
+        </p:txBody>
       </p:sp>
       <p:sp>
         <p:nvSpPr>
@@ -24610,6 +25536,10 @@
             <a:prstDash val="solid"/>
           </a:ln>
         </p:spPr>
+        <p:txBody>
+          <a:bodyPr/>
+          <a:p/>
+        </p:txBody>
       </p:sp>
       <p:sp>
         <p:nvSpPr>
@@ -24723,6 +25653,10 @@
           </a:solidFill>
           <a:ln/>
         </p:spPr>
+        <p:txBody>
+          <a:bodyPr/>
+          <a:p/>
+        </p:txBody>
       </p:sp>
       <p:sp>
         <p:nvSpPr>
@@ -24904,6 +25838,10 @@
             <a:prstDash val="solid"/>
           </a:ln>
         </p:spPr>
+        <p:txBody>
+          <a:bodyPr/>
+          <a:p/>
+        </p:txBody>
       </p:sp>
       <p:sp>
         <p:nvSpPr>
@@ -24926,6 +25864,10 @@
             <a:prstDash val="solid"/>
           </a:ln>
         </p:spPr>
+        <p:txBody>
+          <a:bodyPr/>
+          <a:p/>
+        </p:txBody>
       </p:sp>
       <p:sp>
         <p:nvSpPr>
@@ -24949,6 +25891,10 @@
             <a:prstDash val="solid"/>
           </a:ln>
         </p:spPr>
+        <p:txBody>
+          <a:bodyPr/>
+          <a:p/>
+        </p:txBody>
       </p:sp>
       <p:sp>
         <p:nvSpPr>
@@ -25011,6 +25957,10 @@
             <a:prstDash val="solid"/>
           </a:ln>
         </p:spPr>
+        <p:txBody>
+          <a:bodyPr/>
+          <a:p/>
+        </p:txBody>
       </p:sp>
       <p:sp>
         <p:nvSpPr>
@@ -25073,6 +26023,10 @@
             <a:prstDash val="solid"/>
           </a:ln>
         </p:spPr>
+        <p:txBody>
+          <a:bodyPr/>
+          <a:p/>
+        </p:txBody>
       </p:sp>
       <p:sp>
         <p:nvSpPr>
@@ -25135,6 +26089,10 @@
             <a:prstDash val="solid"/>
           </a:ln>
         </p:spPr>
+        <p:txBody>
+          <a:bodyPr/>
+          <a:p/>
+        </p:txBody>
       </p:sp>
       <p:sp>
         <p:nvSpPr>
@@ -25197,6 +26155,10 @@
             <a:prstDash val="solid"/>
           </a:ln>
         </p:spPr>
+        <p:txBody>
+          <a:bodyPr/>
+          <a:p/>
+        </p:txBody>
       </p:sp>
       <p:sp>
         <p:nvSpPr>
@@ -25259,6 +26221,10 @@
             <a:prstDash val="solid"/>
           </a:ln>
         </p:spPr>
+        <p:txBody>
+          <a:bodyPr/>
+          <a:p/>
+        </p:txBody>
       </p:sp>
       <p:sp>
         <p:nvSpPr>
@@ -25321,6 +26287,10 @@
             <a:prstDash val="solid"/>
           </a:ln>
         </p:spPr>
+        <p:txBody>
+          <a:bodyPr/>
+          <a:p/>
+        </p:txBody>
       </p:sp>
       <p:sp>
         <p:nvSpPr>
@@ -25383,6 +26353,10 @@
             <a:prstDash val="solid"/>
           </a:ln>
         </p:spPr>
+        <p:txBody>
+          <a:bodyPr/>
+          <a:p/>
+        </p:txBody>
       </p:sp>
       <p:sp>
         <p:nvSpPr>
@@ -25445,6 +26419,10 @@
             <a:prstDash val="solid"/>
           </a:ln>
         </p:spPr>
+        <p:txBody>
+          <a:bodyPr/>
+          <a:p/>
+        </p:txBody>
       </p:sp>
       <p:sp>
         <p:nvSpPr>
@@ -25507,6 +26485,10 @@
             <a:prstDash val="solid"/>
           </a:ln>
         </p:spPr>
+        <p:txBody>
+          <a:bodyPr/>
+          <a:p/>
+        </p:txBody>
       </p:sp>
       <p:sp>
         <p:nvSpPr>
@@ -25569,6 +26551,10 @@
             <a:prstDash val="solid"/>
           </a:ln>
         </p:spPr>
+        <p:txBody>
+          <a:bodyPr/>
+          <a:p/>
+        </p:txBody>
       </p:sp>
       <p:sp>
         <p:nvSpPr>
@@ -25631,6 +26617,10 @@
             <a:prstDash val="solid"/>
           </a:ln>
         </p:spPr>
+        <p:txBody>
+          <a:bodyPr/>
+          <a:p/>
+        </p:txBody>
       </p:sp>
       <p:sp>
         <p:nvSpPr>
@@ -25692,6 +26682,10 @@
             <a:prstDash val="dash"/>
           </a:ln>
         </p:spPr>
+        <p:txBody>
+          <a:bodyPr/>
+          <a:p/>
+        </p:txBody>
       </p:sp>
       <p:sp>
         <p:nvSpPr>
@@ -25795,6 +26789,10 @@
             <a:prstDash val="solid"/>
           </a:ln>
         </p:spPr>
+        <p:txBody>
+          <a:bodyPr/>
+          <a:p/>
+        </p:txBody>
       </p:sp>
       <p:sp>
         <p:nvSpPr>
@@ -25938,6 +26936,10 @@
             <a:prstDash val="solid"/>
           </a:ln>
         </p:spPr>
+        <p:txBody>
+          <a:bodyPr/>
+          <a:p/>
+        </p:txBody>
       </p:sp>
       <p:sp>
         <p:nvSpPr>
@@ -26000,6 +27002,10 @@
             <a:prstDash val="solid"/>
           </a:ln>
         </p:spPr>
+        <p:txBody>
+          <a:bodyPr/>
+          <a:p/>
+        </p:txBody>
       </p:sp>
       <p:sp>
         <p:nvSpPr>
@@ -26062,6 +27068,10 @@
             <a:prstDash val="solid"/>
           </a:ln>
         </p:spPr>
+        <p:txBody>
+          <a:bodyPr/>
+          <a:p/>
+        </p:txBody>
       </p:sp>
       <p:sp>
         <p:nvSpPr>
@@ -26124,6 +27134,10 @@
             <a:prstDash val="solid"/>
           </a:ln>
         </p:spPr>
+        <p:txBody>
+          <a:bodyPr/>
+          <a:p/>
+        </p:txBody>
       </p:sp>
       <p:sp>
         <p:nvSpPr>
@@ -26149,6 +27163,10 @@
             <a:prstDash val="solid"/>
           </a:ln>
         </p:spPr>
+        <p:txBody>
+          <a:bodyPr/>
+          <a:p/>
+        </p:txBody>
       </p:sp>
       <p:sp>
         <p:nvSpPr>
@@ -26289,6 +27307,10 @@
             <a:prstDash val="solid"/>
           </a:ln>
         </p:spPr>
+        <p:txBody>
+          <a:bodyPr/>
+          <a:p/>
+        </p:txBody>
       </p:sp>
       <p:sp>
         <p:nvSpPr>
@@ -26351,6 +27373,10 @@
             <a:prstDash val="solid"/>
           </a:ln>
         </p:spPr>
+        <p:txBody>
+          <a:bodyPr/>
+          <a:p/>
+        </p:txBody>
       </p:sp>
       <p:sp>
         <p:nvSpPr>
@@ -26413,6 +27439,10 @@
             <a:prstDash val="solid"/>
           </a:ln>
         </p:spPr>
+        <p:txBody>
+          <a:bodyPr/>
+          <a:p/>
+        </p:txBody>
       </p:sp>
       <p:sp>
         <p:nvSpPr>
@@ -26438,6 +27468,10 @@
             <a:prstDash val="solid"/>
           </a:ln>
         </p:spPr>
+        <p:txBody>
+          <a:bodyPr/>
+          <a:p/>
+        </p:txBody>
       </p:sp>
       <p:sp>
         <p:nvSpPr>
@@ -26539,6 +27573,10 @@
             <a:prstDash val="solid"/>
           </a:ln>
         </p:spPr>
+        <p:txBody>
+          <a:bodyPr/>
+          <a:p/>
+        </p:txBody>
       </p:sp>
       <p:sp>
         <p:nvSpPr>
@@ -26601,6 +27639,10 @@
             <a:prstDash val="solid"/>
           </a:ln>
         </p:spPr>
+        <p:txBody>
+          <a:bodyPr/>
+          <a:p/>
+        </p:txBody>
       </p:sp>
       <p:sp>
         <p:nvSpPr>
@@ -26663,6 +27705,10 @@
             <a:prstDash val="solid"/>
           </a:ln>
         </p:spPr>
+        <p:txBody>
+          <a:bodyPr/>
+          <a:p/>
+        </p:txBody>
       </p:sp>
       <p:sp>
         <p:nvSpPr>
@@ -26686,6 +27732,10 @@
             <a:prstDash val="solid"/>
           </a:ln>
         </p:spPr>
+        <p:txBody>
+          <a:bodyPr/>
+          <a:p/>
+        </p:txBody>
       </p:sp>
       <p:sp>
         <p:nvSpPr>
@@ -26711,6 +27761,10 @@
             <a:prstDash val="solid"/>
           </a:ln>
         </p:spPr>
+        <p:txBody>
+          <a:bodyPr/>
+          <a:p/>
+        </p:txBody>
       </p:sp>
       <p:sp>
         <p:nvSpPr>
@@ -26773,6 +27827,10 @@
             <a:prstDash val="solid"/>
           </a:ln>
         </p:spPr>
+        <p:txBody>
+          <a:bodyPr/>
+          <a:p/>
+        </p:txBody>
       </p:sp>
       <p:sp>
         <p:nvSpPr>
@@ -26838,6 +27896,10 @@
             <a:prstDash val="solid"/>
           </a:ln>
         </p:spPr>
+        <p:txBody>
+          <a:bodyPr/>
+          <a:p/>
+        </p:txBody>
       </p:sp>
       <p:sp>
         <p:nvSpPr>
@@ -26903,6 +27965,10 @@
             <a:prstDash val="solid"/>
           </a:ln>
         </p:spPr>
+        <p:txBody>
+          <a:bodyPr/>
+          <a:p/>
+        </p:txBody>
       </p:sp>
       <p:sp>
         <p:nvSpPr>
@@ -26968,6 +28034,10 @@
             <a:prstDash val="solid"/>
           </a:ln>
         </p:spPr>
+        <p:txBody>
+          <a:bodyPr/>
+          <a:p/>
+        </p:txBody>
       </p:sp>
       <p:sp>
         <p:nvSpPr>
@@ -27103,6 +28173,10 @@
           </a:solidFill>
           <a:ln/>
         </p:spPr>
+        <p:txBody>
+          <a:bodyPr/>
+          <a:p/>
+        </p:txBody>
       </p:sp>
       <p:sp>
         <p:nvSpPr>
@@ -27286,6 +28360,10 @@
             <a:prstDash val="solid"/>
           </a:ln>
         </p:spPr>
+        <p:txBody>
+          <a:bodyPr/>
+          <a:p/>
+        </p:txBody>
       </p:sp>
       <p:sp>
         <p:nvSpPr>
@@ -27433,6 +28511,10 @@
             <a:prstDash val="solid"/>
           </a:ln>
         </p:spPr>
+        <p:txBody>
+          <a:bodyPr/>
+          <a:p/>
+        </p:txBody>
       </p:sp>
       <p:sp>
         <p:nvSpPr>
@@ -27580,6 +28662,10 @@
             <a:prstDash val="solid"/>
           </a:ln>
         </p:spPr>
+        <p:txBody>
+          <a:bodyPr/>
+          <a:p/>
+        </p:txBody>
       </p:sp>
       <p:sp>
         <p:nvSpPr>
@@ -27727,6 +28813,10 @@
             <a:prstDash val="solid"/>
           </a:ln>
         </p:spPr>
+        <p:txBody>
+          <a:bodyPr/>
+          <a:p/>
+        </p:txBody>
       </p:sp>
       <p:sp>
         <p:nvSpPr>
@@ -27874,6 +28964,10 @@
             <a:prstDash val="solid"/>
           </a:ln>
         </p:spPr>
+        <p:txBody>
+          <a:bodyPr/>
+          <a:p/>
+        </p:txBody>
       </p:sp>
       <p:sp>
         <p:nvSpPr>
@@ -28021,6 +29115,10 @@
             <a:prstDash val="solid"/>
           </a:ln>
         </p:spPr>
+        <p:txBody>
+          <a:bodyPr/>
+          <a:p/>
+        </p:txBody>
       </p:sp>
       <p:sp>
         <p:nvSpPr>
@@ -28168,6 +29266,10 @@
             <a:prstDash val="solid"/>
           </a:ln>
         </p:spPr>
+        <p:txBody>
+          <a:bodyPr/>
+          <a:p/>
+        </p:txBody>
       </p:sp>
       <p:sp>
         <p:nvSpPr>
@@ -28190,6 +29292,10 @@
             <a:prstDash val="solid"/>
           </a:ln>
         </p:spPr>
+        <p:txBody>
+          <a:bodyPr/>
+          <a:p/>
+        </p:txBody>
       </p:sp>
       <p:sp>
         <p:nvSpPr>
@@ -28337,6 +29443,10 @@
             <a:prstDash val="solid"/>
           </a:ln>
         </p:spPr>
+        <p:txBody>
+          <a:bodyPr/>
+          <a:p/>
+        </p:txBody>
       </p:sp>
       <p:sp>
         <p:nvSpPr>
@@ -28484,6 +29594,10 @@
             <a:prstDash val="solid"/>
           </a:ln>
         </p:spPr>
+        <p:txBody>
+          <a:bodyPr/>
+          <a:p/>
+        </p:txBody>
       </p:sp>
       <p:sp>
         <p:nvSpPr>
@@ -28585,6 +29699,10 @@
             <a:prstDash val="solid"/>
           </a:ln>
         </p:spPr>
+        <p:txBody>
+          <a:bodyPr/>
+          <a:p/>
+        </p:txBody>
       </p:sp>
       <p:sp>
         <p:nvSpPr>
@@ -28693,6 +29811,10 @@
             <a:prstDash val="solid"/>
           </a:ln>
         </p:spPr>
+        <p:txBody>
+          <a:bodyPr/>
+          <a:p/>
+        </p:txBody>
       </p:sp>
       <p:sp>
         <p:nvSpPr>
@@ -28755,6 +29877,10 @@
             <a:prstDash val="solid"/>
           </a:ln>
         </p:spPr>
+        <p:txBody>
+          <a:bodyPr/>
+          <a:p/>
+        </p:txBody>
       </p:sp>
       <p:sp>
         <p:nvSpPr>
@@ -28778,6 +29904,10 @@
             <a:prstDash val="solid"/>
           </a:ln>
         </p:spPr>
+        <p:txBody>
+          <a:bodyPr/>
+          <a:p/>
+        </p:txBody>
       </p:sp>
       <p:sp>
         <p:nvSpPr>
@@ -28803,6 +29933,10 @@
             <a:tailEnd type="triangle"/>
           </a:ln>
         </p:spPr>
+        <p:txBody>
+          <a:bodyPr/>
+          <a:p/>
+        </p:txBody>
       </p:sp>
       <p:sp>
         <p:nvSpPr>
@@ -28911,6 +30045,10 @@
             <a:prstDash val="solid"/>
           </a:ln>
         </p:spPr>
+        <p:txBody>
+          <a:bodyPr/>
+          <a:p/>
+        </p:txBody>
       </p:sp>
       <p:sp>
         <p:nvSpPr>
@@ -28975,6 +30113,10 @@
             <a:prstDash val="solid"/>
           </a:ln>
         </p:spPr>
+        <p:txBody>
+          <a:bodyPr/>
+          <a:p/>
+        </p:txBody>
       </p:sp>
       <p:sp>
         <p:nvSpPr>
@@ -28997,6 +30139,10 @@
             <a:prstDash val="solid"/>
           </a:ln>
         </p:spPr>
+        <p:txBody>
+          <a:bodyPr/>
+          <a:p/>
+        </p:txBody>
       </p:sp>
       <p:sp>
         <p:nvSpPr>
@@ -29020,6 +30166,10 @@
             <a:prstDash val="solid"/>
           </a:ln>
         </p:spPr>
+        <p:txBody>
+          <a:bodyPr/>
+          <a:p/>
+        </p:txBody>
       </p:sp>
       <p:sp>
         <p:nvSpPr>
@@ -29043,6 +30193,10 @@
             <a:prstDash val="solid"/>
           </a:ln>
         </p:spPr>
+        <p:txBody>
+          <a:bodyPr/>
+          <a:p/>
+        </p:txBody>
       </p:sp>
       <p:sp>
         <p:nvSpPr>
@@ -29068,6 +30222,10 @@
             <a:prstDash val="solid"/>
           </a:ln>
         </p:spPr>
+        <p:txBody>
+          <a:bodyPr/>
+          <a:p/>
+        </p:txBody>
       </p:sp>
       <p:sp>
         <p:nvSpPr>
@@ -29132,6 +30290,10 @@
             <a:prstDash val="solid"/>
           </a:ln>
         </p:spPr>
+        <p:txBody>
+          <a:bodyPr/>
+          <a:p/>
+        </p:txBody>
       </p:sp>
       <p:sp>
         <p:nvSpPr>
@@ -29240,6 +30402,10 @@
             <a:prstDash val="solid"/>
           </a:ln>
         </p:spPr>
+        <p:txBody>
+          <a:bodyPr/>
+          <a:p/>
+        </p:txBody>
       </p:sp>
       <p:sp>
         <p:nvSpPr>
@@ -29304,6 +30470,10 @@
             <a:prstDash val="solid"/>
           </a:ln>
         </p:spPr>
+        <p:txBody>
+          <a:bodyPr/>
+          <a:p/>
+        </p:txBody>
       </p:sp>
       <p:sp>
         <p:nvSpPr>
@@ -29326,6 +30496,10 @@
             <a:prstDash val="dash"/>
           </a:ln>
         </p:spPr>
+        <p:txBody>
+          <a:bodyPr/>
+          <a:p/>
+        </p:txBody>
       </p:sp>
       <p:sp>
         <p:nvSpPr>
@@ -29434,6 +30608,10 @@
             <a:prstDash val="solid"/>
           </a:ln>
         </p:spPr>
+        <p:txBody>
+          <a:bodyPr/>
+          <a:p/>
+        </p:txBody>
       </p:sp>
       <p:sp>
         <p:nvSpPr>
@@ -29498,6 +30676,10 @@
             <a:prstDash val="solid"/>
           </a:ln>
         </p:spPr>
+        <p:txBody>
+          <a:bodyPr/>
+          <a:p/>
+        </p:txBody>
       </p:sp>
       <p:sp>
         <p:nvSpPr>
@@ -29520,6 +30702,10 @@
             <a:prstDash val="dash"/>
           </a:ln>
         </p:spPr>
+        <p:txBody>
+          <a:bodyPr/>
+          <a:p/>
+        </p:txBody>
       </p:sp>
       <p:sp>
         <p:nvSpPr>
@@ -29628,6 +30814,10 @@
             <a:prstDash val="solid"/>
           </a:ln>
         </p:spPr>
+        <p:txBody>
+          <a:bodyPr/>
+          <a:p/>
+        </p:txBody>
       </p:sp>
       <p:sp>
         <p:nvSpPr>
@@ -29690,6 +30880,10 @@
             <a:prstDash val="solid"/>
           </a:ln>
         </p:spPr>
+        <p:txBody>
+          <a:bodyPr/>
+          <a:p/>
+        </p:txBody>
       </p:sp>
       <p:sp>
         <p:nvSpPr>
@@ -29713,6 +30907,10 @@
             <a:prstDash val="solid"/>
           </a:ln>
         </p:spPr>
+        <p:txBody>
+          <a:bodyPr/>
+          <a:p/>
+        </p:txBody>
       </p:sp>
       <p:sp>
         <p:nvSpPr>
@@ -29848,6 +31046,10 @@
           </a:solidFill>
           <a:ln/>
         </p:spPr>
+        <p:txBody>
+          <a:bodyPr/>
+          <a:p/>
+        </p:txBody>
       </p:sp>
       <p:sp>
         <p:nvSpPr>
@@ -30031,6 +31233,10 @@
             <a:prstDash val="solid"/>
           </a:ln>
         </p:spPr>
+        <p:txBody>
+          <a:bodyPr/>
+          <a:p/>
+        </p:txBody>
       </p:sp>
       <p:sp>
         <p:nvSpPr>
@@ -30051,6 +31257,10 @@
           </a:solidFill>
           <a:ln/>
         </p:spPr>
+        <p:txBody>
+          <a:bodyPr/>
+          <a:p/>
+        </p:txBody>
       </p:sp>
       <p:sp>
         <p:nvSpPr>
@@ -30198,6 +31408,10 @@
             <a:prstDash val="solid"/>
           </a:ln>
         </p:spPr>
+        <p:txBody>
+          <a:bodyPr/>
+          <a:p/>
+        </p:txBody>
       </p:sp>
       <p:sp>
         <p:nvSpPr>
@@ -30218,6 +31432,10 @@
           </a:solidFill>
           <a:ln/>
         </p:spPr>
+        <p:txBody>
+          <a:bodyPr/>
+          <a:p/>
+        </p:txBody>
       </p:sp>
       <p:sp>
         <p:nvSpPr>
@@ -30365,6 +31583,10 @@
             <a:prstDash val="solid"/>
           </a:ln>
         </p:spPr>
+        <p:txBody>
+          <a:bodyPr/>
+          <a:p/>
+        </p:txBody>
       </p:sp>
       <p:sp>
         <p:nvSpPr>
@@ -30385,6 +31607,10 @@
           </a:solidFill>
           <a:ln/>
         </p:spPr>
+        <p:txBody>
+          <a:bodyPr/>
+          <a:p/>
+        </p:txBody>
       </p:sp>
       <p:sp>
         <p:nvSpPr>
@@ -30532,6 +31758,10 @@
             <a:prstDash val="solid"/>
           </a:ln>
         </p:spPr>
+        <p:txBody>
+          <a:bodyPr/>
+          <a:p/>
+        </p:txBody>
       </p:sp>
       <p:sp>
         <p:nvSpPr>
@@ -30552,6 +31782,10 @@
           </a:solidFill>
           <a:ln/>
         </p:spPr>
+        <p:txBody>
+          <a:bodyPr/>
+          <a:p/>
+        </p:txBody>
       </p:sp>
       <p:sp>
         <p:nvSpPr>
@@ -30726,6 +31960,10 @@
           </a:solidFill>
           <a:ln/>
         </p:spPr>
+        <p:txBody>
+          <a:bodyPr/>
+          <a:p/>
+        </p:txBody>
       </p:sp>
       <p:sp>
         <p:nvSpPr>
@@ -30909,6 +32147,10 @@
             <a:prstDash val="solid"/>
           </a:ln>
         </p:spPr>
+        <p:txBody>
+          <a:bodyPr/>
+          <a:p/>
+        </p:txBody>
       </p:sp>
       <p:sp>
         <p:nvSpPr>
@@ -31078,6 +32320,10 @@
             <a:prstDash val="solid"/>
           </a:ln>
         </p:spPr>
+        <p:txBody>
+          <a:bodyPr/>
+          <a:p/>
+        </p:txBody>
       </p:sp>
       <p:sp>
         <p:nvSpPr>
@@ -31226,6 +32472,10 @@
             <a:prstDash val="solid"/>
           </a:ln>
         </p:spPr>
+        <p:txBody>
+          <a:bodyPr/>
+          <a:p/>
+        </p:txBody>
       </p:sp>
       <p:sp>
         <p:nvSpPr>
@@ -31395,6 +32645,10 @@
             <a:prstDash val="solid"/>
           </a:ln>
         </p:spPr>
+        <p:txBody>
+          <a:bodyPr/>
+          <a:p/>
+        </p:txBody>
       </p:sp>
       <p:sp>
         <p:nvSpPr>
@@ -31508,6 +32762,10 @@
           </a:solidFill>
           <a:ln/>
         </p:spPr>
+        <p:txBody>
+          <a:bodyPr/>
+          <a:p/>
+        </p:txBody>
       </p:sp>
       <p:sp>
         <p:nvSpPr>
@@ -31691,6 +32949,10 @@
             <a:prstDash val="solid"/>
           </a:ln>
         </p:spPr>
+        <p:txBody>
+          <a:bodyPr/>
+          <a:p/>
+        </p:txBody>
       </p:sp>
       <p:sp>
         <p:nvSpPr>
@@ -31711,6 +32973,10 @@
           </a:solidFill>
           <a:ln/>
         </p:spPr>
+        <p:txBody>
+          <a:bodyPr/>
+          <a:p/>
+        </p:txBody>
       </p:sp>
       <p:sp>
         <p:nvSpPr>
@@ -31858,6 +33124,10 @@
             <a:prstDash val="solid"/>
           </a:ln>
         </p:spPr>
+        <p:txBody>
+          <a:bodyPr/>
+          <a:p/>
+        </p:txBody>
       </p:sp>
       <p:sp>
         <p:nvSpPr>
@@ -31878,6 +33148,10 @@
           </a:solidFill>
           <a:ln/>
         </p:spPr>
+        <p:txBody>
+          <a:bodyPr/>
+          <a:p/>
+        </p:txBody>
       </p:sp>
       <p:sp>
         <p:nvSpPr>
@@ -32025,6 +33299,10 @@
             <a:prstDash val="solid"/>
           </a:ln>
         </p:spPr>
+        <p:txBody>
+          <a:bodyPr/>
+          <a:p/>
+        </p:txBody>
       </p:sp>
       <p:sp>
         <p:nvSpPr>
@@ -32045,6 +33323,10 @@
           </a:solidFill>
           <a:ln/>
         </p:spPr>
+        <p:txBody>
+          <a:bodyPr/>
+          <a:p/>
+        </p:txBody>
       </p:sp>
       <p:sp>
         <p:nvSpPr>
@@ -32192,6 +33474,10 @@
             <a:prstDash val="solid"/>
           </a:ln>
         </p:spPr>
+        <p:txBody>
+          <a:bodyPr/>
+          <a:p/>
+        </p:txBody>
       </p:sp>
       <p:sp>
         <p:nvSpPr>
@@ -32212,6 +33498,10 @@
           </a:solidFill>
           <a:ln/>
         </p:spPr>
+        <p:txBody>
+          <a:bodyPr/>
+          <a:p/>
+        </p:txBody>
       </p:sp>
       <p:sp>
         <p:nvSpPr>
@@ -32402,6 +33692,10 @@
             <a:prstDash val="solid"/>
           </a:ln>
         </p:spPr>
+        <p:txBody>
+          <a:bodyPr/>
+          <a:p/>
+        </p:txBody>
       </p:sp>
       <p:sp>
         <p:nvSpPr>
@@ -32425,6 +33719,10 @@
             <a:prstDash val="solid"/>
           </a:ln>
         </p:spPr>
+        <p:txBody>
+          <a:bodyPr/>
+          <a:p/>
+        </p:txBody>
       </p:sp>
       <p:sp>
         <p:nvSpPr>
@@ -32448,6 +33746,10 @@
             <a:prstDash val="solid"/>
           </a:ln>
         </p:spPr>
+        <p:txBody>
+          <a:bodyPr/>
+          <a:p/>
+        </p:txBody>
       </p:sp>
       <p:sp>
         <p:nvSpPr>
@@ -32471,6 +33773,10 @@
             <a:prstDash val="solid"/>
           </a:ln>
         </p:spPr>
+        <p:txBody>
+          <a:bodyPr/>
+          <a:p/>
+        </p:txBody>
       </p:sp>
       <p:sp>
         <p:nvSpPr>
@@ -32494,6 +33800,10 @@
             <a:prstDash val="solid"/>
           </a:ln>
         </p:spPr>
+        <p:txBody>
+          <a:bodyPr/>
+          <a:p/>
+        </p:txBody>
       </p:sp>
       <p:sp>
         <p:nvSpPr>
@@ -32517,6 +33827,10 @@
             <a:prstDash val="solid"/>
           </a:ln>
         </p:spPr>
+        <p:txBody>
+          <a:bodyPr/>
+          <a:p/>
+        </p:txBody>
       </p:sp>
       <p:sp>
         <p:nvSpPr>
@@ -32540,6 +33854,10 @@
             <a:prstDash val="solid"/>
           </a:ln>
         </p:spPr>
+        <p:txBody>
+          <a:bodyPr/>
+          <a:p/>
+        </p:txBody>
       </p:sp>
       <p:sp>
         <p:nvSpPr>
@@ -32563,6 +33881,10 @@
             <a:prstDash val="solid"/>
           </a:ln>
         </p:spPr>
+        <p:txBody>
+          <a:bodyPr/>
+          <a:p/>
+        </p:txBody>
       </p:sp>
       <p:sp>
         <p:nvSpPr>
@@ -32586,6 +33908,10 @@
             <a:prstDash val="solid"/>
           </a:ln>
         </p:spPr>
+        <p:txBody>
+          <a:bodyPr/>
+          <a:p/>
+        </p:txBody>
       </p:sp>
       <p:sp>
         <p:nvSpPr>
@@ -32609,6 +33935,10 @@
             <a:prstDash val="solid"/>
           </a:ln>
         </p:spPr>
+        <p:txBody>
+          <a:bodyPr/>
+          <a:p/>
+        </p:txBody>
       </p:sp>
       <p:sp>
         <p:nvSpPr>
@@ -32632,6 +33962,10 @@
             <a:prstDash val="solid"/>
           </a:ln>
         </p:spPr>
+        <p:txBody>
+          <a:bodyPr/>
+          <a:p/>
+        </p:txBody>
       </p:sp>
       <p:sp>
         <p:nvSpPr>
@@ -32655,6 +33989,10 @@
             <a:prstDash val="solid"/>
           </a:ln>
         </p:spPr>
+        <p:txBody>
+          <a:bodyPr/>
+          <a:p/>
+        </p:txBody>
       </p:sp>
       <p:sp>
         <p:nvSpPr>
@@ -32678,6 +34016,10 @@
             <a:prstDash val="solid"/>
           </a:ln>
         </p:spPr>
+        <p:txBody>
+          <a:bodyPr/>
+          <a:p/>
+        </p:txBody>
       </p:sp>
       <p:sp>
         <p:nvSpPr>
@@ -32701,6 +34043,10 @@
             <a:prstDash val="solid"/>
           </a:ln>
         </p:spPr>
+        <p:txBody>
+          <a:bodyPr/>
+          <a:p/>
+        </p:txBody>
       </p:sp>
       <p:sp>
         <p:nvSpPr>
@@ -32724,6 +34070,10 @@
             <a:prstDash val="solid"/>
           </a:ln>
         </p:spPr>
+        <p:txBody>
+          <a:bodyPr/>
+          <a:p/>
+        </p:txBody>
       </p:sp>
       <p:sp>
         <p:nvSpPr>
@@ -32747,6 +34097,10 @@
             <a:prstDash val="solid"/>
           </a:ln>
         </p:spPr>
+        <p:txBody>
+          <a:bodyPr/>
+          <a:p/>
+        </p:txBody>
       </p:sp>
       <p:sp>
         <p:nvSpPr>
@@ -32770,6 +34124,10 @@
             <a:prstDash val="solid"/>
           </a:ln>
         </p:spPr>
+        <p:txBody>
+          <a:bodyPr/>
+          <a:p/>
+        </p:txBody>
       </p:sp>
       <p:sp>
         <p:nvSpPr>
@@ -32793,6 +34151,10 @@
             <a:prstDash val="solid"/>
           </a:ln>
         </p:spPr>
+        <p:txBody>
+          <a:bodyPr/>
+          <a:p/>
+        </p:txBody>
       </p:sp>
       <p:sp>
         <p:nvSpPr>
@@ -32816,6 +34178,10 @@
             <a:prstDash val="solid"/>
           </a:ln>
         </p:spPr>
+        <p:txBody>
+          <a:bodyPr/>
+          <a:p/>
+        </p:txBody>
       </p:sp>
       <p:sp>
         <p:nvSpPr>
@@ -32839,6 +34205,10 @@
             <a:prstDash val="solid"/>
           </a:ln>
         </p:spPr>
+        <p:txBody>
+          <a:bodyPr/>
+          <a:p/>
+        </p:txBody>
       </p:sp>
       <p:sp>
         <p:nvSpPr>
@@ -32862,6 +34232,10 @@
             <a:prstDash val="solid"/>
           </a:ln>
         </p:spPr>
+        <p:txBody>
+          <a:bodyPr/>
+          <a:p/>
+        </p:txBody>
       </p:sp>
       <p:sp>
         <p:nvSpPr>
@@ -32885,6 +34259,10 @@
             <a:prstDash val="solid"/>
           </a:ln>
         </p:spPr>
+        <p:txBody>
+          <a:bodyPr/>
+          <a:p/>
+        </p:txBody>
       </p:sp>
       <p:sp>
         <p:nvSpPr>
@@ -32908,6 +34286,10 @@
             <a:prstDash val="solid"/>
           </a:ln>
         </p:spPr>
+        <p:txBody>
+          <a:bodyPr/>
+          <a:p/>
+        </p:txBody>
       </p:sp>
       <p:sp>
         <p:nvSpPr>
@@ -32931,6 +34313,10 @@
             <a:prstDash val="solid"/>
           </a:ln>
         </p:spPr>
+        <p:txBody>
+          <a:bodyPr/>
+          <a:p/>
+        </p:txBody>
       </p:sp>
       <p:sp>
         <p:nvSpPr>
@@ -32954,6 +34340,10 @@
             <a:prstDash val="solid"/>
           </a:ln>
         </p:spPr>
+        <p:txBody>
+          <a:bodyPr/>
+          <a:p/>
+        </p:txBody>
       </p:sp>
       <p:sp>
         <p:nvSpPr>
@@ -33015,6 +34405,10 @@
           </a:solidFill>
           <a:ln/>
         </p:spPr>
+        <p:txBody>
+          <a:bodyPr/>
+          <a:p/>
+        </p:txBody>
       </p:sp>
       <p:sp>
         <p:nvSpPr>
@@ -33162,6 +34556,10 @@
             <a:prstDash val="solid"/>
           </a:ln>
         </p:spPr>
+        <p:txBody>
+          <a:bodyPr/>
+          <a:p/>
+        </p:txBody>
       </p:sp>
       <p:sp>
         <p:nvSpPr>
@@ -33255,6 +34653,10 @@
           </a:solidFill>
           <a:ln/>
         </p:spPr>
+        <p:txBody>
+          <a:bodyPr/>
+          <a:p/>
+        </p:txBody>
       </p:sp>
       <p:sp>
         <p:nvSpPr>
@@ -33462,6 +34864,10 @@
             <a:prstDash val="solid"/>
           </a:ln>
         </p:spPr>
+        <p:txBody>
+          <a:bodyPr/>
+          <a:p/>
+        </p:txBody>
       </p:sp>
       <p:sp>
         <p:nvSpPr>
@@ -33575,6 +34981,10 @@
           </a:solidFill>
           <a:ln/>
         </p:spPr>
+        <p:txBody>
+          <a:bodyPr/>
+          <a:p/>
+        </p:txBody>
       </p:sp>
       <p:sp>
         <p:nvSpPr>
@@ -33753,6 +35163,10 @@
           </a:solidFill>
           <a:ln/>
         </p:spPr>
+        <p:txBody>
+          <a:bodyPr/>
+          <a:p/>
+        </p:txBody>
       </p:sp>
       <p:sp>
         <p:nvSpPr>
@@ -33965,6 +35379,10 @@
             <a:prstDash val="solid"/>
           </a:ln>
         </p:spPr>
+        <p:txBody>
+          <a:bodyPr/>
+          <a:p/>
+        </p:txBody>
       </p:sp>
       <p:pic>
         <p:nvPicPr>
@@ -34043,6 +35461,10 @@
           </a:solidFill>
           <a:ln/>
         </p:spPr>
+        <p:txBody>
+          <a:bodyPr/>
+          <a:p/>
+        </p:txBody>
       </p:sp>
       <p:sp>
         <p:nvSpPr>
@@ -34226,6 +35648,10 @@
             <a:prstDash val="solid"/>
           </a:ln>
         </p:spPr>
+        <p:txBody>
+          <a:bodyPr/>
+          <a:p/>
+        </p:txBody>
       </p:sp>
       <p:sp>
         <p:nvSpPr>
@@ -34397,6 +35823,10 @@
             <a:prstDash val="solid"/>
           </a:ln>
         </p:spPr>
+        <p:txBody>
+          <a:bodyPr/>
+          <a:p/>
+        </p:txBody>
       </p:sp>
       <p:sp>
         <p:nvSpPr>
@@ -34568,6 +35998,10 @@
             <a:prstDash val="solid"/>
           </a:ln>
         </p:spPr>
+        <p:txBody>
+          <a:bodyPr/>
+          <a:p/>
+        </p:txBody>
       </p:sp>
       <p:sp>
         <p:nvSpPr>
@@ -34766,6 +36200,10 @@
           </a:solidFill>
           <a:ln/>
         </p:spPr>
+        <p:txBody>
+          <a:bodyPr/>
+          <a:p/>
+        </p:txBody>
       </p:sp>
       <p:sp>
         <p:nvSpPr>
@@ -34910,6 +36348,10 @@
             <a:prstDash val="solid"/>
           </a:ln>
         </p:spPr>
+        <p:txBody>
+          <a:bodyPr/>
+          <a:p/>
+        </p:txBody>
       </p:sp>
       <p:sp>
         <p:nvSpPr>
@@ -35042,6 +36484,10 @@
             <a:prstDash val="solid"/>
           </a:ln>
         </p:spPr>
+        <p:txBody>
+          <a:bodyPr/>
+          <a:p/>
+        </p:txBody>
       </p:sp>
       <p:sp>
         <p:nvSpPr>
@@ -35174,6 +36620,10 @@
             <a:prstDash val="solid"/>
           </a:ln>
         </p:spPr>
+        <p:txBody>
+          <a:bodyPr/>
+          <a:p/>
+        </p:txBody>
       </p:sp>
       <p:sp>
         <p:nvSpPr>
@@ -35303,6 +36753,10 @@
             <a:prstDash val="solid"/>
           </a:ln>
         </p:spPr>
+        <p:txBody>
+          <a:bodyPr/>
+          <a:p/>
+        </p:txBody>
       </p:sp>
       <p:sp>
         <p:nvSpPr>
@@ -35417,6 +36871,10 @@
             <a:prstDash val="solid"/>
           </a:ln>
         </p:spPr>
+        <p:txBody>
+          <a:bodyPr/>
+          <a:p/>
+        </p:txBody>
       </p:sp>
       <p:sp>
         <p:nvSpPr>
@@ -35440,6 +36898,10 @@
             <a:prstDash val="solid"/>
           </a:ln>
         </p:spPr>
+        <p:txBody>
+          <a:bodyPr/>
+          <a:p/>
+        </p:txBody>
       </p:sp>
       <p:sp>
         <p:nvSpPr>
@@ -35463,6 +36925,10 @@
             <a:prstDash val="solid"/>
           </a:ln>
         </p:spPr>
+        <p:txBody>
+          <a:bodyPr/>
+          <a:p/>
+        </p:txBody>
       </p:sp>
       <p:sp>
         <p:nvSpPr>
@@ -35486,6 +36952,10 @@
             <a:prstDash val="solid"/>
           </a:ln>
         </p:spPr>
+        <p:txBody>
+          <a:bodyPr/>
+          <a:p/>
+        </p:txBody>
       </p:sp>
       <p:sp>
         <p:nvSpPr>
@@ -35509,6 +36979,10 @@
             <a:prstDash val="solid"/>
           </a:ln>
         </p:spPr>
+        <p:txBody>
+          <a:bodyPr/>
+          <a:p/>
+        </p:txBody>
       </p:sp>
       <p:sp>
         <p:nvSpPr>
@@ -35532,6 +37006,10 @@
             <a:prstDash val="solid"/>
           </a:ln>
         </p:spPr>
+        <p:txBody>
+          <a:bodyPr/>
+          <a:p/>
+        </p:txBody>
       </p:sp>
       <p:sp>
         <p:nvSpPr>
@@ -35555,6 +37033,10 @@
             <a:prstDash val="solid"/>
           </a:ln>
         </p:spPr>
+        <p:txBody>
+          <a:bodyPr/>
+          <a:p/>
+        </p:txBody>
       </p:sp>
       <p:sp>
         <p:nvSpPr>
@@ -35578,6 +37060,10 @@
             <a:prstDash val="solid"/>
           </a:ln>
         </p:spPr>
+        <p:txBody>
+          <a:bodyPr/>
+          <a:p/>
+        </p:txBody>
       </p:sp>
       <p:sp>
         <p:nvSpPr>
@@ -35601,6 +37087,10 @@
             <a:prstDash val="solid"/>
           </a:ln>
         </p:spPr>
+        <p:txBody>
+          <a:bodyPr/>
+          <a:p/>
+        </p:txBody>
       </p:sp>
       <p:sp>
         <p:nvSpPr>
@@ -35624,6 +37114,10 @@
             <a:prstDash val="solid"/>
           </a:ln>
         </p:spPr>
+        <p:txBody>
+          <a:bodyPr/>
+          <a:p/>
+        </p:txBody>
       </p:sp>
       <p:sp>
         <p:nvSpPr>
@@ -35647,6 +37141,10 @@
             <a:prstDash val="solid"/>
           </a:ln>
         </p:spPr>
+        <p:txBody>
+          <a:bodyPr/>
+          <a:p/>
+        </p:txBody>
       </p:sp>
       <p:sp>
         <p:nvSpPr>
@@ -35670,6 +37168,10 @@
             <a:prstDash val="solid"/>
           </a:ln>
         </p:spPr>
+        <p:txBody>
+          <a:bodyPr/>
+          <a:p/>
+        </p:txBody>
       </p:sp>
       <p:sp>
         <p:nvSpPr>
@@ -35693,6 +37195,10 @@
             <a:prstDash val="solid"/>
           </a:ln>
         </p:spPr>
+        <p:txBody>
+          <a:bodyPr/>
+          <a:p/>
+        </p:txBody>
       </p:sp>
       <p:sp>
         <p:nvSpPr>
@@ -35716,6 +37222,10 @@
             <a:prstDash val="solid"/>
           </a:ln>
         </p:spPr>
+        <p:txBody>
+          <a:bodyPr/>
+          <a:p/>
+        </p:txBody>
       </p:sp>
       <p:sp>
         <p:nvSpPr>
@@ -35739,6 +37249,10 @@
             <a:prstDash val="solid"/>
           </a:ln>
         </p:spPr>
+        <p:txBody>
+          <a:bodyPr/>
+          <a:p/>
+        </p:txBody>
       </p:sp>
       <p:sp>
         <p:nvSpPr>
@@ -35762,6 +37276,10 @@
             <a:prstDash val="solid"/>
           </a:ln>
         </p:spPr>
+        <p:txBody>
+          <a:bodyPr/>
+          <a:p/>
+        </p:txBody>
       </p:sp>
       <p:sp>
         <p:nvSpPr>
@@ -35785,6 +37303,10 @@
             <a:prstDash val="solid"/>
           </a:ln>
         </p:spPr>
+        <p:txBody>
+          <a:bodyPr/>
+          <a:p/>
+        </p:txBody>
       </p:sp>
       <p:sp>
         <p:nvSpPr>
@@ -35808,6 +37330,10 @@
             <a:prstDash val="solid"/>
           </a:ln>
         </p:spPr>
+        <p:txBody>
+          <a:bodyPr/>
+          <a:p/>
+        </p:txBody>
       </p:sp>
       <p:sp>
         <p:nvSpPr>
@@ -35831,6 +37357,10 @@
             <a:prstDash val="solid"/>
           </a:ln>
         </p:spPr>
+        <p:txBody>
+          <a:bodyPr/>
+          <a:p/>
+        </p:txBody>
       </p:sp>
       <p:sp>
         <p:nvSpPr>
@@ -35854,6 +37384,10 @@
             <a:prstDash val="solid"/>
           </a:ln>
         </p:spPr>
+        <p:txBody>
+          <a:bodyPr/>
+          <a:p/>
+        </p:txBody>
       </p:sp>
       <p:sp>
         <p:nvSpPr>
@@ -35877,6 +37411,10 @@
             <a:prstDash val="solid"/>
           </a:ln>
         </p:spPr>
+        <p:txBody>
+          <a:bodyPr/>
+          <a:p/>
+        </p:txBody>
       </p:sp>
       <p:sp>
         <p:nvSpPr>
@@ -35900,6 +37438,10 @@
             <a:prstDash val="solid"/>
           </a:ln>
         </p:spPr>
+        <p:txBody>
+          <a:bodyPr/>
+          <a:p/>
+        </p:txBody>
       </p:sp>
       <p:sp>
         <p:nvSpPr>
@@ -35923,6 +37465,10 @@
             <a:prstDash val="solid"/>
           </a:ln>
         </p:spPr>
+        <p:txBody>
+          <a:bodyPr/>
+          <a:p/>
+        </p:txBody>
       </p:sp>
       <p:sp>
         <p:nvSpPr>
@@ -35946,6 +37492,10 @@
             <a:prstDash val="solid"/>
           </a:ln>
         </p:spPr>
+        <p:txBody>
+          <a:bodyPr/>
+          <a:p/>
+        </p:txBody>
       </p:sp>
       <p:sp>
         <p:nvSpPr>
@@ -35969,6 +37519,10 @@
             <a:prstDash val="solid"/>
           </a:ln>
         </p:spPr>
+        <p:txBody>
+          <a:bodyPr/>
+          <a:p/>
+        </p:txBody>
       </p:sp>
       <p:sp>
         <p:nvSpPr>
@@ -36030,6 +37584,10 @@
           </a:solidFill>
           <a:ln/>
         </p:spPr>
+        <p:txBody>
+          <a:bodyPr/>
+          <a:p/>
+        </p:txBody>
       </p:sp>
       <p:sp>
         <p:nvSpPr>
@@ -36177,6 +37735,10 @@
             <a:prstDash val="solid"/>
           </a:ln>
         </p:spPr>
+        <p:txBody>
+          <a:bodyPr/>
+          <a:p/>
+        </p:txBody>
       </p:sp>
       <p:sp>
         <p:nvSpPr>
@@ -36270,6 +37832,10 @@
           </a:solidFill>
           <a:ln/>
         </p:spPr>
+        <p:txBody>
+          <a:bodyPr/>
+          <a:p/>
+        </p:txBody>
       </p:sp>
       <p:sp>
         <p:nvSpPr>
@@ -36642,6 +38208,10 @@
           </a:solidFill>
           <a:ln/>
         </p:spPr>
+        <p:txBody>
+          <a:bodyPr/>
+          <a:p/>
+        </p:txBody>
       </p:sp>
       <p:sp>
         <p:nvSpPr>
@@ -36825,6 +38395,10 @@
             <a:prstDash val="solid"/>
           </a:ln>
         </p:spPr>
+        <p:txBody>
+          <a:bodyPr/>
+          <a:p/>
+        </p:txBody>
       </p:sp>
       <p:pic>
         <p:nvPicPr>
@@ -36918,6 +38492,10 @@
             <a:prstDash val="solid"/>
           </a:ln>
         </p:spPr>
+        <p:txBody>
+          <a:bodyPr/>
+          <a:p/>
+        </p:txBody>
       </p:sp>
       <p:sp>
         <p:nvSpPr>
@@ -36977,6 +38555,10 @@
           </a:solidFill>
           <a:ln/>
         </p:spPr>
+        <p:txBody>
+          <a:bodyPr/>
+          <a:p/>
+        </p:txBody>
       </p:sp>
       <p:sp>
         <p:nvSpPr>
@@ -37312,6 +38894,10 @@
             <a:prstDash val="solid"/>
           </a:ln>
         </p:spPr>
+        <p:txBody>
+          <a:bodyPr/>
+          <a:p/>
+        </p:txBody>
       </p:sp>
       <p:sp>
         <p:nvSpPr>
@@ -37332,6 +38918,10 @@
           </a:solidFill>
           <a:ln/>
         </p:spPr>
+        <p:txBody>
+          <a:bodyPr/>
+          <a:p/>
+        </p:txBody>
       </p:sp>
       <p:sp>
         <p:nvSpPr>
@@ -37511,6 +39101,10 @@
             <a:prstDash val="solid"/>
           </a:ln>
         </p:spPr>
+        <p:txBody>
+          <a:bodyPr/>
+          <a:p/>
+        </p:txBody>
       </p:sp>
       <p:sp>
         <p:nvSpPr>
@@ -37690,6 +39284,10 @@
             <a:prstDash val="solid"/>
           </a:ln>
         </p:spPr>
+        <p:txBody>
+          <a:bodyPr/>
+          <a:p/>
+        </p:txBody>
       </p:sp>
       <p:sp>
         <p:nvSpPr>
@@ -37710,6 +39308,10 @@
           </a:solidFill>
           <a:ln/>
         </p:spPr>
+        <p:txBody>
+          <a:bodyPr/>
+          <a:p/>
+        </p:txBody>
       </p:sp>
       <p:sp>
         <p:nvSpPr>
@@ -37889,6 +39491,10 @@
             <a:prstDash val="solid"/>
           </a:ln>
         </p:spPr>
+        <p:txBody>
+          <a:bodyPr/>
+          <a:p/>
+        </p:txBody>
       </p:sp>
       <p:sp>
         <p:nvSpPr>
@@ -37911,6 +39517,10 @@
             <a:prstDash val="solid"/>
           </a:ln>
         </p:spPr>
+        <p:txBody>
+          <a:bodyPr/>
+          <a:p/>
+        </p:txBody>
       </p:sp>
       <p:sp>
         <p:nvSpPr>
@@ -38007,6 +39617,10 @@
           </a:solidFill>
           <a:ln/>
         </p:spPr>
+        <p:txBody>
+          <a:bodyPr/>
+          <a:p/>
+        </p:txBody>
       </p:sp>
       <p:sp>
         <p:nvSpPr>
@@ -38190,6 +39804,10 @@
             <a:prstDash val="solid"/>
           </a:ln>
         </p:spPr>
+        <p:txBody>
+          <a:bodyPr/>
+          <a:p/>
+        </p:txBody>
       </p:sp>
       <p:sp>
         <p:nvSpPr>
@@ -38210,6 +39828,10 @@
           </a:solidFill>
           <a:ln/>
         </p:spPr>
+        <p:txBody>
+          <a:bodyPr/>
+          <a:p/>
+        </p:txBody>
       </p:sp>
       <p:sp>
         <p:nvSpPr>
@@ -38357,6 +39979,10 @@
             <a:prstDash val="solid"/>
           </a:ln>
         </p:spPr>
+        <p:txBody>
+          <a:bodyPr/>
+          <a:p/>
+        </p:txBody>
       </p:sp>
       <p:sp>
         <p:nvSpPr>
@@ -38377,6 +40003,10 @@
           </a:solidFill>
           <a:ln/>
         </p:spPr>
+        <p:txBody>
+          <a:bodyPr/>
+          <a:p/>
+        </p:txBody>
       </p:sp>
       <p:sp>
         <p:nvSpPr>
@@ -38524,6 +40154,10 @@
             <a:prstDash val="solid"/>
           </a:ln>
         </p:spPr>
+        <p:txBody>
+          <a:bodyPr/>
+          <a:p/>
+        </p:txBody>
       </p:sp>
       <p:sp>
         <p:nvSpPr>
@@ -38544,6 +40178,10 @@
           </a:solidFill>
           <a:ln/>
         </p:spPr>
+        <p:txBody>
+          <a:bodyPr/>
+          <a:p/>
+        </p:txBody>
       </p:sp>
       <p:sp>
         <p:nvSpPr>
@@ -38691,6 +40329,10 @@
             <a:prstDash val="solid"/>
           </a:ln>
         </p:spPr>
+        <p:txBody>
+          <a:bodyPr/>
+          <a:p/>
+        </p:txBody>
       </p:sp>
       <p:sp>
         <p:nvSpPr>
@@ -38711,6 +40353,10 @@
           </a:solidFill>
           <a:ln/>
         </p:spPr>
+        <p:txBody>
+          <a:bodyPr/>
+          <a:p/>
+        </p:txBody>
       </p:sp>
       <p:sp>
         <p:nvSpPr>
@@ -38858,6 +40504,10 @@
             <a:prstDash val="solid"/>
           </a:ln>
         </p:spPr>
+        <p:txBody>
+          <a:bodyPr/>
+          <a:p/>
+        </p:txBody>
       </p:sp>
       <p:sp>
         <p:nvSpPr>
@@ -38971,6 +40621,10 @@
           </a:solidFill>
           <a:ln/>
         </p:spPr>
+        <p:txBody>
+          <a:bodyPr/>
+          <a:p/>
+        </p:txBody>
       </p:sp>
       <p:sp>
         <p:nvSpPr>
@@ -39115,6 +40769,10 @@
             <a:prstDash val="solid"/>
           </a:ln>
         </p:spPr>
+        <p:txBody>
+          <a:bodyPr/>
+          <a:p/>
+        </p:txBody>
       </p:sp>
       <p:sp>
         <p:nvSpPr>
@@ -39135,6 +40793,10 @@
           </a:solidFill>
           <a:ln/>
         </p:spPr>
+        <p:txBody>
+          <a:bodyPr/>
+          <a:p/>
+        </p:txBody>
       </p:sp>
       <p:sp>
         <p:nvSpPr>
@@ -39282,6 +40944,10 @@
             <a:prstDash val="solid"/>
           </a:ln>
         </p:spPr>
+        <p:txBody>
+          <a:bodyPr/>
+          <a:p/>
+        </p:txBody>
       </p:sp>
       <p:sp>
         <p:nvSpPr>
@@ -39302,6 +40968,10 @@
           </a:solidFill>
           <a:ln/>
         </p:spPr>
+        <p:txBody>
+          <a:bodyPr/>
+          <a:p/>
+        </p:txBody>
       </p:sp>
       <p:sp>
         <p:nvSpPr>
@@ -39449,6 +41119,10 @@
             <a:prstDash val="solid"/>
           </a:ln>
         </p:spPr>
+        <p:txBody>
+          <a:bodyPr/>
+          <a:p/>
+        </p:txBody>
       </p:sp>
       <p:sp>
         <p:nvSpPr>
@@ -39469,6 +41143,10 @@
           </a:solidFill>
           <a:ln/>
         </p:spPr>
+        <p:txBody>
+          <a:bodyPr/>
+          <a:p/>
+        </p:txBody>
       </p:sp>
       <p:sp>
         <p:nvSpPr>
@@ -39616,6 +41294,10 @@
             <a:prstDash val="solid"/>
           </a:ln>
         </p:spPr>
+        <p:txBody>
+          <a:bodyPr/>
+          <a:p/>
+        </p:txBody>
       </p:sp>
       <p:sp>
         <p:nvSpPr>
@@ -39636,6 +41318,10 @@
           </a:solidFill>
           <a:ln/>
         </p:spPr>
+        <p:txBody>
+          <a:bodyPr/>
+          <a:p/>
+        </p:txBody>
       </p:sp>
       <p:sp>
         <p:nvSpPr>
@@ -39826,6 +41512,10 @@
             <a:prstDash val="solid"/>
           </a:ln>
         </p:spPr>
+        <p:txBody>
+          <a:bodyPr/>
+          <a:p/>
+        </p:txBody>
       </p:sp>
       <p:sp>
         <p:nvSpPr>
@@ -39849,6 +41539,10 @@
             <a:prstDash val="solid"/>
           </a:ln>
         </p:spPr>
+        <p:txBody>
+          <a:bodyPr/>
+          <a:p/>
+        </p:txBody>
       </p:sp>
       <p:sp>
         <p:nvSpPr>
@@ -39872,6 +41566,10 @@
             <a:prstDash val="solid"/>
           </a:ln>
         </p:spPr>
+        <p:txBody>
+          <a:bodyPr/>
+          <a:p/>
+        </p:txBody>
       </p:sp>
       <p:sp>
         <p:nvSpPr>
@@ -39895,6 +41593,10 @@
             <a:prstDash val="solid"/>
           </a:ln>
         </p:spPr>
+        <p:txBody>
+          <a:bodyPr/>
+          <a:p/>
+        </p:txBody>
       </p:sp>
       <p:sp>
         <p:nvSpPr>
@@ -39918,6 +41620,10 @@
             <a:prstDash val="solid"/>
           </a:ln>
         </p:spPr>
+        <p:txBody>
+          <a:bodyPr/>
+          <a:p/>
+        </p:txBody>
       </p:sp>
       <p:sp>
         <p:nvSpPr>
@@ -39941,6 +41647,10 @@
             <a:prstDash val="solid"/>
           </a:ln>
         </p:spPr>
+        <p:txBody>
+          <a:bodyPr/>
+          <a:p/>
+        </p:txBody>
       </p:sp>
       <p:sp>
         <p:nvSpPr>
@@ -39964,6 +41674,10 @@
             <a:prstDash val="solid"/>
           </a:ln>
         </p:spPr>
+        <p:txBody>
+          <a:bodyPr/>
+          <a:p/>
+        </p:txBody>
       </p:sp>
       <p:sp>
         <p:nvSpPr>
@@ -39987,6 +41701,10 @@
             <a:prstDash val="solid"/>
           </a:ln>
         </p:spPr>
+        <p:txBody>
+          <a:bodyPr/>
+          <a:p/>
+        </p:txBody>
       </p:sp>
       <p:sp>
         <p:nvSpPr>
@@ -40010,6 +41728,10 @@
             <a:prstDash val="solid"/>
           </a:ln>
         </p:spPr>
+        <p:txBody>
+          <a:bodyPr/>
+          <a:p/>
+        </p:txBody>
       </p:sp>
       <p:sp>
         <p:nvSpPr>
@@ -40033,6 +41755,10 @@
             <a:prstDash val="solid"/>
           </a:ln>
         </p:spPr>
+        <p:txBody>
+          <a:bodyPr/>
+          <a:p/>
+        </p:txBody>
       </p:sp>
       <p:sp>
         <p:nvSpPr>
@@ -40056,6 +41782,10 @@
             <a:prstDash val="solid"/>
           </a:ln>
         </p:spPr>
+        <p:txBody>
+          <a:bodyPr/>
+          <a:p/>
+        </p:txBody>
       </p:sp>
       <p:sp>
         <p:nvSpPr>
@@ -40079,6 +41809,10 @@
             <a:prstDash val="solid"/>
           </a:ln>
         </p:spPr>
+        <p:txBody>
+          <a:bodyPr/>
+          <a:p/>
+        </p:txBody>
       </p:sp>
       <p:sp>
         <p:nvSpPr>
@@ -40102,6 +41836,10 @@
             <a:prstDash val="solid"/>
           </a:ln>
         </p:spPr>
+        <p:txBody>
+          <a:bodyPr/>
+          <a:p/>
+        </p:txBody>
       </p:sp>
       <p:sp>
         <p:nvSpPr>
@@ -40125,6 +41863,10 @@
             <a:prstDash val="solid"/>
           </a:ln>
         </p:spPr>
+        <p:txBody>
+          <a:bodyPr/>
+          <a:p/>
+        </p:txBody>
       </p:sp>
       <p:sp>
         <p:nvSpPr>
@@ -40148,6 +41890,10 @@
             <a:prstDash val="solid"/>
           </a:ln>
         </p:spPr>
+        <p:txBody>
+          <a:bodyPr/>
+          <a:p/>
+        </p:txBody>
       </p:sp>
       <p:sp>
         <p:nvSpPr>
@@ -40171,6 +41917,10 @@
             <a:prstDash val="solid"/>
           </a:ln>
         </p:spPr>
+        <p:txBody>
+          <a:bodyPr/>
+          <a:p/>
+        </p:txBody>
       </p:sp>
       <p:sp>
         <p:nvSpPr>
@@ -40194,6 +41944,10 @@
             <a:prstDash val="solid"/>
           </a:ln>
         </p:spPr>
+        <p:txBody>
+          <a:bodyPr/>
+          <a:p/>
+        </p:txBody>
       </p:sp>
       <p:sp>
         <p:nvSpPr>
@@ -40217,6 +41971,10 @@
             <a:prstDash val="solid"/>
           </a:ln>
         </p:spPr>
+        <p:txBody>
+          <a:bodyPr/>
+          <a:p/>
+        </p:txBody>
       </p:sp>
       <p:sp>
         <p:nvSpPr>
@@ -40240,6 +41998,10 @@
             <a:prstDash val="solid"/>
           </a:ln>
         </p:spPr>
+        <p:txBody>
+          <a:bodyPr/>
+          <a:p/>
+        </p:txBody>
       </p:sp>
       <p:sp>
         <p:nvSpPr>
@@ -40263,6 +42025,10 @@
             <a:prstDash val="solid"/>
           </a:ln>
         </p:spPr>
+        <p:txBody>
+          <a:bodyPr/>
+          <a:p/>
+        </p:txBody>
       </p:sp>
       <p:sp>
         <p:nvSpPr>
@@ -40286,6 +42052,10 @@
             <a:prstDash val="solid"/>
           </a:ln>
         </p:spPr>
+        <p:txBody>
+          <a:bodyPr/>
+          <a:p/>
+        </p:txBody>
       </p:sp>
       <p:sp>
         <p:nvSpPr>
@@ -40309,6 +42079,10 @@
             <a:prstDash val="solid"/>
           </a:ln>
         </p:spPr>
+        <p:txBody>
+          <a:bodyPr/>
+          <a:p/>
+        </p:txBody>
       </p:sp>
       <p:sp>
         <p:nvSpPr>
@@ -40332,6 +42106,10 @@
             <a:prstDash val="solid"/>
           </a:ln>
         </p:spPr>
+        <p:txBody>
+          <a:bodyPr/>
+          <a:p/>
+        </p:txBody>
       </p:sp>
       <p:sp>
         <p:nvSpPr>
@@ -40355,6 +42133,10 @@
             <a:prstDash val="solid"/>
           </a:ln>
         </p:spPr>
+        <p:txBody>
+          <a:bodyPr/>
+          <a:p/>
+        </p:txBody>
       </p:sp>
       <p:sp>
         <p:nvSpPr>
@@ -40378,6 +42160,10 @@
             <a:prstDash val="solid"/>
           </a:ln>
         </p:spPr>
+        <p:txBody>
+          <a:bodyPr/>
+          <a:p/>
+        </p:txBody>
       </p:sp>
       <p:sp>
         <p:nvSpPr>
@@ -40439,6 +42225,10 @@
           </a:solidFill>
           <a:ln/>
         </p:spPr>
+        <p:txBody>
+          <a:bodyPr/>
+          <a:p/>
+        </p:txBody>
       </p:sp>
       <p:sp>
         <p:nvSpPr>
@@ -40586,6 +42376,10 @@
             <a:prstDash val="solid"/>
           </a:ln>
         </p:spPr>
+        <p:txBody>
+          <a:bodyPr/>
+          <a:p/>
+        </p:txBody>
       </p:sp>
       <p:sp>
         <p:nvSpPr>
@@ -40679,6 +42473,10 @@
           </a:solidFill>
           <a:ln/>
         </p:spPr>
+        <p:txBody>
+          <a:bodyPr/>
+          <a:p/>
+        </p:txBody>
       </p:sp>
       <p:sp>
         <p:nvSpPr>
@@ -41024,6 +42822,10 @@
             <a:prstDash val="solid"/>
           </a:ln>
         </p:spPr>
+        <p:txBody>
+          <a:bodyPr/>
+          <a:p/>
+        </p:txBody>
       </p:sp>
       <p:sp>
         <p:nvSpPr>
@@ -41137,6 +42939,10 @@
           </a:solidFill>
           <a:ln/>
         </p:spPr>
+        <p:txBody>
+          <a:bodyPr/>
+          <a:p/>
+        </p:txBody>
       </p:sp>
       <p:sp>
         <p:nvSpPr>
@@ -41515,6 +43321,10 @@
             <a:prstDash val="solid"/>
           </a:ln>
         </p:spPr>
+        <p:txBody>
+          <a:bodyPr/>
+          <a:p/>
+        </p:txBody>
       </p:sp>
       <p:sp>
         <p:nvSpPr>
@@ -41537,6 +43347,10 @@
             <a:prstDash val="solid"/>
           </a:ln>
         </p:spPr>
+        <p:txBody>
+          <a:bodyPr/>
+          <a:p/>
+        </p:txBody>
       </p:sp>
       <p:sp>
         <p:nvSpPr>
@@ -41560,6 +43374,10 @@
             <a:prstDash val="solid"/>
           </a:ln>
         </p:spPr>
+        <p:txBody>
+          <a:bodyPr/>
+          <a:p/>
+        </p:txBody>
       </p:sp>
       <p:sp>
         <p:nvSpPr>
@@ -41583,6 +43401,10 @@
             <a:prstDash val="solid"/>
           </a:ln>
         </p:spPr>
+        <p:txBody>
+          <a:bodyPr/>
+          <a:p/>
+        </p:txBody>
       </p:sp>
       <p:sp>
         <p:nvSpPr>
@@ -41650,6 +43472,10 @@
             <a:prstDash val="solid"/>
           </a:ln>
         </p:spPr>
+        <p:txBody>
+          <a:bodyPr/>
+          <a:p/>
+        </p:txBody>
       </p:sp>
       <p:sp>
         <p:nvSpPr>
@@ -41756,6 +43582,10 @@
             <a:prstDash val="solid"/>
           </a:ln>
         </p:spPr>
+        <p:txBody>
+          <a:bodyPr/>
+          <a:p/>
+        </p:txBody>
       </p:sp>
       <p:sp>
         <p:nvSpPr>
@@ -41903,6 +43733,10 @@
             <a:prstDash val="solid"/>
           </a:ln>
         </p:spPr>
+        <p:txBody>
+          <a:bodyPr/>
+          <a:p/>
+        </p:txBody>
       </p:sp>
       <p:sp>
         <p:nvSpPr>
@@ -42016,6 +43850,10 @@
           </a:solidFill>
           <a:ln/>
         </p:spPr>
+        <p:txBody>
+          <a:bodyPr/>
+          <a:p/>
+        </p:txBody>
       </p:sp>
       <p:sp>
         <p:nvSpPr>
@@ -42199,6 +44037,10 @@
             <a:prstDash val="solid"/>
           </a:ln>
         </p:spPr>
+        <p:txBody>
+          <a:bodyPr/>
+          <a:p/>
+        </p:txBody>
       </p:sp>
       <p:sp>
         <p:nvSpPr>
@@ -42300,6 +44142,10 @@
             <a:prstDash val="solid"/>
           </a:ln>
         </p:spPr>
+        <p:txBody>
+          <a:bodyPr/>
+          <a:p/>
+        </p:txBody>
       </p:sp>
       <p:sp>
         <p:nvSpPr>
@@ -42361,6 +44207,10 @@
             <a:prstDash val="solid"/>
           </a:ln>
         </p:spPr>
+        <p:txBody>
+          <a:bodyPr/>
+          <a:p/>
+        </p:txBody>
       </p:sp>
       <p:sp>
         <p:nvSpPr>
@@ -42422,6 +44272,10 @@
             <a:prstDash val="solid"/>
           </a:ln>
         </p:spPr>
+        <p:txBody>
+          <a:bodyPr/>
+          <a:p/>
+        </p:txBody>
       </p:sp>
       <p:sp>
         <p:nvSpPr>
@@ -42483,6 +44337,10 @@
             <a:prstDash val="solid"/>
           </a:ln>
         </p:spPr>
+        <p:txBody>
+          <a:bodyPr/>
+          <a:p/>
+        </p:txBody>
       </p:sp>
       <p:sp>
         <p:nvSpPr>
@@ -42506,6 +44364,10 @@
             <a:prstDash val="solid"/>
           </a:ln>
         </p:spPr>
+        <p:txBody>
+          <a:bodyPr/>
+          <a:p/>
+        </p:txBody>
       </p:sp>
       <p:sp>
         <p:nvSpPr>
@@ -42529,6 +44391,10 @@
             <a:prstDash val="solid"/>
           </a:ln>
         </p:spPr>
+        <p:txBody>
+          <a:bodyPr/>
+          <a:p/>
+        </p:txBody>
       </p:sp>
       <p:sp>
         <p:nvSpPr>
@@ -42595,6 +44461,10 @@
             <a:prstDash val="solid"/>
           </a:ln>
         </p:spPr>
+        <p:txBody>
+          <a:bodyPr/>
+          <a:p/>
+        </p:txBody>
       </p:sp>
       <p:sp>
         <p:nvSpPr>
@@ -42696,6 +44566,10 @@
             <a:prstDash val="solid"/>
           </a:ln>
         </p:spPr>
+        <p:txBody>
+          <a:bodyPr/>
+          <a:p/>
+        </p:txBody>
       </p:sp>
       <p:sp>
         <p:nvSpPr>
@@ -42719,6 +44593,10 @@
             <a:prstDash val="solid"/>
           </a:ln>
         </p:spPr>
+        <p:txBody>
+          <a:bodyPr/>
+          <a:p/>
+        </p:txBody>
       </p:sp>
       <p:sp>
         <p:nvSpPr>
@@ -42781,6 +44659,10 @@
             <a:prstDash val="solid"/>
           </a:ln>
         </p:spPr>
+        <p:txBody>
+          <a:bodyPr/>
+          <a:p/>
+        </p:txBody>
       </p:sp>
       <p:sp>
         <p:nvSpPr>
@@ -42804,6 +44686,10 @@
             <a:prstDash val="solid"/>
           </a:ln>
         </p:spPr>
+        <p:txBody>
+          <a:bodyPr/>
+          <a:p/>
+        </p:txBody>
       </p:sp>
       <p:sp>
         <p:nvSpPr>
@@ -42866,6 +44752,10 @@
             <a:prstDash val="solid"/>
           </a:ln>
         </p:spPr>
+        <p:txBody>
+          <a:bodyPr/>
+          <a:p/>
+        </p:txBody>
       </p:sp>
       <p:sp>
         <p:nvSpPr>
@@ -42889,6 +44779,10 @@
             <a:prstDash val="solid"/>
           </a:ln>
         </p:spPr>
+        <p:txBody>
+          <a:bodyPr/>
+          <a:p/>
+        </p:txBody>
       </p:sp>
       <p:sp>
         <p:nvSpPr>
@@ -42955,6 +44849,10 @@
             <a:prstDash val="solid"/>
           </a:ln>
         </p:spPr>
+        <p:txBody>
+          <a:bodyPr/>
+          <a:p/>
+        </p:txBody>
       </p:sp>
       <p:sp>
         <p:nvSpPr>
@@ -43055,6 +44953,10 @@
             <a:prstDash val="solid"/>
           </a:ln>
         </p:spPr>
+        <p:txBody>
+          <a:bodyPr/>
+          <a:p/>
+        </p:txBody>
       </p:sp>
       <p:sp>
         <p:nvSpPr>
@@ -43078,6 +44980,10 @@
             <a:prstDash val="solid"/>
           </a:ln>
         </p:spPr>
+        <p:txBody>
+          <a:bodyPr/>
+          <a:p/>
+        </p:txBody>
       </p:sp>
       <p:sp>
         <p:nvSpPr>
@@ -43101,6 +45007,10 @@
             <a:prstDash val="solid"/>
           </a:ln>
         </p:spPr>
+        <p:txBody>
+          <a:bodyPr/>
+          <a:p/>
+        </p:txBody>
       </p:sp>
       <p:sp>
         <p:nvSpPr>
@@ -43165,6 +45075,10 @@
             <a:prstDash val="solid"/>
           </a:ln>
         </p:spPr>
+        <p:txBody>
+          <a:bodyPr/>
+          <a:p/>
+        </p:txBody>
       </p:sp>
       <p:sp>
         <p:nvSpPr>
@@ -43227,6 +45141,10 @@
             <a:prstDash val="solid"/>
           </a:ln>
         </p:spPr>
+        <p:txBody>
+          <a:bodyPr/>
+          <a:p/>
+        </p:txBody>
       </p:sp>
       <p:sp>
         <p:nvSpPr>
@@ -43250,6 +45168,10 @@
             <a:prstDash val="solid"/>
           </a:ln>
         </p:spPr>
+        <p:txBody>
+          <a:bodyPr/>
+          <a:p/>
+        </p:txBody>
       </p:sp>
       <p:sp>
         <p:nvSpPr>
@@ -43273,6 +45195,10 @@
             <a:prstDash val="solid"/>
           </a:ln>
         </p:spPr>
+        <p:txBody>
+          <a:bodyPr/>
+          <a:p/>
+        </p:txBody>
       </p:sp>
       <p:sp>
         <p:nvSpPr>
@@ -43339,6 +45265,10 @@
             <a:prstDash val="solid"/>
           </a:ln>
         </p:spPr>
+        <p:txBody>
+          <a:bodyPr/>
+          <a:p/>
+        </p:txBody>
       </p:sp>
       <p:sp>
         <p:nvSpPr>
@@ -43442,6 +45372,10 @@
             <a:prstDash val="solid"/>
           </a:ln>
         </p:spPr>
+        <p:txBody>
+          <a:bodyPr/>
+          <a:p/>
+        </p:txBody>
       </p:sp>
       <p:sp>
         <p:nvSpPr>
@@ -43506,6 +45440,10 @@
             <a:prstDash val="solid"/>
           </a:ln>
         </p:spPr>
+        <p:txBody>
+          <a:bodyPr/>
+          <a:p/>
+        </p:txBody>
       </p:sp>
       <p:sp>
         <p:nvSpPr>
@@ -43569,6 +45507,10 @@
             <a:tailEnd type="triangle"/>
           </a:ln>
         </p:spPr>
+        <p:txBody>
+          <a:bodyPr/>
+          <a:p/>
+        </p:txBody>
       </p:sp>
       <p:sp>
         <p:nvSpPr>
@@ -43632,6 +45574,10 @@
             <a:tailEnd type="triangle"/>
           </a:ln>
         </p:spPr>
+        <p:txBody>
+          <a:bodyPr/>
+          <a:p/>
+        </p:txBody>
       </p:sp>
       <p:sp>
         <p:nvSpPr>
@@ -43656,6 +45602,10 @@
             <a:tailEnd type="triangle"/>
           </a:ln>
         </p:spPr>
+        <p:txBody>
+          <a:bodyPr/>
+          <a:p/>
+        </p:txBody>
       </p:sp>
       <p:sp>
         <p:nvSpPr>
@@ -43722,6 +45672,10 @@
             <a:prstDash val="solid"/>
           </a:ln>
         </p:spPr>
+        <p:txBody>
+          <a:bodyPr/>
+          <a:p/>
+        </p:txBody>
       </p:sp>
       <p:sp>
         <p:nvSpPr>
@@ -43835,6 +45789,10 @@
           </a:solidFill>
           <a:ln/>
         </p:spPr>
+        <p:txBody>
+          <a:bodyPr/>
+          <a:p/>
+        </p:txBody>
       </p:sp>
       <p:sp>
         <p:nvSpPr>
@@ -44018,6 +45976,10 @@
             <a:prstDash val="solid"/>
           </a:ln>
         </p:spPr>
+        <p:txBody>
+          <a:bodyPr/>
+          <a:p/>
+        </p:txBody>
       </p:sp>
       <p:sp>
         <p:nvSpPr>
@@ -44148,6 +46110,10 @@
             <a:prstDash val="solid"/>
           </a:ln>
         </p:spPr>
+        <p:txBody>
+          <a:bodyPr/>
+          <a:p/>
+        </p:txBody>
       </p:sp>
       <p:sp>
         <p:nvSpPr>
@@ -44278,6 +46244,10 @@
             <a:prstDash val="solid"/>
           </a:ln>
         </p:spPr>
+        <p:txBody>
+          <a:bodyPr/>
+          <a:p/>
+        </p:txBody>
       </p:sp>
       <p:sp>
         <p:nvSpPr>
@@ -44492,6 +46462,10 @@
           </a:solidFill>
           <a:ln/>
         </p:spPr>
+        <p:txBody>
+          <a:bodyPr/>
+          <a:p/>
+        </p:txBody>
       </p:sp>
       <p:sp>
         <p:nvSpPr>
@@ -44872,6 +46846,10 @@
             <a:prstDash val="solid"/>
           </a:ln>
         </p:spPr>
+        <p:txBody>
+          <a:bodyPr/>
+          <a:p/>
+        </p:txBody>
       </p:sp>
       <p:sp>
         <p:nvSpPr>
@@ -44985,6 +46963,10 @@
           </a:solidFill>
           <a:ln/>
         </p:spPr>
+        <p:txBody>
+          <a:bodyPr/>
+          <a:p/>
+        </p:txBody>
       </p:sp>
       <p:sp>
         <p:nvSpPr>
@@ -45161,6 +47143,10 @@
           </a:solidFill>
           <a:ln/>
         </p:spPr>
+        <p:txBody>
+          <a:bodyPr/>
+          <a:p/>
+        </p:txBody>
       </p:sp>
       <p:sp>
         <p:nvSpPr>
@@ -45220,6 +47206,10 @@
           </a:solidFill>
           <a:ln/>
         </p:spPr>
+        <p:txBody>
+          <a:bodyPr/>
+          <a:p/>
+        </p:txBody>
       </p:sp>
       <p:sp>
         <p:nvSpPr>
@@ -45240,6 +47230,10 @@
           </a:solidFill>
           <a:ln/>
         </p:spPr>
+        <p:txBody>
+          <a:bodyPr/>
+          <a:p/>
+        </p:txBody>
       </p:sp>
       <p:sp>
         <p:nvSpPr>
@@ -45299,6 +47293,10 @@
           </a:solidFill>
           <a:ln/>
         </p:spPr>
+        <p:txBody>
+          <a:bodyPr/>
+          <a:p/>
+        </p:txBody>
       </p:sp>
       <p:sp>
         <p:nvSpPr>
@@ -45319,6 +47317,10 @@
           </a:solidFill>
           <a:ln/>
         </p:spPr>
+        <p:txBody>
+          <a:bodyPr/>
+          <a:p/>
+        </p:txBody>
       </p:sp>
       <p:sp>
         <p:nvSpPr>
@@ -45378,6 +47380,10 @@
           </a:solidFill>
           <a:ln/>
         </p:spPr>
+        <p:txBody>
+          <a:bodyPr/>
+          <a:p/>
+        </p:txBody>
       </p:sp>
       <p:sp>
         <p:nvSpPr>
@@ -45398,6 +47404,10 @@
           </a:solidFill>
           <a:ln/>
         </p:spPr>
+        <p:txBody>
+          <a:bodyPr/>
+          <a:p/>
+        </p:txBody>
       </p:sp>
       <p:sp>
         <p:nvSpPr>
@@ -45457,6 +47467,10 @@
           </a:solidFill>
           <a:ln/>
         </p:spPr>
+        <p:txBody>
+          <a:bodyPr/>
+          <a:p/>
+        </p:txBody>
       </p:sp>
       <p:sp>
         <p:nvSpPr>
@@ -45477,6 +47491,10 @@
           </a:solidFill>
           <a:ln/>
         </p:spPr>
+        <p:txBody>
+          <a:bodyPr/>
+          <a:p/>
+        </p:txBody>
       </p:sp>
       <p:sp>
         <p:nvSpPr>
@@ -45779,6 +47797,10 @@
             <a:prstDash val="solid"/>
           </a:ln>
         </p:spPr>
+        <p:txBody>
+          <a:bodyPr/>
+          <a:p/>
+        </p:txBody>
       </p:sp>
       <p:sp>
         <p:nvSpPr>
@@ -45892,6 +47914,10 @@
           </a:solidFill>
           <a:ln/>
         </p:spPr>
+        <p:txBody>
+          <a:bodyPr/>
+          <a:p/>
+        </p:txBody>
       </p:sp>
       <p:sp>
         <p:nvSpPr>
@@ -46311,6 +48337,10 @@
             <a:prstDash val="solid"/>
           </a:ln>
         </p:spPr>
+        <p:txBody>
+          <a:bodyPr/>
+          <a:p/>
+        </p:txBody>
       </p:sp>
       <p:pic>
         <p:nvPicPr>
@@ -46502,6 +48532,10 @@
             <a:prstDash val="solid"/>
           </a:ln>
         </p:spPr>
+        <p:txBody>
+          <a:bodyPr/>
+          <a:p/>
+        </p:txBody>
       </p:sp>
       <p:pic>
         <p:nvPicPr>
@@ -46693,6 +48727,10 @@
             <a:prstDash val="solid"/>
           </a:ln>
         </p:spPr>
+        <p:txBody>
+          <a:bodyPr/>
+          <a:p/>
+        </p:txBody>
       </p:sp>
       <p:pic>
         <p:nvPicPr>
@@ -46884,6 +48922,10 @@
             <a:prstDash val="solid"/>
           </a:ln>
         </p:spPr>
+        <p:txBody>
+          <a:bodyPr/>
+          <a:p/>
+        </p:txBody>
       </p:sp>
       <p:pic>
         <p:nvPicPr>
@@ -47102,6 +49144,10 @@
           </a:solidFill>
           <a:ln/>
         </p:spPr>
+        <p:txBody>
+          <a:bodyPr/>
+          <a:p/>
+        </p:txBody>
       </p:sp>
       <p:sp>
         <p:nvSpPr>
@@ -47285,6 +49331,10 @@
             <a:prstDash val="solid"/>
           </a:ln>
         </p:spPr>
+        <p:txBody>
+          <a:bodyPr/>
+          <a:p/>
+        </p:txBody>
       </p:sp>
       <p:pic>
         <p:nvPicPr>
@@ -47336,6 +49386,10 @@
             <a:prstDash val="solid"/>
           </a:ln>
         </p:spPr>
+        <p:txBody>
+          <a:bodyPr/>
+          <a:p/>
+        </p:txBody>
       </p:sp>
       <p:pic>
         <p:nvPicPr>
@@ -47387,6 +49441,10 @@
             <a:prstDash val="solid"/>
           </a:ln>
         </p:spPr>
+        <p:txBody>
+          <a:bodyPr/>
+          <a:p/>
+        </p:txBody>
       </p:sp>
       <p:pic>
         <p:nvPicPr>
@@ -47477,6 +49535,10 @@
             <a:prstDash val="solid"/>
           </a:ln>
         </p:spPr>
+        <p:txBody>
+          <a:bodyPr/>
+          <a:p/>
+        </p:txBody>
       </p:sp>
       <p:pic>
         <p:nvPicPr>
@@ -47555,6 +49617,10 @@
           </a:solidFill>
           <a:ln/>
         </p:spPr>
+        <p:txBody>
+          <a:bodyPr/>
+          <a:p/>
+        </p:txBody>
       </p:sp>
       <p:sp>
         <p:nvSpPr>
@@ -47865,6 +49931,10 @@
             <a:prstDash val="solid"/>
           </a:ln>
         </p:spPr>
+        <p:txBody>
+          <a:bodyPr/>
+          <a:p/>
+        </p:txBody>
       </p:sp>
       <p:pic>
         <p:nvPicPr>
@@ -47916,6 +49986,10 @@
             <a:prstDash val="solid"/>
           </a:ln>
         </p:spPr>
+        <p:txBody>
+          <a:bodyPr/>
+          <a:p/>
+        </p:txBody>
       </p:sp>
       <p:pic>
         <p:nvPicPr>
@@ -47967,6 +50041,10 @@
             <a:prstDash val="solid"/>
           </a:ln>
         </p:spPr>
+        <p:txBody>
+          <a:bodyPr/>
+          <a:p/>
+        </p:txBody>
       </p:sp>
       <p:sp>
         <p:nvSpPr>
@@ -48080,6 +50158,10 @@
           </a:solidFill>
           <a:ln/>
         </p:spPr>
+        <p:txBody>
+          <a:bodyPr/>
+          <a:p/>
+        </p:txBody>
       </p:sp>
       <p:sp>
         <p:nvSpPr>
@@ -48263,6 +50345,10 @@
             <a:prstDash val="solid"/>
           </a:ln>
         </p:spPr>
+        <p:txBody>
+          <a:bodyPr/>
+          <a:p/>
+        </p:txBody>
       </p:sp>
       <p:sp>
         <p:nvSpPr>
@@ -48283,6 +50369,10 @@
           </a:solidFill>
           <a:ln/>
         </p:spPr>
+        <p:txBody>
+          <a:bodyPr/>
+          <a:p/>
+        </p:txBody>
       </p:sp>
       <p:sp>
         <p:nvSpPr>
@@ -48430,6 +50520,10 @@
             <a:prstDash val="solid"/>
           </a:ln>
         </p:spPr>
+        <p:txBody>
+          <a:bodyPr/>
+          <a:p/>
+        </p:txBody>
       </p:sp>
       <p:sp>
         <p:nvSpPr>
@@ -48450,6 +50544,10 @@
           </a:solidFill>
           <a:ln/>
         </p:spPr>
+        <p:txBody>
+          <a:bodyPr/>
+          <a:p/>
+        </p:txBody>
       </p:sp>
       <p:sp>
         <p:nvSpPr>
@@ -48597,6 +50695,10 @@
             <a:prstDash val="solid"/>
           </a:ln>
         </p:spPr>
+        <p:txBody>
+          <a:bodyPr/>
+          <a:p/>
+        </p:txBody>
       </p:sp>
       <p:sp>
         <p:nvSpPr>
@@ -48617,6 +50719,10 @@
           </a:solidFill>
           <a:ln/>
         </p:spPr>
+        <p:txBody>
+          <a:bodyPr/>
+          <a:p/>
+        </p:txBody>
       </p:sp>
       <p:sp>
         <p:nvSpPr>
@@ -48764,6 +50870,10 @@
             <a:prstDash val="solid"/>
           </a:ln>
         </p:spPr>
+        <p:txBody>
+          <a:bodyPr/>
+          <a:p/>
+        </p:txBody>
       </p:sp>
       <p:sp>
         <p:nvSpPr>
@@ -48784,6 +50894,10 @@
           </a:solidFill>
           <a:ln/>
         </p:spPr>
+        <p:txBody>
+          <a:bodyPr/>
+          <a:p/>
+        </p:txBody>
       </p:sp>
       <p:sp>
         <p:nvSpPr>
@@ -48931,6 +51045,10 @@
             <a:prstDash val="solid"/>
           </a:ln>
         </p:spPr>
+        <p:txBody>
+          <a:bodyPr/>
+          <a:p/>
+        </p:txBody>
       </p:sp>
       <p:sp>
         <p:nvSpPr>
@@ -48951,6 +51069,10 @@
           </a:solidFill>
           <a:ln/>
         </p:spPr>
+        <p:txBody>
+          <a:bodyPr/>
+          <a:p/>
+        </p:txBody>
       </p:sp>
       <p:sp>
         <p:nvSpPr>
@@ -49125,6 +51247,10 @@
           </a:solidFill>
           <a:ln/>
         </p:spPr>
+        <p:txBody>
+          <a:bodyPr/>
+          <a:p/>
+        </p:txBody>
       </p:sp>
       <p:sp>
         <p:nvSpPr>
@@ -49269,6 +51395,10 @@
             <a:prstDash val="solid"/>
           </a:ln>
         </p:spPr>
+        <p:txBody>
+          <a:bodyPr/>
+          <a:p/>
+        </p:txBody>
       </p:sp>
       <p:sp>
         <p:nvSpPr>
@@ -49289,6 +51419,10 @@
           </a:solidFill>
           <a:ln/>
         </p:spPr>
+        <p:txBody>
+          <a:bodyPr/>
+          <a:p/>
+        </p:txBody>
       </p:sp>
       <p:sp>
         <p:nvSpPr>
@@ -49436,6 +51570,10 @@
             <a:prstDash val="solid"/>
           </a:ln>
         </p:spPr>
+        <p:txBody>
+          <a:bodyPr/>
+          <a:p/>
+        </p:txBody>
       </p:sp>
       <p:sp>
         <p:nvSpPr>
@@ -49456,6 +51594,10 @@
           </a:solidFill>
           <a:ln/>
         </p:spPr>
+        <p:txBody>
+          <a:bodyPr/>
+          <a:p/>
+        </p:txBody>
       </p:sp>
       <p:sp>
         <p:nvSpPr>
@@ -49603,6 +51745,10 @@
             <a:prstDash val="solid"/>
           </a:ln>
         </p:spPr>
+        <p:txBody>
+          <a:bodyPr/>
+          <a:p/>
+        </p:txBody>
       </p:sp>
       <p:sp>
         <p:nvSpPr>
@@ -49623,6 +51769,10 @@
           </a:solidFill>
           <a:ln/>
         </p:spPr>
+        <p:txBody>
+          <a:bodyPr/>
+          <a:p/>
+        </p:txBody>
       </p:sp>
       <p:sp>
         <p:nvSpPr>
@@ -49770,6 +51920,10 @@
             <a:prstDash val="solid"/>
           </a:ln>
         </p:spPr>
+        <p:txBody>
+          <a:bodyPr/>
+          <a:p/>
+        </p:txBody>
       </p:sp>
       <p:sp>
         <p:nvSpPr>
@@ -49790,6 +51944,10 @@
           </a:solidFill>
           <a:ln/>
         </p:spPr>
+        <p:txBody>
+          <a:bodyPr/>
+          <a:p/>
+        </p:txBody>
       </p:sp>
       <p:sp>
         <p:nvSpPr>
@@ -49883,7 +52041,7 @@
                 <a:ea typeface="Calibri" pitchFamily="34" charset="-122"/>
                 <a:cs typeface="Calibri" pitchFamily="34" charset="-120"/>
               </a:rPr>
-              <a:t>manufacturing-ready files and GD&amp;T documentation demonstrating your design-for-manufacturing reasoning.   </a:t>
+              <a:t>manufacturing-ready files and GD&amp;T documentation demonstrating your design-for-manufacturing reasoning, plus reading and safely editing a G-code file.   </a:t>
             </a:r>
             <a:endParaRPr lang="en-US" sz="1200" dirty="0"/>
           </a:p>
@@ -49979,6 +52137,10 @@
           </a:solidFill>
           <a:ln/>
         </p:spPr>
+        <p:txBody>
+          <a:bodyPr/>
+          <a:p/>
+        </p:txBody>
       </p:sp>
       <p:sp>
         <p:nvSpPr>
@@ -50162,6 +52324,10 @@
             <a:prstDash val="solid"/>
           </a:ln>
         </p:spPr>
+        <p:txBody>
+          <a:bodyPr/>
+          <a:p/>
+        </p:txBody>
       </p:sp>
       <p:sp>
         <p:nvSpPr>
@@ -50182,6 +52348,10 @@
           </a:solidFill>
           <a:ln/>
         </p:spPr>
+        <p:txBody>
+          <a:bodyPr/>
+          <a:p/>
+        </p:txBody>
       </p:sp>
       <p:sp>
         <p:nvSpPr>
@@ -50377,6 +52547,10 @@
             <a:prstDash val="solid"/>
           </a:ln>
         </p:spPr>
+        <p:txBody>
+          <a:bodyPr/>
+          <a:p/>
+        </p:txBody>
       </p:sp>
       <p:sp>
         <p:nvSpPr>
@@ -50397,6 +52571,10 @@
           </a:solidFill>
           <a:ln/>
         </p:spPr>
+        <p:txBody>
+          <a:bodyPr/>
+          <a:p/>
+        </p:txBody>
       </p:sp>
       <p:sp>
         <p:nvSpPr>
@@ -50592,6 +52770,10 @@
             <a:prstDash val="solid"/>
           </a:ln>
         </p:spPr>
+        <p:txBody>
+          <a:bodyPr/>
+          <a:p/>
+        </p:txBody>
       </p:sp>
       <p:sp>
         <p:nvSpPr>
@@ -50612,6 +52794,10 @@
           </a:solidFill>
           <a:ln/>
         </p:spPr>
+        <p:txBody>
+          <a:bodyPr/>
+          <a:p/>
+        </p:txBody>
       </p:sp>
       <p:sp>
         <p:nvSpPr>
@@ -50807,6 +52993,10 @@
             <a:prstDash val="solid"/>
           </a:ln>
         </p:spPr>
+        <p:txBody>
+          <a:bodyPr/>
+          <a:p/>
+        </p:txBody>
       </p:sp>
       <p:sp>
         <p:nvSpPr>
@@ -50827,6 +53017,10 @@
           </a:solidFill>
           <a:ln/>
         </p:spPr>
+        <p:txBody>
+          <a:bodyPr/>
+          <a:p/>
+        </p:txBody>
       </p:sp>
       <p:sp>
         <p:nvSpPr>
@@ -51022,6 +53216,10 @@
             <a:prstDash val="solid"/>
           </a:ln>
         </p:spPr>
+        <p:txBody>
+          <a:bodyPr/>
+          <a:p/>
+        </p:txBody>
       </p:sp>
       <p:sp>
         <p:nvSpPr>
@@ -51042,6 +53240,10 @@
           </a:solidFill>
           <a:ln/>
         </p:spPr>
+        <p:txBody>
+          <a:bodyPr/>
+          <a:p/>
+        </p:txBody>
       </p:sp>
       <p:sp>
         <p:nvSpPr>
@@ -51163,7 +53365,7 @@
                 <a:ea typeface="Calibri" pitchFamily="34" charset="-122"/>
                 <a:cs typeface="Calibri" pitchFamily="34" charset="-120"/>
               </a:rPr>
-              <a:t>GD&amp;T, manufacturing files, additive/subtractive/laser, DFM, safety</a:t>
+              <a:t>GD&amp;T, manufacturing files, G-code, additive/subtractive/laser, DFM, safety</a:t>
             </a:r>
             <a:endParaRPr lang="en-US" sz="1050" dirty="0"/>
           </a:p>
@@ -51423,6 +53625,2340 @@
               <a:t>30% (w/ prototype)</a:t>
             </a:r>
             <a:endParaRPr lang="en-US" sz="1050" dirty="0"/>
+          </a:p>
+        </p:txBody>
+      </p:sp>
+    </p:spTree>
+  </p:cSld>
+  <p:clrMapOvr>
+    <a:masterClrMapping/>
+  </p:clrMapOvr>
+</p:sld>
+</file>
+
+<file path=ppt/slides/slide56.xml><?xml version="1.0" encoding="utf-8"?>
+<p:sld xmlns:a="http://schemas.openxmlformats.org/drawingml/2006/main" xmlns:p="http://schemas.openxmlformats.org/presentationml/2006/main" xmlns:r="http://schemas.openxmlformats.org/officeDocument/2006/relationships">
+  <p:cSld>
+    <p:spTree>
+      <p:nvGrpSpPr>
+        <p:cNvPr id="1" name=""/>
+        <p:cNvGrpSpPr/>
+        <p:nvPr/>
+      </p:nvGrpSpPr>
+      <p:grpSpPr/>
+      <p:sp>
+        <p:nvSpPr>
+          <p:cNvPr id="2" name="Rounded Rectangle 1"/>
+          <p:cNvSpPr/>
+          <p:nvPr/>
+        </p:nvSpPr>
+        <p:spPr>
+          <a:xfrm>
+            <a:off x="502920" y="411480"/>
+            <a:ext cx="757123" cy="310896"/>
+          </a:xfrm>
+          <a:prstGeom prst="roundRect">
+            <a:avLst>
+              <a:gd name="adj" fmla="val 50000"/>
+            </a:avLst>
+          </a:prstGeom>
+          <a:solidFill>
+            <a:srgbClr val="D97706"/>
+          </a:solidFill>
+          <a:ln>
+            <a:noFill/>
+          </a:ln>
+          <a:effectLst/>
+        </p:spPr>
+        <p:style>
+          <a:lnRef idx="1">
+            <a:schemeClr val="accent1"/>
+          </a:lnRef>
+          <a:fillRef idx="3">
+            <a:schemeClr val="accent1"/>
+          </a:fillRef>
+          <a:effectRef idx="2">
+            <a:schemeClr val="accent1"/>
+          </a:effectRef>
+          <a:fontRef idx="minor">
+            <a:schemeClr val="lt1"/>
+          </a:fontRef>
+        </p:style>
+        <p:txBody>
+          <a:bodyPr rtlCol="0" anchor="ctr" lIns="0" rIns="0" tIns="0" bIns="0"/>
+          <a:lstStyle/>
+          <a:p>
+            <a:pPr algn="ctr"/>
+            <a:r>
+              <a:rPr sz="1050" b="1" i="0">
+                <a:solidFill>
+                  <a:srgbClr val="FFFFFF"/>
+                </a:solidFill>
+                <a:latin typeface="Calibri"/>
+              </a:rPr>
+              <a:t>UNIT 4</a:t>
+            </a:r>
+          </a:p>
+        </p:txBody>
+      </p:sp>
+      <p:sp>
+        <p:nvSpPr>
+          <p:cNvPr id="3" name="TextBox 2"/>
+          <p:cNvSpPr txBox="1"/>
+          <p:nvPr/>
+        </p:nvSpPr>
+        <p:spPr>
+          <a:xfrm>
+            <a:off x="502920" y="768096"/>
+            <a:ext cx="11155680" cy="603504"/>
+          </a:xfrm>
+          <a:prstGeom prst="rect">
+            <a:avLst/>
+          </a:prstGeom>
+          <a:noFill/>
+        </p:spPr>
+        <p:txBody>
+          <a:bodyPr wrap="square" anchor="ctr" lIns="0" rIns="0" tIns="0" bIns="0">
+            <a:spAutoFit/>
+          </a:bodyPr>
+          <a:lstStyle/>
+          <a:p>
+            <a:r>
+              <a:rPr sz="2600" b="1" i="0">
+                <a:solidFill>
+                  <a:srgbClr val="0F2942"/>
+                </a:solidFill>
+                <a:latin typeface="Cambria"/>
+              </a:rPr>
+              <a:t>An Introduction to G-code</a:t>
+            </a:r>
+          </a:p>
+        </p:txBody>
+      </p:sp>
+      <p:sp>
+        <p:nvSpPr>
+          <p:cNvPr id="4" name="TextBox 3"/>
+          <p:cNvSpPr txBox="1"/>
+          <p:nvPr/>
+        </p:nvSpPr>
+        <p:spPr>
+          <a:xfrm>
+            <a:off x="502920" y="1298448"/>
+            <a:ext cx="11155680" cy="365760"/>
+          </a:xfrm>
+          <a:prstGeom prst="rect">
+            <a:avLst/>
+          </a:prstGeom>
+          <a:noFill/>
+        </p:spPr>
+        <p:txBody>
+          <a:bodyPr wrap="square" anchor="ctr" lIns="0" rIns="0" tIns="0" bIns="0">
+            <a:spAutoFit/>
+          </a:bodyPr>
+          <a:lstStyle/>
+          <a:p>
+            <a:r>
+              <a:rPr sz="1250" b="0" i="1">
+                <a:solidFill>
+                  <a:srgbClr val="8592A3"/>
+                </a:solidFill>
+                <a:latin typeface="Calibri"/>
+              </a:rPr>
+              <a:t>A plain-text list of moves the machine runs one line at a time — the shared language of CNC mills, 3D-printer slicers, and laser cutters.</a:t>
+            </a:r>
+          </a:p>
+        </p:txBody>
+      </p:sp>
+      <p:sp>
+        <p:nvSpPr>
+          <p:cNvPr id="5" name="TextBox 4"/>
+          <p:cNvSpPr txBox="1"/>
+          <p:nvPr/>
+        </p:nvSpPr>
+        <p:spPr>
+          <a:xfrm>
+            <a:off x="502920" y="6565392"/>
+            <a:ext cx="9000000" cy="256032"/>
+          </a:xfrm>
+          <a:prstGeom prst="rect">
+            <a:avLst/>
+          </a:prstGeom>
+          <a:noFill/>
+        </p:spPr>
+        <p:txBody>
+          <a:bodyPr wrap="square" anchor="ctr" lIns="0" rIns="0" tIns="0" bIns="0">
+            <a:spAutoFit/>
+          </a:bodyPr>
+          <a:lstStyle/>
+          <a:p>
+            <a:r>
+              <a:rPr sz="850" b="0" i="0">
+                <a:solidFill>
+                  <a:srgbClr val="8592A3"/>
+                </a:solidFill>
+                <a:latin typeface="Calibri"/>
+              </a:rPr>
+              <a:t>MECH 151 · Technical Design — Unit Reference Guide</a:t>
+            </a:r>
+          </a:p>
+        </p:txBody>
+      </p:sp>
+      <p:sp>
+        <p:nvSpPr>
+          <p:cNvPr id="6" name="TextBox 5"/>
+          <p:cNvSpPr txBox="1"/>
+          <p:nvPr/>
+        </p:nvSpPr>
+        <p:spPr>
+          <a:xfrm>
+            <a:off x="502920" y="1902240"/>
+            <a:ext cx="5715000" cy="2560320"/>
+          </a:xfrm>
+          <a:prstGeom prst="rect">
+            <a:avLst/>
+          </a:prstGeom>
+          <a:noFill/>
+        </p:spPr>
+        <p:txBody>
+          <a:bodyPr wrap="square" anchor="t" lIns="0" rIns="0" tIns="0" bIns="0">
+            <a:spAutoFit/>
+          </a:bodyPr>
+          <a:lstStyle/>
+          <a:p>
+            <a:pPr marL="274320" indent="-274320">
+              <a:lnSpc>
+                <a:spcPct val="105000"/>
+              </a:lnSpc>
+              <a:spcAft>
+                <a:spcPts val="600"/>
+              </a:spcAft>
+              <a:buChar char="●"/>
+            </a:pPr>
+            <a:r>
+              <a:rPr sz="1150" b="1" i="0">
+                <a:solidFill>
+                  <a:srgbClr val="0F2942"/>
+                </a:solidFill>
+                <a:latin typeface="Calibri"/>
+              </a:rPr>
+              <a:t>What it is — </a:t>
+            </a:r>
+            <a:r>
+              <a:rPr sz="1150" b="0" i="0">
+                <a:solidFill>
+                  <a:srgbClr val="44536B"/>
+                </a:solidFill>
+                <a:latin typeface="Calibri"/>
+              </a:rPr>
+              <a:t>a text file a controller runs top to bottom; G words set motion and modes, M words switch machine functions</a:t>
+            </a:r>
+          </a:p>
+          <a:p>
+            <a:pPr marL="274320" indent="-274320">
+              <a:lnSpc>
+                <a:spcPct val="105000"/>
+              </a:lnSpc>
+              <a:spcAft>
+                <a:spcPts val="600"/>
+              </a:spcAft>
+              <a:buChar char="●"/>
+            </a:pPr>
+            <a:r>
+              <a:rPr sz="1150" b="1" i="0">
+                <a:solidFill>
+                  <a:srgbClr val="0F2942"/>
+                </a:solidFill>
+                <a:latin typeface="Calibri"/>
+              </a:rPr>
+              <a:t>A line is a block — </a:t>
+            </a:r>
+            <a:r>
+              <a:rPr sz="1150" b="0" i="0">
+                <a:solidFill>
+                  <a:srgbClr val="44536B"/>
+                </a:solidFill>
+                <a:latin typeface="Calibri"/>
+              </a:rPr>
+              <a:t>a list of words, each an address letter plus a value: X25.0 is address X, value 25.0</a:t>
+            </a:r>
+          </a:p>
+          <a:p>
+            <a:pPr marL="274320" indent="-274320">
+              <a:lnSpc>
+                <a:spcPct val="105000"/>
+              </a:lnSpc>
+              <a:spcAft>
+                <a:spcPts val="600"/>
+              </a:spcAft>
+              <a:buChar char="●"/>
+            </a:pPr>
+            <a:r>
+              <a:rPr sz="1150" b="1" i="0">
+                <a:solidFill>
+                  <a:srgbClr val="0F2942"/>
+                </a:solidFill>
+                <a:latin typeface="Calibri"/>
+              </a:rPr>
+              <a:t>Modal settings stick — </a:t>
+            </a:r>
+            <a:r>
+              <a:rPr sz="1150" b="0" i="0">
+                <a:solidFill>
+                  <a:srgbClr val="44536B"/>
+                </a:solidFill>
+                <a:latin typeface="Calibri"/>
+              </a:rPr>
+              <a:t>units, positioning, feed and speed stay in effect until a later line changes them</a:t>
+            </a:r>
+          </a:p>
+          <a:p>
+            <a:pPr marL="274320" indent="-274320">
+              <a:lnSpc>
+                <a:spcPct val="105000"/>
+              </a:lnSpc>
+              <a:spcAft>
+                <a:spcPts val="600"/>
+              </a:spcAft>
+              <a:buChar char="●"/>
+            </a:pPr>
+            <a:r>
+              <a:rPr sz="1150" b="1" i="0">
+                <a:solidFill>
+                  <a:srgbClr val="0F2942"/>
+                </a:solidFill>
+                <a:latin typeface="Calibri"/>
+              </a:rPr>
+              <a:t>Where it comes from — </a:t>
+            </a:r>
+            <a:r>
+              <a:rPr sz="1150" b="0" i="0">
+                <a:solidFill>
+                  <a:srgbClr val="44536B"/>
+                </a:solidFill>
+                <a:latin typeface="Calibri"/>
+              </a:rPr>
+              <a:t>CAM or a slicer writes it; a post-processor tailors it to your exact machine — then you set the part zero and dry-run before cutting</a:t>
+            </a:r>
+          </a:p>
+        </p:txBody>
+      </p:sp>
+      <p:sp>
+        <p:nvSpPr>
+          <p:cNvPr id="7" name="Rounded Rectangle 6"/>
+          <p:cNvSpPr/>
+          <p:nvPr/>
+        </p:nvSpPr>
+        <p:spPr>
+          <a:xfrm>
+            <a:off x="6492240" y="1902240"/>
+            <a:ext cx="5211475" cy="2100000"/>
+          </a:xfrm>
+          <a:prstGeom prst="roundRect">
+            <a:avLst>
+              <a:gd name="adj" fmla="val 3500"/>
+            </a:avLst>
+          </a:prstGeom>
+          <a:solidFill>
+            <a:srgbClr val="F3F6F9"/>
+          </a:solidFill>
+          <a:ln w="12700">
+            <a:solidFill>
+              <a:srgbClr val="E1E7EE"/>
+            </a:solidFill>
+          </a:ln>
+          <a:effectLst/>
+        </p:spPr>
+        <p:style>
+          <a:lnRef idx="1">
+            <a:schemeClr val="accent1"/>
+          </a:lnRef>
+          <a:fillRef idx="3">
+            <a:schemeClr val="accent1"/>
+          </a:fillRef>
+          <a:effectRef idx="2">
+            <a:schemeClr val="accent1"/>
+          </a:effectRef>
+          <a:fontRef idx="minor">
+            <a:schemeClr val="lt1"/>
+          </a:fontRef>
+        </p:style>
+        <p:txBody>
+          <a:bodyPr rtlCol="0" anchor="ctr"/>
+          <a:lstStyle/>
+          <a:p>
+            <a:pPr algn="ctr"/>
+          </a:p>
+        </p:txBody>
+      </p:sp>
+      <p:sp>
+        <p:nvSpPr>
+          <p:cNvPr id="8" name="TextBox 7"/>
+          <p:cNvSpPr txBox="1"/>
+          <p:nvPr/>
+        </p:nvSpPr>
+        <p:spPr>
+          <a:xfrm>
+            <a:off x="6492240" y="2042240"/>
+            <a:ext cx="5211475" cy="230000"/>
+          </a:xfrm>
+          <a:prstGeom prst="rect">
+            <a:avLst/>
+          </a:prstGeom>
+          <a:noFill/>
+        </p:spPr>
+        <p:txBody>
+          <a:bodyPr wrap="square" anchor="ctr" lIns="0" rIns="0" tIns="0" bIns="0">
+            <a:spAutoFit/>
+          </a:bodyPr>
+          <a:lstStyle/>
+          <a:p>
+            <a:pPr algn="ctr"/>
+            <a:r>
+              <a:rPr sz="950" b="0" i="1">
+                <a:solidFill>
+                  <a:srgbClr val="8592A3"/>
+                </a:solidFill>
+                <a:latin typeface="Calibri"/>
+              </a:rPr>
+              <a:t>One block, broken down</a:t>
+            </a:r>
+          </a:p>
+        </p:txBody>
+      </p:sp>
+      <p:sp>
+        <p:nvSpPr>
+          <p:cNvPr id="9" name="Rectangle 8"/>
+          <p:cNvSpPr/>
+          <p:nvPr/>
+        </p:nvSpPr>
+        <p:spPr>
+          <a:xfrm>
+            <a:off x="6812280" y="2422240"/>
+            <a:ext cx="4571395" cy="452000"/>
+          </a:xfrm>
+          <a:prstGeom prst="rect">
+            <a:avLst/>
+          </a:prstGeom>
+          <a:solidFill>
+            <a:srgbClr val="FFFFFF"/>
+          </a:solidFill>
+          <a:ln w="19050">
+            <a:solidFill>
+              <a:srgbClr val="0F2942"/>
+            </a:solidFill>
+          </a:ln>
+          <a:effectLst/>
+        </p:spPr>
+        <p:style>
+          <a:lnRef idx="1">
+            <a:schemeClr val="accent1"/>
+          </a:lnRef>
+          <a:fillRef idx="3">
+            <a:schemeClr val="accent1"/>
+          </a:fillRef>
+          <a:effectRef idx="2">
+            <a:schemeClr val="accent1"/>
+          </a:effectRef>
+          <a:fontRef idx="minor">
+            <a:schemeClr val="lt1"/>
+          </a:fontRef>
+        </p:style>
+        <p:txBody>
+          <a:bodyPr rtlCol="0" anchor="ctr"/>
+          <a:lstStyle/>
+          <a:p>
+            <a:pPr algn="ctr"/>
+          </a:p>
+        </p:txBody>
+      </p:sp>
+      <p:sp>
+        <p:nvSpPr>
+          <p:cNvPr id="10" name="TextBox 9"/>
+          <p:cNvSpPr txBox="1"/>
+          <p:nvPr/>
+        </p:nvSpPr>
+        <p:spPr>
+          <a:xfrm>
+            <a:off x="6812280" y="2422240"/>
+            <a:ext cx="4571395" cy="452000"/>
+          </a:xfrm>
+          <a:prstGeom prst="rect">
+            <a:avLst/>
+          </a:prstGeom>
+          <a:noFill/>
+        </p:spPr>
+        <p:txBody>
+          <a:bodyPr wrap="square" anchor="ctr" lIns="0" rIns="0" tIns="0" bIns="0">
+            <a:spAutoFit/>
+          </a:bodyPr>
+          <a:lstStyle/>
+          <a:p>
+            <a:pPr algn="ctr"/>
+            <a:r>
+              <a:rPr sz="1350" b="1" i="0">
+                <a:solidFill>
+                  <a:srgbClr val="0F2942"/>
+                </a:solidFill>
+                <a:latin typeface="Consolas"/>
+              </a:rPr>
+              <a:t>G01    X25.0  Y10.0    F150</a:t>
+            </a:r>
+          </a:p>
+        </p:txBody>
+      </p:sp>
+      <p:cxnSp>
+        <p:nvCxnSpPr>
+          <p:cNvPr id="11" name="Connector 10"/>
+          <p:cNvCxnSpPr/>
+          <p:nvPr/>
+        </p:nvCxnSpPr>
+        <p:spPr>
+          <a:xfrm>
+            <a:off x="7543703" y="2874240"/>
+            <a:ext cx="0" cy="180000"/>
+          </a:xfrm>
+          <a:prstGeom prst="line">
+            <a:avLst/>
+          </a:prstGeom>
+          <a:ln w="12700">
+            <a:solidFill>
+              <a:srgbClr val="8592A3"/>
+            </a:solidFill>
+          </a:ln>
+          <a:effectLst/>
+        </p:spPr>
+        <p:style>
+          <a:lnRef idx="2">
+            <a:schemeClr val="accent1"/>
+          </a:lnRef>
+          <a:fillRef idx="0">
+            <a:schemeClr val="accent1"/>
+          </a:fillRef>
+          <a:effectRef idx="1">
+            <a:schemeClr val="accent1"/>
+          </a:effectRef>
+          <a:fontRef idx="minor">
+            <a:schemeClr val="tx1"/>
+          </a:fontRef>
+        </p:style>
+      </p:cxnSp>
+      <p:sp>
+        <p:nvSpPr>
+          <p:cNvPr id="12" name="TextBox 11"/>
+          <p:cNvSpPr txBox="1"/>
+          <p:nvPr/>
+        </p:nvSpPr>
+        <p:spPr>
+          <a:xfrm>
+            <a:off x="6593703" y="3069240"/>
+            <a:ext cx="1900000" cy="470000"/>
+          </a:xfrm>
+          <a:prstGeom prst="rect">
+            <a:avLst/>
+          </a:prstGeom>
+          <a:noFill/>
+        </p:spPr>
+        <p:txBody>
+          <a:bodyPr wrap="square" anchor="t" lIns="0" rIns="0" tIns="0" bIns="0">
+            <a:spAutoFit/>
+          </a:bodyPr>
+          <a:lstStyle/>
+          <a:p>
+            <a:pPr algn="ctr">
+              <a:lnSpc>
+                <a:spcPct val="105000"/>
+              </a:lnSpc>
+            </a:pPr>
+            <a:r>
+              <a:rPr sz="900" b="0" i="0">
+                <a:solidFill>
+                  <a:srgbClr val="44536B"/>
+                </a:solidFill>
+                <a:latin typeface="Calibri"/>
+              </a:rPr>
+              <a:t>linear feed move</a:t>
+            </a:r>
+          </a:p>
+          <a:p>
+            <a:pPr algn="ctr">
+              <a:lnSpc>
+                <a:spcPct val="105000"/>
+              </a:lnSpc>
+            </a:pPr>
+            <a:r>
+              <a:rPr sz="900" b="0" i="0">
+                <a:solidFill>
+                  <a:srgbClr val="8592A3"/>
+                </a:solidFill>
+                <a:latin typeface="Calibri"/>
+              </a:rPr>
+              <a:t>(modal)</a:t>
+            </a:r>
+          </a:p>
+        </p:txBody>
+      </p:sp>
+      <p:cxnSp>
+        <p:nvCxnSpPr>
+          <p:cNvPr id="13" name="Connector 12"/>
+          <p:cNvCxnSpPr/>
+          <p:nvPr/>
+        </p:nvCxnSpPr>
+        <p:spPr>
+          <a:xfrm>
+            <a:off x="9189405" y="2874240"/>
+            <a:ext cx="0" cy="180000"/>
+          </a:xfrm>
+          <a:prstGeom prst="line">
+            <a:avLst/>
+          </a:prstGeom>
+          <a:ln w="12700">
+            <a:solidFill>
+              <a:srgbClr val="8592A3"/>
+            </a:solidFill>
+          </a:ln>
+          <a:effectLst/>
+        </p:spPr>
+        <p:style>
+          <a:lnRef idx="2">
+            <a:schemeClr val="accent1"/>
+          </a:lnRef>
+          <a:fillRef idx="0">
+            <a:schemeClr val="accent1"/>
+          </a:fillRef>
+          <a:effectRef idx="1">
+            <a:schemeClr val="accent1"/>
+          </a:effectRef>
+          <a:fontRef idx="minor">
+            <a:schemeClr val="tx1"/>
+          </a:fontRef>
+        </p:style>
+      </p:cxnSp>
+      <p:sp>
+        <p:nvSpPr>
+          <p:cNvPr id="14" name="TextBox 13"/>
+          <p:cNvSpPr txBox="1"/>
+          <p:nvPr/>
+        </p:nvSpPr>
+        <p:spPr>
+          <a:xfrm>
+            <a:off x="8239405" y="3069240"/>
+            <a:ext cx="1900000" cy="470000"/>
+          </a:xfrm>
+          <a:prstGeom prst="rect">
+            <a:avLst/>
+          </a:prstGeom>
+          <a:noFill/>
+        </p:spPr>
+        <p:txBody>
+          <a:bodyPr wrap="square" anchor="t" lIns="0" rIns="0" tIns="0" bIns="0">
+            <a:spAutoFit/>
+          </a:bodyPr>
+          <a:lstStyle/>
+          <a:p>
+            <a:pPr algn="ctr">
+              <a:lnSpc>
+                <a:spcPct val="105000"/>
+              </a:lnSpc>
+            </a:pPr>
+            <a:r>
+              <a:rPr sz="900" b="0" i="0">
+                <a:solidFill>
+                  <a:srgbClr val="44536B"/>
+                </a:solidFill>
+                <a:latin typeface="Calibri"/>
+              </a:rPr>
+              <a:t>target coordinates</a:t>
+            </a:r>
+          </a:p>
+        </p:txBody>
+      </p:sp>
+      <p:cxnSp>
+        <p:nvCxnSpPr>
+          <p:cNvPr id="15" name="Connector 14"/>
+          <p:cNvCxnSpPr/>
+          <p:nvPr/>
+        </p:nvCxnSpPr>
+        <p:spPr>
+          <a:xfrm>
+            <a:off x="10697965" y="2874240"/>
+            <a:ext cx="0" cy="180000"/>
+          </a:xfrm>
+          <a:prstGeom prst="line">
+            <a:avLst/>
+          </a:prstGeom>
+          <a:ln w="12700">
+            <a:solidFill>
+              <a:srgbClr val="8592A3"/>
+            </a:solidFill>
+          </a:ln>
+          <a:effectLst/>
+        </p:spPr>
+        <p:style>
+          <a:lnRef idx="2">
+            <a:schemeClr val="accent1"/>
+          </a:lnRef>
+          <a:fillRef idx="0">
+            <a:schemeClr val="accent1"/>
+          </a:fillRef>
+          <a:effectRef idx="1">
+            <a:schemeClr val="accent1"/>
+          </a:effectRef>
+          <a:fontRef idx="minor">
+            <a:schemeClr val="tx1"/>
+          </a:fontRef>
+        </p:style>
+      </p:cxnSp>
+      <p:sp>
+        <p:nvSpPr>
+          <p:cNvPr id="16" name="TextBox 15"/>
+          <p:cNvSpPr txBox="1"/>
+          <p:nvPr/>
+        </p:nvSpPr>
+        <p:spPr>
+          <a:xfrm>
+            <a:off x="9747965" y="3069240"/>
+            <a:ext cx="1900000" cy="470000"/>
+          </a:xfrm>
+          <a:prstGeom prst="rect">
+            <a:avLst/>
+          </a:prstGeom>
+          <a:noFill/>
+        </p:spPr>
+        <p:txBody>
+          <a:bodyPr wrap="square" anchor="t" lIns="0" rIns="0" tIns="0" bIns="0">
+            <a:spAutoFit/>
+          </a:bodyPr>
+          <a:lstStyle/>
+          <a:p>
+            <a:pPr algn="ctr">
+              <a:lnSpc>
+                <a:spcPct val="105000"/>
+              </a:lnSpc>
+            </a:pPr>
+            <a:r>
+              <a:rPr sz="900" b="0" i="0">
+                <a:solidFill>
+                  <a:srgbClr val="44536B"/>
+                </a:solidFill>
+                <a:latin typeface="Calibri"/>
+              </a:rPr>
+              <a:t>feed rate, mm/min</a:t>
+            </a:r>
+          </a:p>
+          <a:p>
+            <a:pPr algn="ctr">
+              <a:lnSpc>
+                <a:spcPct val="105000"/>
+              </a:lnSpc>
+            </a:pPr>
+            <a:r>
+              <a:rPr sz="900" b="0" i="0">
+                <a:solidFill>
+                  <a:srgbClr val="8592A3"/>
+                </a:solidFill>
+                <a:latin typeface="Calibri"/>
+              </a:rPr>
+              <a:t>(modal)</a:t>
+            </a:r>
+          </a:p>
+        </p:txBody>
+      </p:sp>
+      <p:sp>
+        <p:nvSpPr>
+          <p:cNvPr id="17" name="TextBox 16"/>
+          <p:cNvSpPr txBox="1"/>
+          <p:nvPr/>
+        </p:nvSpPr>
+        <p:spPr>
+          <a:xfrm>
+            <a:off x="6792240" y="3532240"/>
+            <a:ext cx="4611475" cy="430000"/>
+          </a:xfrm>
+          <a:prstGeom prst="rect">
+            <a:avLst/>
+          </a:prstGeom>
+          <a:noFill/>
+        </p:spPr>
+        <p:txBody>
+          <a:bodyPr wrap="square" anchor="ctr" lIns="0" rIns="0" tIns="0" bIns="0">
+            <a:spAutoFit/>
+          </a:bodyPr>
+          <a:lstStyle/>
+          <a:p>
+            <a:pPr algn="ctr">
+              <a:lnSpc>
+                <a:spcPct val="108000"/>
+              </a:lnSpc>
+            </a:pPr>
+            <a:r>
+              <a:rPr sz="900" b="0" i="1">
+                <a:solidFill>
+                  <a:srgbClr val="8592A3"/>
+                </a:solidFill>
+                <a:latin typeface="Calibri"/>
+              </a:rPr>
+              <a:t>Modal words hold: this F150 and G01 keep acting on every line below until one is changed.</a:t>
+            </a:r>
+          </a:p>
+        </p:txBody>
+      </p:sp>
+      <p:sp>
+        <p:nvSpPr>
+          <p:cNvPr id="18" name="TextBox 17"/>
+          <p:cNvSpPr txBox="1"/>
+          <p:nvPr/>
+        </p:nvSpPr>
+        <p:spPr>
+          <a:xfrm>
+            <a:off x="502920" y="4444620"/>
+            <a:ext cx="11201400" cy="219456"/>
+          </a:xfrm>
+          <a:prstGeom prst="rect">
+            <a:avLst/>
+          </a:prstGeom>
+          <a:noFill/>
+        </p:spPr>
+        <p:txBody>
+          <a:bodyPr wrap="square" anchor="ctr" lIns="0" rIns="0" tIns="0" bIns="0">
+            <a:spAutoFit/>
+          </a:bodyPr>
+          <a:lstStyle/>
+          <a:p>
+            <a:r>
+              <a:rPr sz="1150" b="1" i="1">
+                <a:solidFill>
+                  <a:srgbClr val="8592A3"/>
+                </a:solidFill>
+                <a:latin typeface="Calibri"/>
+              </a:rPr>
+              <a:t>Codes you'll actually see</a:t>
+            </a:r>
+          </a:p>
+        </p:txBody>
+      </p:sp>
+      <p:sp>
+        <p:nvSpPr>
+          <p:cNvPr id="19" name="Rounded Rectangle 18"/>
+          <p:cNvSpPr/>
+          <p:nvPr/>
+        </p:nvSpPr>
+        <p:spPr>
+          <a:xfrm>
+            <a:off x="502920" y="4718940"/>
+            <a:ext cx="11201400" cy="1737360"/>
+          </a:xfrm>
+          <a:prstGeom prst="roundRect">
+            <a:avLst>
+              <a:gd name="adj" fmla="val 4000"/>
+            </a:avLst>
+          </a:prstGeom>
+          <a:solidFill>
+            <a:srgbClr val="F3F6F9"/>
+          </a:solidFill>
+          <a:ln w="12700">
+            <a:solidFill>
+              <a:srgbClr val="E1E7EE"/>
+            </a:solidFill>
+          </a:ln>
+          <a:effectLst/>
+        </p:spPr>
+        <p:style>
+          <a:lnRef idx="1">
+            <a:schemeClr val="accent1"/>
+          </a:lnRef>
+          <a:fillRef idx="3">
+            <a:schemeClr val="accent1"/>
+          </a:fillRef>
+          <a:effectRef idx="2">
+            <a:schemeClr val="accent1"/>
+          </a:effectRef>
+          <a:fontRef idx="minor">
+            <a:schemeClr val="lt1"/>
+          </a:fontRef>
+        </p:style>
+        <p:txBody>
+          <a:bodyPr rtlCol="0" anchor="ctr"/>
+          <a:lstStyle/>
+          <a:p>
+            <a:pPr algn="ctr"/>
+          </a:p>
+        </p:txBody>
+      </p:sp>
+      <p:sp>
+        <p:nvSpPr>
+          <p:cNvPr id="20" name="TextBox 19"/>
+          <p:cNvSpPr txBox="1"/>
+          <p:nvPr/>
+        </p:nvSpPr>
+        <p:spPr>
+          <a:xfrm>
+            <a:off x="730000" y="4868940"/>
+            <a:ext cx="3700000" cy="1477360"/>
+          </a:xfrm>
+          <a:prstGeom prst="rect">
+            <a:avLst/>
+          </a:prstGeom>
+          <a:noFill/>
+        </p:spPr>
+        <p:txBody>
+          <a:bodyPr wrap="square" anchor="t" lIns="0" rIns="0" tIns="0" bIns="0">
+            <a:spAutoFit/>
+          </a:bodyPr>
+          <a:lstStyle/>
+          <a:p>
+            <a:pPr>
+              <a:lnSpc>
+                <a:spcPct val="100000"/>
+              </a:lnSpc>
+              <a:spcAft>
+                <a:spcPts val="400"/>
+              </a:spcAft>
+            </a:pPr>
+            <a:r>
+              <a:rPr sz="1000" b="1" i="0">
+                <a:solidFill>
+                  <a:srgbClr val="0F2942"/>
+                </a:solidFill>
+                <a:latin typeface="Consolas"/>
+              </a:rPr>
+              <a:t>G20 / G21  </a:t>
+            </a:r>
+            <a:r>
+              <a:rPr sz="1000" b="0" i="0">
+                <a:solidFill>
+                  <a:srgbClr val="44536B"/>
+                </a:solidFill>
+                <a:latin typeface="Calibri"/>
+              </a:rPr>
+              <a:t>inch / millimetre</a:t>
+            </a:r>
+          </a:p>
+          <a:p>
+            <a:pPr>
+              <a:lnSpc>
+                <a:spcPct val="100000"/>
+              </a:lnSpc>
+              <a:spcAft>
+                <a:spcPts val="400"/>
+              </a:spcAft>
+            </a:pPr>
+            <a:r>
+              <a:rPr sz="1000" b="1" i="0">
+                <a:solidFill>
+                  <a:srgbClr val="0F2942"/>
+                </a:solidFill>
+                <a:latin typeface="Consolas"/>
+              </a:rPr>
+              <a:t>G90 / G91  </a:t>
+            </a:r>
+            <a:r>
+              <a:rPr sz="1000" b="0" i="0">
+                <a:solidFill>
+                  <a:srgbClr val="44536B"/>
+                </a:solidFill>
+                <a:latin typeface="Calibri"/>
+              </a:rPr>
+              <a:t>absolute / incremental</a:t>
+            </a:r>
+          </a:p>
+          <a:p>
+            <a:pPr>
+              <a:lnSpc>
+                <a:spcPct val="100000"/>
+              </a:lnSpc>
+              <a:spcAft>
+                <a:spcPts val="400"/>
+              </a:spcAft>
+            </a:pPr>
+            <a:r>
+              <a:rPr sz="1000" b="1" i="0">
+                <a:solidFill>
+                  <a:srgbClr val="0F2942"/>
+                </a:solidFill>
+                <a:latin typeface="Consolas"/>
+              </a:rPr>
+              <a:t>G17  </a:t>
+            </a:r>
+            <a:r>
+              <a:rPr sz="1000" b="0" i="0">
+                <a:solidFill>
+                  <a:srgbClr val="44536B"/>
+                </a:solidFill>
+                <a:latin typeface="Calibri"/>
+              </a:rPr>
+              <a:t>work in the XY plane</a:t>
+            </a:r>
+          </a:p>
+          <a:p>
+            <a:pPr>
+              <a:lnSpc>
+                <a:spcPct val="100000"/>
+              </a:lnSpc>
+              <a:spcAft>
+                <a:spcPts val="400"/>
+              </a:spcAft>
+            </a:pPr>
+            <a:r>
+              <a:rPr sz="1000" b="1" i="0">
+                <a:solidFill>
+                  <a:srgbClr val="0F2942"/>
+                </a:solidFill>
+                <a:latin typeface="Consolas"/>
+              </a:rPr>
+              <a:t>G00  </a:t>
+            </a:r>
+            <a:r>
+              <a:rPr sz="1000" b="0" i="0">
+                <a:solidFill>
+                  <a:srgbClr val="44536B"/>
+                </a:solidFill>
+                <a:latin typeface="Calibri"/>
+              </a:rPr>
+              <a:t>rapid — non-cutting move</a:t>
+            </a:r>
+          </a:p>
+          <a:p>
+            <a:pPr>
+              <a:lnSpc>
+                <a:spcPct val="100000"/>
+              </a:lnSpc>
+              <a:spcAft>
+                <a:spcPts val="400"/>
+              </a:spcAft>
+            </a:pPr>
+            <a:r>
+              <a:rPr sz="1000" b="1" i="0">
+                <a:solidFill>
+                  <a:srgbClr val="0F2942"/>
+                </a:solidFill>
+                <a:latin typeface="Consolas"/>
+              </a:rPr>
+              <a:t>G01  </a:t>
+            </a:r>
+            <a:r>
+              <a:rPr sz="1000" b="0" i="0">
+                <a:solidFill>
+                  <a:srgbClr val="44536B"/>
+                </a:solidFill>
+                <a:latin typeface="Calibri"/>
+              </a:rPr>
+              <a:t>linear move at feed rate</a:t>
+            </a:r>
+          </a:p>
+        </p:txBody>
+      </p:sp>
+      <p:sp>
+        <p:nvSpPr>
+          <p:cNvPr id="21" name="TextBox 20"/>
+          <p:cNvSpPr txBox="1"/>
+          <p:nvPr/>
+        </p:nvSpPr>
+        <p:spPr>
+          <a:xfrm>
+            <a:off x="4470000" y="4868940"/>
+            <a:ext cx="3700000" cy="1477360"/>
+          </a:xfrm>
+          <a:prstGeom prst="rect">
+            <a:avLst/>
+          </a:prstGeom>
+          <a:noFill/>
+        </p:spPr>
+        <p:txBody>
+          <a:bodyPr wrap="square" anchor="t" lIns="0" rIns="0" tIns="0" bIns="0">
+            <a:spAutoFit/>
+          </a:bodyPr>
+          <a:lstStyle/>
+          <a:p>
+            <a:pPr>
+              <a:lnSpc>
+                <a:spcPct val="100000"/>
+              </a:lnSpc>
+              <a:spcAft>
+                <a:spcPts val="400"/>
+              </a:spcAft>
+            </a:pPr>
+            <a:r>
+              <a:rPr sz="1000" b="1" i="0">
+                <a:solidFill>
+                  <a:srgbClr val="0F2942"/>
+                </a:solidFill>
+                <a:latin typeface="Consolas"/>
+              </a:rPr>
+              <a:t>G02 / G03  </a:t>
+            </a:r>
+            <a:r>
+              <a:rPr sz="1000" b="0" i="0">
+                <a:solidFill>
+                  <a:srgbClr val="44536B"/>
+                </a:solidFill>
+                <a:latin typeface="Calibri"/>
+              </a:rPr>
+              <a:t>clockwise / CCW arc</a:t>
+            </a:r>
+          </a:p>
+          <a:p>
+            <a:pPr>
+              <a:lnSpc>
+                <a:spcPct val="100000"/>
+              </a:lnSpc>
+              <a:spcAft>
+                <a:spcPts val="400"/>
+              </a:spcAft>
+            </a:pPr>
+            <a:r>
+              <a:rPr sz="1000" b="1" i="0">
+                <a:solidFill>
+                  <a:srgbClr val="0F2942"/>
+                </a:solidFill>
+                <a:latin typeface="Consolas"/>
+              </a:rPr>
+              <a:t>G54–G59  </a:t>
+            </a:r>
+            <a:r>
+              <a:rPr sz="1000" b="0" i="0">
+                <a:solidFill>
+                  <a:srgbClr val="44536B"/>
+                </a:solidFill>
+                <a:latin typeface="Calibri"/>
+              </a:rPr>
+              <a:t>work offset (part zero)</a:t>
+            </a:r>
+          </a:p>
+          <a:p>
+            <a:pPr>
+              <a:lnSpc>
+                <a:spcPct val="100000"/>
+              </a:lnSpc>
+              <a:spcAft>
+                <a:spcPts val="400"/>
+              </a:spcAft>
+            </a:pPr>
+            <a:r>
+              <a:rPr sz="1000" b="1" i="0">
+                <a:solidFill>
+                  <a:srgbClr val="0F2942"/>
+                </a:solidFill>
+                <a:latin typeface="Consolas"/>
+              </a:rPr>
+              <a:t>G28  </a:t>
+            </a:r>
+            <a:r>
+              <a:rPr sz="1000" b="0" i="0">
+                <a:solidFill>
+                  <a:srgbClr val="44536B"/>
+                </a:solidFill>
+                <a:latin typeface="Calibri"/>
+              </a:rPr>
+              <a:t>return to machine home</a:t>
+            </a:r>
+          </a:p>
+          <a:p>
+            <a:pPr>
+              <a:lnSpc>
+                <a:spcPct val="100000"/>
+              </a:lnSpc>
+              <a:spcAft>
+                <a:spcPts val="400"/>
+              </a:spcAft>
+            </a:pPr>
+            <a:r>
+              <a:rPr sz="1000" b="1" i="0">
+                <a:solidFill>
+                  <a:srgbClr val="0F2942"/>
+                </a:solidFill>
+                <a:latin typeface="Consolas"/>
+              </a:rPr>
+              <a:t>G04  </a:t>
+            </a:r>
+            <a:r>
+              <a:rPr sz="1000" b="0" i="0">
+                <a:solidFill>
+                  <a:srgbClr val="44536B"/>
+                </a:solidFill>
+                <a:latin typeface="Calibri"/>
+              </a:rPr>
+              <a:t>dwell — timed pause</a:t>
+            </a:r>
+          </a:p>
+          <a:p>
+            <a:pPr>
+              <a:lnSpc>
+                <a:spcPct val="100000"/>
+              </a:lnSpc>
+              <a:spcAft>
+                <a:spcPts val="400"/>
+              </a:spcAft>
+            </a:pPr>
+            <a:r>
+              <a:rPr sz="1000" b="1" i="0">
+                <a:solidFill>
+                  <a:srgbClr val="0F2942"/>
+                </a:solidFill>
+                <a:latin typeface="Consolas"/>
+              </a:rPr>
+              <a:t>M00  </a:t>
+            </a:r>
+            <a:r>
+              <a:rPr sz="1000" b="0" i="0">
+                <a:solidFill>
+                  <a:srgbClr val="44536B"/>
+                </a:solidFill>
+                <a:latin typeface="Calibri"/>
+              </a:rPr>
+              <a:t>pause for the operator</a:t>
+            </a:r>
+          </a:p>
+        </p:txBody>
+      </p:sp>
+      <p:sp>
+        <p:nvSpPr>
+          <p:cNvPr id="22" name="TextBox 21"/>
+          <p:cNvSpPr txBox="1"/>
+          <p:nvPr/>
+        </p:nvSpPr>
+        <p:spPr>
+          <a:xfrm>
+            <a:off x="8210000" y="4868940"/>
+            <a:ext cx="3550000" cy="1477360"/>
+          </a:xfrm>
+          <a:prstGeom prst="rect">
+            <a:avLst/>
+          </a:prstGeom>
+          <a:noFill/>
+        </p:spPr>
+        <p:txBody>
+          <a:bodyPr wrap="square" anchor="t" lIns="0" rIns="0" tIns="0" bIns="0">
+            <a:spAutoFit/>
+          </a:bodyPr>
+          <a:lstStyle/>
+          <a:p>
+            <a:pPr>
+              <a:lnSpc>
+                <a:spcPct val="100000"/>
+              </a:lnSpc>
+              <a:spcAft>
+                <a:spcPts val="400"/>
+              </a:spcAft>
+            </a:pPr>
+            <a:r>
+              <a:rPr sz="1000" b="1" i="0">
+                <a:solidFill>
+                  <a:srgbClr val="0F2942"/>
+                </a:solidFill>
+                <a:latin typeface="Consolas"/>
+              </a:rPr>
+              <a:t>M03 / M05  </a:t>
+            </a:r>
+            <a:r>
+              <a:rPr sz="1000" b="0" i="0">
+                <a:solidFill>
+                  <a:srgbClr val="44536B"/>
+                </a:solidFill>
+                <a:latin typeface="Calibri"/>
+              </a:rPr>
+              <a:t>spindle on CW / off</a:t>
+            </a:r>
+          </a:p>
+          <a:p>
+            <a:pPr>
+              <a:lnSpc>
+                <a:spcPct val="100000"/>
+              </a:lnSpc>
+              <a:spcAft>
+                <a:spcPts val="400"/>
+              </a:spcAft>
+            </a:pPr>
+            <a:r>
+              <a:rPr sz="1000" b="1" i="0">
+                <a:solidFill>
+                  <a:srgbClr val="0F2942"/>
+                </a:solidFill>
+                <a:latin typeface="Consolas"/>
+              </a:rPr>
+              <a:t>M06  </a:t>
+            </a:r>
+            <a:r>
+              <a:rPr sz="1000" b="0" i="0">
+                <a:solidFill>
+                  <a:srgbClr val="44536B"/>
+                </a:solidFill>
+                <a:latin typeface="Calibri"/>
+              </a:rPr>
+              <a:t>tool change</a:t>
+            </a:r>
+          </a:p>
+          <a:p>
+            <a:pPr>
+              <a:lnSpc>
+                <a:spcPct val="100000"/>
+              </a:lnSpc>
+              <a:spcAft>
+                <a:spcPts val="400"/>
+              </a:spcAft>
+            </a:pPr>
+            <a:r>
+              <a:rPr sz="1000" b="1" i="0">
+                <a:solidFill>
+                  <a:srgbClr val="0F2942"/>
+                </a:solidFill>
+                <a:latin typeface="Consolas"/>
+              </a:rPr>
+              <a:t>M08 / M09  </a:t>
+            </a:r>
+            <a:r>
+              <a:rPr sz="1000" b="0" i="0">
+                <a:solidFill>
+                  <a:srgbClr val="44536B"/>
+                </a:solidFill>
+                <a:latin typeface="Calibri"/>
+              </a:rPr>
+              <a:t>coolant on / off</a:t>
+            </a:r>
+          </a:p>
+          <a:p>
+            <a:pPr>
+              <a:lnSpc>
+                <a:spcPct val="100000"/>
+              </a:lnSpc>
+              <a:spcAft>
+                <a:spcPts val="400"/>
+              </a:spcAft>
+            </a:pPr>
+            <a:r>
+              <a:rPr sz="1000" b="1" i="0">
+                <a:solidFill>
+                  <a:srgbClr val="0F2942"/>
+                </a:solidFill>
+                <a:latin typeface="Consolas"/>
+              </a:rPr>
+              <a:t>M30  </a:t>
+            </a:r>
+            <a:r>
+              <a:rPr sz="1000" b="0" i="0">
+                <a:solidFill>
+                  <a:srgbClr val="44536B"/>
+                </a:solidFill>
+                <a:latin typeface="Calibri"/>
+              </a:rPr>
+              <a:t>end of program</a:t>
+            </a:r>
+          </a:p>
+          <a:p>
+            <a:pPr>
+              <a:lnSpc>
+                <a:spcPct val="100000"/>
+              </a:lnSpc>
+              <a:spcAft>
+                <a:spcPts val="400"/>
+              </a:spcAft>
+            </a:pPr>
+            <a:r>
+              <a:rPr sz="1000" b="1" i="0">
+                <a:solidFill>
+                  <a:srgbClr val="0F2942"/>
+                </a:solidFill>
+                <a:latin typeface="Consolas"/>
+              </a:rPr>
+              <a:t>S / F / T  </a:t>
+            </a:r>
+            <a:r>
+              <a:rPr sz="1000" b="0" i="0">
+                <a:solidFill>
+                  <a:srgbClr val="44536B"/>
+                </a:solidFill>
+                <a:latin typeface="Calibri"/>
+              </a:rPr>
+              <a:t>speed / feed / tool no.</a:t>
+            </a:r>
+          </a:p>
+        </p:txBody>
+      </p:sp>
+    </p:spTree>
+  </p:cSld>
+  <p:clrMapOvr>
+    <a:masterClrMapping/>
+  </p:clrMapOvr>
+</p:sld>
+</file>
+
+<file path=ppt/slides/slide57.xml><?xml version="1.0" encoding="utf-8"?>
+<p:sld xmlns:a="http://schemas.openxmlformats.org/drawingml/2006/main" xmlns:p="http://schemas.openxmlformats.org/presentationml/2006/main" xmlns:r="http://schemas.openxmlformats.org/officeDocument/2006/relationships">
+  <p:cSld>
+    <p:spTree>
+      <p:nvGrpSpPr>
+        <p:cNvPr id="1" name=""/>
+        <p:cNvGrpSpPr/>
+        <p:nvPr/>
+      </p:nvGrpSpPr>
+      <p:grpSpPr/>
+      <p:sp>
+        <p:nvSpPr>
+          <p:cNvPr id="2" name="Rounded Rectangle 1"/>
+          <p:cNvSpPr/>
+          <p:nvPr/>
+        </p:nvSpPr>
+        <p:spPr>
+          <a:xfrm>
+            <a:off x="502920" y="411480"/>
+            <a:ext cx="757123" cy="310896"/>
+          </a:xfrm>
+          <a:prstGeom prst="roundRect">
+            <a:avLst>
+              <a:gd name="adj" fmla="val 50000"/>
+            </a:avLst>
+          </a:prstGeom>
+          <a:solidFill>
+            <a:srgbClr val="D97706"/>
+          </a:solidFill>
+          <a:ln>
+            <a:noFill/>
+          </a:ln>
+          <a:effectLst/>
+        </p:spPr>
+        <p:style>
+          <a:lnRef idx="1">
+            <a:schemeClr val="accent1"/>
+          </a:lnRef>
+          <a:fillRef idx="3">
+            <a:schemeClr val="accent1"/>
+          </a:fillRef>
+          <a:effectRef idx="2">
+            <a:schemeClr val="accent1"/>
+          </a:effectRef>
+          <a:fontRef idx="minor">
+            <a:schemeClr val="lt1"/>
+          </a:fontRef>
+        </p:style>
+        <p:txBody>
+          <a:bodyPr rtlCol="0" anchor="ctr" lIns="0" rIns="0" tIns="0" bIns="0"/>
+          <a:lstStyle/>
+          <a:p>
+            <a:pPr algn="ctr"/>
+            <a:r>
+              <a:rPr sz="1050" b="1" i="0">
+                <a:solidFill>
+                  <a:srgbClr val="FFFFFF"/>
+                </a:solidFill>
+                <a:latin typeface="Calibri"/>
+              </a:rPr>
+              <a:t>UNIT 4</a:t>
+            </a:r>
+          </a:p>
+        </p:txBody>
+      </p:sp>
+      <p:sp>
+        <p:nvSpPr>
+          <p:cNvPr id="3" name="TextBox 2"/>
+          <p:cNvSpPr txBox="1"/>
+          <p:nvPr/>
+        </p:nvSpPr>
+        <p:spPr>
+          <a:xfrm>
+            <a:off x="502920" y="768096"/>
+            <a:ext cx="11155680" cy="603504"/>
+          </a:xfrm>
+          <a:prstGeom prst="rect">
+            <a:avLst/>
+          </a:prstGeom>
+          <a:noFill/>
+        </p:spPr>
+        <p:txBody>
+          <a:bodyPr wrap="square" anchor="ctr" lIns="0" rIns="0" tIns="0" bIns="0">
+            <a:spAutoFit/>
+          </a:bodyPr>
+          <a:lstStyle/>
+          <a:p>
+            <a:r>
+              <a:rPr sz="2600" b="1" i="0">
+                <a:solidFill>
+                  <a:srgbClr val="0F2942"/>
+                </a:solidFill>
+                <a:latin typeface="Cambria"/>
+              </a:rPr>
+              <a:t>Working with G-code</a:t>
+            </a:r>
+          </a:p>
+        </p:txBody>
+      </p:sp>
+      <p:sp>
+        <p:nvSpPr>
+          <p:cNvPr id="4" name="TextBox 3"/>
+          <p:cNvSpPr txBox="1"/>
+          <p:nvPr/>
+        </p:nvSpPr>
+        <p:spPr>
+          <a:xfrm>
+            <a:off x="502920" y="1298448"/>
+            <a:ext cx="11155680" cy="365760"/>
+          </a:xfrm>
+          <a:prstGeom prst="rect">
+            <a:avLst/>
+          </a:prstGeom>
+          <a:noFill/>
+        </p:spPr>
+        <p:txBody>
+          <a:bodyPr wrap="square" anchor="ctr" lIns="0" rIns="0" tIns="0" bIns="0">
+            <a:spAutoFit/>
+          </a:bodyPr>
+          <a:lstStyle/>
+          <a:p>
+            <a:r>
+              <a:rPr sz="1250" b="0" i="1">
+                <a:solidFill>
+                  <a:srgbClr val="8592A3"/>
+                </a:solidFill>
+                <a:latin typeface="Calibri"/>
+              </a:rPr>
+              <a:t>Small edits at the edges of a program are routine — editing the geometry in the middle is CAM's job.</a:t>
+            </a:r>
+          </a:p>
+        </p:txBody>
+      </p:sp>
+      <p:sp>
+        <p:nvSpPr>
+          <p:cNvPr id="5" name="TextBox 4"/>
+          <p:cNvSpPr txBox="1"/>
+          <p:nvPr/>
+        </p:nvSpPr>
+        <p:spPr>
+          <a:xfrm>
+            <a:off x="502920" y="6565392"/>
+            <a:ext cx="9000000" cy="256032"/>
+          </a:xfrm>
+          <a:prstGeom prst="rect">
+            <a:avLst/>
+          </a:prstGeom>
+          <a:noFill/>
+        </p:spPr>
+        <p:txBody>
+          <a:bodyPr wrap="square" anchor="ctr" lIns="0" rIns="0" tIns="0" bIns="0">
+            <a:spAutoFit/>
+          </a:bodyPr>
+          <a:lstStyle/>
+          <a:p>
+            <a:r>
+              <a:rPr sz="850" b="0" i="0">
+                <a:solidFill>
+                  <a:srgbClr val="8592A3"/>
+                </a:solidFill>
+                <a:latin typeface="Calibri"/>
+              </a:rPr>
+              <a:t>MECH 151 · Technical Design — Unit Reference Guide</a:t>
+            </a:r>
+          </a:p>
+        </p:txBody>
+      </p:sp>
+      <p:sp>
+        <p:nvSpPr>
+          <p:cNvPr id="6" name="TextBox 5"/>
+          <p:cNvSpPr txBox="1"/>
+          <p:nvPr/>
+        </p:nvSpPr>
+        <p:spPr>
+          <a:xfrm>
+            <a:off x="502920" y="1902240"/>
+            <a:ext cx="6035040" cy="219456"/>
+          </a:xfrm>
+          <a:prstGeom prst="rect">
+            <a:avLst/>
+          </a:prstGeom>
+          <a:noFill/>
+        </p:spPr>
+        <p:txBody>
+          <a:bodyPr wrap="square" anchor="ctr" lIns="0" rIns="0" tIns="0" bIns="0">
+            <a:spAutoFit/>
+          </a:bodyPr>
+          <a:lstStyle/>
+          <a:p>
+            <a:r>
+              <a:rPr sz="1150" b="1" i="1">
+                <a:solidFill>
+                  <a:srgbClr val="8592A3"/>
+                </a:solidFill>
+                <a:latin typeface="Calibri"/>
+              </a:rPr>
+              <a:t>A short program, annotated</a:t>
+            </a:r>
+          </a:p>
+        </p:txBody>
+      </p:sp>
+      <p:sp>
+        <p:nvSpPr>
+          <p:cNvPr id="7" name="Rounded Rectangle 6"/>
+          <p:cNvSpPr/>
+          <p:nvPr/>
+        </p:nvSpPr>
+        <p:spPr>
+          <a:xfrm>
+            <a:off x="502920" y="2176560"/>
+            <a:ext cx="6035040" cy="3247320"/>
+          </a:xfrm>
+          <a:prstGeom prst="roundRect">
+            <a:avLst>
+              <a:gd name="adj" fmla="val 3500"/>
+            </a:avLst>
+          </a:prstGeom>
+          <a:solidFill>
+            <a:srgbClr val="F3F6F9"/>
+          </a:solidFill>
+          <a:ln w="12700">
+            <a:solidFill>
+              <a:srgbClr val="E1E7EE"/>
+            </a:solidFill>
+          </a:ln>
+          <a:effectLst/>
+        </p:spPr>
+        <p:style>
+          <a:lnRef idx="1">
+            <a:schemeClr val="accent1"/>
+          </a:lnRef>
+          <a:fillRef idx="3">
+            <a:schemeClr val="accent1"/>
+          </a:fillRef>
+          <a:effectRef idx="2">
+            <a:schemeClr val="accent1"/>
+          </a:effectRef>
+          <a:fontRef idx="minor">
+            <a:schemeClr val="lt1"/>
+          </a:fontRef>
+        </p:style>
+        <p:txBody>
+          <a:bodyPr rtlCol="0" anchor="ctr"/>
+          <a:lstStyle/>
+          <a:p>
+            <a:pPr algn="ctr"/>
+          </a:p>
+        </p:txBody>
+      </p:sp>
+      <p:sp>
+        <p:nvSpPr>
+          <p:cNvPr id="8" name="TextBox 7"/>
+          <p:cNvSpPr txBox="1"/>
+          <p:nvPr/>
+        </p:nvSpPr>
+        <p:spPr>
+          <a:xfrm>
+            <a:off x="822920" y="2436560"/>
+            <a:ext cx="5475040" cy="2787320"/>
+          </a:xfrm>
+          <a:prstGeom prst="rect">
+            <a:avLst/>
+          </a:prstGeom>
+          <a:noFill/>
+        </p:spPr>
+        <p:txBody>
+          <a:bodyPr wrap="square" anchor="t" lIns="0" rIns="0" tIns="0" bIns="0">
+            <a:spAutoFit/>
+          </a:bodyPr>
+          <a:lstStyle/>
+          <a:p>
+            <a:pPr>
+              <a:lnSpc>
+                <a:spcPct val="115000"/>
+              </a:lnSpc>
+              <a:spcAft>
+                <a:spcPts val="400"/>
+              </a:spcAft>
+            </a:pPr>
+            <a:r>
+              <a:rPr sz="1000" b="0" i="1">
+                <a:solidFill>
+                  <a:srgbClr val="8592A3"/>
+                </a:solidFill>
+                <a:latin typeface="Consolas"/>
+              </a:rPr>
+              <a:t>(SLOT — 6MM 2-FLUTE ENDMILL)</a:t>
+            </a:r>
+          </a:p>
+          <a:p>
+            <a:pPr>
+              <a:lnSpc>
+                <a:spcPct val="115000"/>
+              </a:lnSpc>
+              <a:spcAft>
+                <a:spcPts val="400"/>
+              </a:spcAft>
+            </a:pPr>
+            <a:r>
+              <a:rPr sz="1000" b="1" i="0">
+                <a:solidFill>
+                  <a:srgbClr val="0F2942"/>
+                </a:solidFill>
+                <a:latin typeface="Consolas"/>
+              </a:rPr>
+              <a:t>G21 G90 G17    </a:t>
+            </a:r>
+            <a:r>
+              <a:rPr sz="1000" b="0" i="0">
+                <a:solidFill>
+                  <a:srgbClr val="8592A3"/>
+                </a:solidFill>
+                <a:latin typeface="Consolas"/>
+              </a:rPr>
+              <a:t>mm, absolute, XY plane</a:t>
+            </a:r>
+          </a:p>
+          <a:p>
+            <a:pPr>
+              <a:lnSpc>
+                <a:spcPct val="115000"/>
+              </a:lnSpc>
+              <a:spcAft>
+                <a:spcPts val="400"/>
+              </a:spcAft>
+            </a:pPr>
+            <a:r>
+              <a:rPr sz="1000" b="1" i="0">
+                <a:solidFill>
+                  <a:srgbClr val="0F2942"/>
+                </a:solidFill>
+                <a:latin typeface="Consolas"/>
+              </a:rPr>
+              <a:t>G54            </a:t>
+            </a:r>
+            <a:r>
+              <a:rPr sz="1000" b="0" i="0">
+                <a:solidFill>
+                  <a:srgbClr val="8592A3"/>
+                </a:solidFill>
+                <a:latin typeface="Consolas"/>
+              </a:rPr>
+              <a:t>work offset = part zero</a:t>
+            </a:r>
+          </a:p>
+          <a:p>
+            <a:pPr>
+              <a:lnSpc>
+                <a:spcPct val="115000"/>
+              </a:lnSpc>
+              <a:spcAft>
+                <a:spcPts val="400"/>
+              </a:spcAft>
+            </a:pPr>
+            <a:r>
+              <a:rPr sz="1000" b="1" i="0">
+                <a:solidFill>
+                  <a:srgbClr val="0F2942"/>
+                </a:solidFill>
+                <a:latin typeface="Consolas"/>
+              </a:rPr>
+              <a:t>G0 Z5.0        </a:t>
+            </a:r>
+            <a:r>
+              <a:rPr sz="1000" b="0" i="0">
+                <a:solidFill>
+                  <a:srgbClr val="8592A3"/>
+                </a:solidFill>
+                <a:latin typeface="Consolas"/>
+              </a:rPr>
+              <a:t>rapid to safe height</a:t>
+            </a:r>
+          </a:p>
+          <a:p>
+            <a:pPr>
+              <a:lnSpc>
+                <a:spcPct val="115000"/>
+              </a:lnSpc>
+              <a:spcAft>
+                <a:spcPts val="400"/>
+              </a:spcAft>
+            </a:pPr>
+            <a:r>
+              <a:rPr sz="1000" b="1" i="0">
+                <a:solidFill>
+                  <a:srgbClr val="0F2942"/>
+                </a:solidFill>
+                <a:latin typeface="Consolas"/>
+              </a:rPr>
+              <a:t>M3 S10600      </a:t>
+            </a:r>
+            <a:r>
+              <a:rPr sz="1000" b="0" i="0">
+                <a:solidFill>
+                  <a:srgbClr val="8592A3"/>
+                </a:solidFill>
+                <a:latin typeface="Consolas"/>
+              </a:rPr>
+              <a:t>spindle on CW, 10600 rpm</a:t>
+            </a:r>
+          </a:p>
+          <a:p>
+            <a:pPr>
+              <a:lnSpc>
+                <a:spcPct val="115000"/>
+              </a:lnSpc>
+              <a:spcAft>
+                <a:spcPts val="400"/>
+              </a:spcAft>
+            </a:pPr>
+            <a:r>
+              <a:rPr sz="1000" b="1" i="0">
+                <a:solidFill>
+                  <a:srgbClr val="0F2942"/>
+                </a:solidFill>
+                <a:latin typeface="Consolas"/>
+              </a:rPr>
+              <a:t>G0 X0 Y0       </a:t>
+            </a:r>
+            <a:r>
+              <a:rPr sz="1000" b="0" i="0">
+                <a:solidFill>
+                  <a:srgbClr val="8592A3"/>
+                </a:solidFill>
+                <a:latin typeface="Consolas"/>
+              </a:rPr>
+              <a:t>rapid above the start</a:t>
+            </a:r>
+          </a:p>
+          <a:p>
+            <a:pPr>
+              <a:lnSpc>
+                <a:spcPct val="115000"/>
+              </a:lnSpc>
+              <a:spcAft>
+                <a:spcPts val="400"/>
+              </a:spcAft>
+            </a:pPr>
+            <a:r>
+              <a:rPr sz="1000" b="1" i="0">
+                <a:solidFill>
+                  <a:srgbClr val="0F2942"/>
+                </a:solidFill>
+                <a:latin typeface="Consolas"/>
+              </a:rPr>
+              <a:t>G1 Z-2.0 F300  </a:t>
+            </a:r>
+            <a:r>
+              <a:rPr sz="1000" b="0" i="0">
+                <a:solidFill>
+                  <a:srgbClr val="8592A3"/>
+                </a:solidFill>
+                <a:latin typeface="Consolas"/>
+              </a:rPr>
+              <a:t>feed down to depth</a:t>
+            </a:r>
+          </a:p>
+          <a:p>
+            <a:pPr>
+              <a:lnSpc>
+                <a:spcPct val="115000"/>
+              </a:lnSpc>
+              <a:spcAft>
+                <a:spcPts val="400"/>
+              </a:spcAft>
+            </a:pPr>
+            <a:r>
+              <a:rPr sz="1000" b="1" i="0">
+                <a:solidFill>
+                  <a:srgbClr val="0F2942"/>
+                </a:solidFill>
+                <a:latin typeface="Consolas"/>
+              </a:rPr>
+              <a:t>G1 X50.0 F640  </a:t>
+            </a:r>
+            <a:r>
+              <a:rPr sz="1000" b="0" i="0">
+                <a:solidFill>
+                  <a:srgbClr val="8592A3"/>
+                </a:solidFill>
+                <a:latin typeface="Consolas"/>
+              </a:rPr>
+              <a:t>cut the slot at feed</a:t>
+            </a:r>
+          </a:p>
+          <a:p>
+            <a:pPr>
+              <a:lnSpc>
+                <a:spcPct val="115000"/>
+              </a:lnSpc>
+              <a:spcAft>
+                <a:spcPts val="400"/>
+              </a:spcAft>
+            </a:pPr>
+            <a:r>
+              <a:rPr sz="1000" b="1" i="0">
+                <a:solidFill>
+                  <a:srgbClr val="0F2942"/>
+                </a:solidFill>
+                <a:latin typeface="Consolas"/>
+              </a:rPr>
+              <a:t>G0 Z5.0        </a:t>
+            </a:r>
+            <a:r>
+              <a:rPr sz="1000" b="0" i="0">
+                <a:solidFill>
+                  <a:srgbClr val="8592A3"/>
+                </a:solidFill>
+                <a:latin typeface="Consolas"/>
+              </a:rPr>
+              <a:t>retract</a:t>
+            </a:r>
+          </a:p>
+          <a:p>
+            <a:pPr>
+              <a:lnSpc>
+                <a:spcPct val="115000"/>
+              </a:lnSpc>
+              <a:spcAft>
+                <a:spcPts val="400"/>
+              </a:spcAft>
+            </a:pPr>
+            <a:r>
+              <a:rPr sz="1000" b="1" i="0">
+                <a:solidFill>
+                  <a:srgbClr val="0F2942"/>
+                </a:solidFill>
+                <a:latin typeface="Consolas"/>
+              </a:rPr>
+              <a:t>M5             </a:t>
+            </a:r>
+            <a:r>
+              <a:rPr sz="1000" b="0" i="0">
+                <a:solidFill>
+                  <a:srgbClr val="8592A3"/>
+                </a:solidFill>
+                <a:latin typeface="Consolas"/>
+              </a:rPr>
+              <a:t>spindle off</a:t>
+            </a:r>
+          </a:p>
+          <a:p>
+            <a:pPr>
+              <a:lnSpc>
+                <a:spcPct val="115000"/>
+              </a:lnSpc>
+              <a:spcAft>
+                <a:spcPts val="400"/>
+              </a:spcAft>
+            </a:pPr>
+            <a:r>
+              <a:rPr sz="1000" b="1" i="0">
+                <a:solidFill>
+                  <a:srgbClr val="0F2942"/>
+                </a:solidFill>
+                <a:latin typeface="Consolas"/>
+              </a:rPr>
+              <a:t>M30            </a:t>
+            </a:r>
+            <a:r>
+              <a:rPr sz="1000" b="0" i="0">
+                <a:solidFill>
+                  <a:srgbClr val="8592A3"/>
+                </a:solidFill>
+                <a:latin typeface="Consolas"/>
+              </a:rPr>
+              <a:t>end of program</a:t>
+            </a:r>
+          </a:p>
+        </p:txBody>
+      </p:sp>
+      <p:sp>
+        <p:nvSpPr>
+          <p:cNvPr id="9" name="Rounded Rectangle 8"/>
+          <p:cNvSpPr/>
+          <p:nvPr/>
+        </p:nvSpPr>
+        <p:spPr>
+          <a:xfrm>
+            <a:off x="6748920" y="2176560"/>
+            <a:ext cx="4954680" cy="1783080"/>
+          </a:xfrm>
+          <a:prstGeom prst="roundRect">
+            <a:avLst>
+              <a:gd name="adj" fmla="val 4500"/>
+            </a:avLst>
+          </a:prstGeom>
+          <a:solidFill>
+            <a:srgbClr val="F3F6F9"/>
+          </a:solidFill>
+          <a:ln w="15875">
+            <a:solidFill>
+              <a:srgbClr val="1B8A8A"/>
+            </a:solidFill>
+          </a:ln>
+          <a:effectLst/>
+        </p:spPr>
+        <p:style>
+          <a:lnRef idx="1">
+            <a:schemeClr val="accent1"/>
+          </a:lnRef>
+          <a:fillRef idx="3">
+            <a:schemeClr val="accent1"/>
+          </a:fillRef>
+          <a:effectRef idx="2">
+            <a:schemeClr val="accent1"/>
+          </a:effectRef>
+          <a:fontRef idx="minor">
+            <a:schemeClr val="lt1"/>
+          </a:fontRef>
+        </p:style>
+        <p:txBody>
+          <a:bodyPr rtlCol="0" anchor="ctr"/>
+          <a:lstStyle/>
+          <a:p>
+            <a:pPr algn="ctr"/>
+          </a:p>
+        </p:txBody>
+      </p:sp>
+      <p:sp>
+        <p:nvSpPr>
+          <p:cNvPr id="10" name="TextBox 9"/>
+          <p:cNvSpPr txBox="1"/>
+          <p:nvPr/>
+        </p:nvSpPr>
+        <p:spPr>
+          <a:xfrm>
+            <a:off x="6977520" y="2340000"/>
+            <a:ext cx="4497480" cy="1560000"/>
+          </a:xfrm>
+          <a:prstGeom prst="rect">
+            <a:avLst/>
+          </a:prstGeom>
+          <a:noFill/>
+        </p:spPr>
+        <p:txBody>
+          <a:bodyPr wrap="square" anchor="t" lIns="0" rIns="0" tIns="0" bIns="0">
+            <a:spAutoFit/>
+          </a:bodyPr>
+          <a:lstStyle/>
+          <a:p>
+            <a:pPr>
+              <a:spcAft>
+                <a:spcPts val="500"/>
+              </a:spcAft>
+            </a:pPr>
+            <a:r>
+              <a:rPr sz="1400" b="1" i="0">
+                <a:solidFill>
+                  <a:srgbClr val="1B8A8A"/>
+                </a:solidFill>
+                <a:latin typeface="Cambria"/>
+              </a:rPr>
+              <a:t>Safe to edit by hand</a:t>
+            </a:r>
+          </a:p>
+          <a:p>
+            <a:pPr marL="274320" indent="-274320">
+              <a:lnSpc>
+                <a:spcPct val="105000"/>
+              </a:lnSpc>
+              <a:spcAft>
+                <a:spcPts val="350"/>
+              </a:spcAft>
+              <a:buChar char="●"/>
+            </a:pPr>
+            <a:r>
+              <a:rPr sz="1000" b="0" i="0">
+                <a:solidFill>
+                  <a:srgbClr val="44536B"/>
+                </a:solidFill>
+                <a:latin typeface="Calibri"/>
+              </a:rPr>
+              <a:t>Feed (F) and spindle speed (S) — ease off for chatter or burning</a:t>
+            </a:r>
+          </a:p>
+          <a:p>
+            <a:pPr marL="274320" indent="-274320">
+              <a:lnSpc>
+                <a:spcPct val="105000"/>
+              </a:lnSpc>
+              <a:spcAft>
+                <a:spcPts val="350"/>
+              </a:spcAft>
+              <a:buChar char="●"/>
+            </a:pPr>
+            <a:r>
+              <a:rPr sz="1000" b="0" i="0">
+                <a:solidFill>
+                  <a:srgbClr val="44536B"/>
+                </a:solidFill>
+                <a:latin typeface="Calibri"/>
+              </a:rPr>
+              <a:t>Safe / clearance Z heights — after checking nothing is taller</a:t>
+            </a:r>
+          </a:p>
+          <a:p>
+            <a:pPr marL="274320" indent="-274320">
+              <a:lnSpc>
+                <a:spcPct val="105000"/>
+              </a:lnSpc>
+              <a:spcAft>
+                <a:spcPts val="350"/>
+              </a:spcAft>
+              <a:buChar char="●"/>
+            </a:pPr>
+            <a:r>
+              <a:rPr sz="1000" b="0" i="0">
+                <a:solidFill>
+                  <a:srgbClr val="44536B"/>
+                </a:solidFill>
+                <a:latin typeface="Calibri"/>
+              </a:rPr>
+              <a:t>Work offset (G54→G55); add a pause (M00) or dwell (G04)</a:t>
+            </a:r>
+          </a:p>
+          <a:p>
+            <a:pPr marL="274320" indent="-274320">
+              <a:lnSpc>
+                <a:spcPct val="105000"/>
+              </a:lnSpc>
+              <a:spcAft>
+                <a:spcPts val="350"/>
+              </a:spcAft>
+              <a:buChar char="●"/>
+            </a:pPr>
+            <a:r>
+              <a:rPr sz="1000" b="0" i="0">
+                <a:solidFill>
+                  <a:srgbClr val="44536B"/>
+                </a:solidFill>
+                <a:latin typeface="Calibri"/>
+              </a:rPr>
+              <a:t>Trim header/footer lines your machine doesn't use; drop an unused tool section</a:t>
+            </a:r>
+          </a:p>
+        </p:txBody>
+      </p:sp>
+      <p:sp>
+        <p:nvSpPr>
+          <p:cNvPr id="11" name="Rounded Rectangle 10"/>
+          <p:cNvSpPr/>
+          <p:nvPr/>
+        </p:nvSpPr>
+        <p:spPr>
+          <a:xfrm>
+            <a:off x="6748920" y="4133088"/>
+            <a:ext cx="4954680" cy="1430000"/>
+          </a:xfrm>
+          <a:prstGeom prst="roundRect">
+            <a:avLst>
+              <a:gd name="adj" fmla="val 4500"/>
+            </a:avLst>
+          </a:prstGeom>
+          <a:solidFill>
+            <a:srgbClr val="F3F6F9"/>
+          </a:solidFill>
+          <a:ln w="15875">
+            <a:solidFill>
+              <a:srgbClr val="C0392B"/>
+            </a:solidFill>
+          </a:ln>
+          <a:effectLst/>
+        </p:spPr>
+        <p:style>
+          <a:lnRef idx="1">
+            <a:schemeClr val="accent1"/>
+          </a:lnRef>
+          <a:fillRef idx="3">
+            <a:schemeClr val="accent1"/>
+          </a:fillRef>
+          <a:effectRef idx="2">
+            <a:schemeClr val="accent1"/>
+          </a:effectRef>
+          <a:fontRef idx="minor">
+            <a:schemeClr val="lt1"/>
+          </a:fontRef>
+        </p:style>
+        <p:txBody>
+          <a:bodyPr rtlCol="0" anchor="ctr"/>
+          <a:lstStyle/>
+          <a:p>
+            <a:pPr algn="ctr"/>
+          </a:p>
+        </p:txBody>
+      </p:sp>
+      <p:sp>
+        <p:nvSpPr>
+          <p:cNvPr id="12" name="TextBox 11"/>
+          <p:cNvSpPr txBox="1"/>
+          <p:nvPr/>
+        </p:nvSpPr>
+        <p:spPr>
+          <a:xfrm>
+            <a:off x="6977520" y="4286040"/>
+            <a:ext cx="4497480" cy="1230000"/>
+          </a:xfrm>
+          <a:prstGeom prst="rect">
+            <a:avLst/>
+          </a:prstGeom>
+          <a:noFill/>
+        </p:spPr>
+        <p:txBody>
+          <a:bodyPr wrap="square" anchor="t" lIns="0" rIns="0" tIns="0" bIns="0">
+            <a:spAutoFit/>
+          </a:bodyPr>
+          <a:lstStyle/>
+          <a:p>
+            <a:pPr>
+              <a:spcAft>
+                <a:spcPts val="500"/>
+              </a:spcAft>
+            </a:pPr>
+            <a:r>
+              <a:rPr sz="1400" b="1" i="0">
+                <a:solidFill>
+                  <a:srgbClr val="C0392B"/>
+                </a:solidFill>
+                <a:latin typeface="Cambria"/>
+              </a:rPr>
+              <a:t>Regenerate from CAM — don't hand-edit</a:t>
+            </a:r>
+          </a:p>
+          <a:p>
+            <a:pPr marL="274320" indent="-274320">
+              <a:lnSpc>
+                <a:spcPct val="105000"/>
+              </a:lnSpc>
+              <a:spcAft>
+                <a:spcPts val="350"/>
+              </a:spcAft>
+              <a:buChar char="●"/>
+            </a:pPr>
+            <a:r>
+              <a:rPr sz="1000" b="0" i="0">
+                <a:solidFill>
+                  <a:srgbClr val="44536B"/>
+                </a:solidFill>
+                <a:latin typeface="Calibri"/>
+              </a:rPr>
+              <a:t>Individual X / Y / Z cutting values, or arc I / J centres</a:t>
+            </a:r>
+          </a:p>
+          <a:p>
+            <a:pPr marL="274320" indent="-274320">
+              <a:lnSpc>
+                <a:spcPct val="105000"/>
+              </a:lnSpc>
+              <a:spcAft>
+                <a:spcPts val="350"/>
+              </a:spcAft>
+              <a:buChar char="●"/>
+            </a:pPr>
+            <a:r>
+              <a:rPr sz="1000" b="0" i="0">
+                <a:solidFill>
+                  <a:srgbClr val="44536B"/>
+                </a:solidFill>
+                <a:latin typeface="Calibri"/>
+              </a:rPr>
+              <a:t>Switching units (G20 ↔ G21) partway through</a:t>
+            </a:r>
+          </a:p>
+          <a:p>
+            <a:pPr marL="274320" indent="-274320">
+              <a:lnSpc>
+                <a:spcPct val="105000"/>
+              </a:lnSpc>
+              <a:spcAft>
+                <a:spcPts val="350"/>
+              </a:spcAft>
+              <a:buChar char="●"/>
+            </a:pPr>
+            <a:r>
+              <a:rPr sz="1000" b="0" i="0">
+                <a:solidFill>
+                  <a:srgbClr val="44536B"/>
+                </a:solidFill>
+                <a:latin typeface="Calibri"/>
+              </a:rPr>
+              <a:t>Cutter compensation (G41 / G42) offsets</a:t>
+            </a:r>
+          </a:p>
+        </p:txBody>
+      </p:sp>
+      <p:sp>
+        <p:nvSpPr>
+          <p:cNvPr id="13" name="Rounded Rectangle 12"/>
+          <p:cNvSpPr/>
+          <p:nvPr/>
+        </p:nvSpPr>
+        <p:spPr>
+          <a:xfrm>
+            <a:off x="502920" y="5989320"/>
+            <a:ext cx="11201400" cy="466344"/>
+          </a:xfrm>
+          <a:prstGeom prst="roundRect">
+            <a:avLst>
+              <a:gd name="adj" fmla="val 14000"/>
+            </a:avLst>
+          </a:prstGeom>
+          <a:solidFill>
+            <a:srgbClr val="F3F6F9"/>
+          </a:solidFill>
+          <a:ln w="15875">
+            <a:solidFill>
+              <a:srgbClr val="C0392B"/>
+            </a:solidFill>
+          </a:ln>
+          <a:effectLst/>
+        </p:spPr>
+        <p:style>
+          <a:lnRef idx="1">
+            <a:schemeClr val="accent1"/>
+          </a:lnRef>
+          <a:fillRef idx="3">
+            <a:schemeClr val="accent1"/>
+          </a:fillRef>
+          <a:effectRef idx="2">
+            <a:schemeClr val="accent1"/>
+          </a:effectRef>
+          <a:fontRef idx="minor">
+            <a:schemeClr val="lt1"/>
+          </a:fontRef>
+        </p:style>
+        <p:txBody>
+          <a:bodyPr rtlCol="0" anchor="ctr"/>
+          <a:lstStyle/>
+          <a:p>
+            <a:pPr algn="ctr"/>
+          </a:p>
+        </p:txBody>
+      </p:sp>
+      <p:sp>
+        <p:nvSpPr>
+          <p:cNvPr id="14" name="TextBox 13"/>
+          <p:cNvSpPr txBox="1"/>
+          <p:nvPr/>
+        </p:nvSpPr>
+        <p:spPr>
+          <a:xfrm>
+            <a:off x="731520" y="5989320"/>
+            <a:ext cx="10744200" cy="466344"/>
+          </a:xfrm>
+          <a:prstGeom prst="rect">
+            <a:avLst/>
+          </a:prstGeom>
+          <a:noFill/>
+        </p:spPr>
+        <p:txBody>
+          <a:bodyPr wrap="square" anchor="ctr" lIns="0" rIns="0" tIns="0" bIns="0">
+            <a:spAutoFit/>
+          </a:bodyPr>
+          <a:lstStyle/>
+          <a:p>
+            <a:pPr>
+              <a:lnSpc>
+                <a:spcPct val="112000"/>
+              </a:lnSpc>
+            </a:pPr>
+            <a:r>
+              <a:rPr sz="1200" b="1" i="0">
+                <a:solidFill>
+                  <a:srgbClr val="C0392B"/>
+                </a:solidFill>
+                <a:latin typeface="Calibri"/>
+              </a:rPr>
+              <a:t>Prove it before it cuts:  </a:t>
+            </a:r>
+            <a:r>
+              <a:rPr sz="1200" b="0" i="0">
+                <a:solidFill>
+                  <a:srgbClr val="44536B"/>
+                </a:solidFill>
+                <a:latin typeface="Calibri"/>
+              </a:rPr>
+              <a:t>re-simulate the whole program, then run it once as an air pass with a hand on the feed-hold — a G-code error is found by the machine at full speed.</a:t>
+            </a:r>
           </a:p>
         </p:txBody>
       </p:sp>
@@ -51479,6 +56015,10 @@
           </a:solidFill>
           <a:ln/>
         </p:spPr>
+        <p:txBody>
+          <a:bodyPr/>
+          <a:p/>
+        </p:txBody>
       </p:sp>
       <p:sp>
         <p:nvSpPr>
@@ -51655,6 +56195,10 @@
           </a:solidFill>
           <a:ln/>
         </p:spPr>
+        <p:txBody>
+          <a:bodyPr/>
+          <a:p/>
+        </p:txBody>
       </p:sp>
       <p:sp>
         <p:nvSpPr>
@@ -51795,6 +56339,10 @@
           </a:solidFill>
           <a:ln/>
         </p:spPr>
+        <p:txBody>
+          <a:bodyPr/>
+          <a:p/>
+        </p:txBody>
       </p:sp>
       <p:sp>
         <p:nvSpPr>
@@ -51935,6 +56483,10 @@
           </a:solidFill>
           <a:ln/>
         </p:spPr>
+        <p:txBody>
+          <a:bodyPr/>
+          <a:p/>
+        </p:txBody>
       </p:sp>
       <p:sp>
         <p:nvSpPr>
@@ -52075,6 +56627,10 @@
           </a:solidFill>
           <a:ln/>
         </p:spPr>
+        <p:txBody>
+          <a:bodyPr/>
+          <a:p/>
+        </p:txBody>
       </p:sp>
       <p:sp>
         <p:nvSpPr>
@@ -52215,6 +56771,10 @@
           </a:solidFill>
           <a:ln/>
         </p:spPr>
+        <p:txBody>
+          <a:bodyPr/>
+          <a:p/>
+        </p:txBody>
       </p:sp>
       <p:sp>
         <p:nvSpPr>
@@ -52362,6 +56922,10 @@
             <a:prstDash val="solid"/>
           </a:ln>
         </p:spPr>
+        <p:txBody>
+          <a:bodyPr/>
+          <a:p/>
+        </p:txBody>
       </p:sp>
       <p:sp>
         <p:nvSpPr>
@@ -52518,6 +57082,10 @@
           </a:solidFill>
           <a:ln/>
         </p:spPr>
+        <p:txBody>
+          <a:bodyPr/>
+          <a:p/>
+        </p:txBody>
       </p:sp>
       <p:sp>
         <p:nvSpPr>
@@ -52701,6 +57269,10 @@
             <a:prstDash val="solid"/>
           </a:ln>
         </p:spPr>
+        <p:txBody>
+          <a:bodyPr/>
+          <a:p/>
+        </p:txBody>
       </p:sp>
       <p:sp>
         <p:nvSpPr>
@@ -52891,6 +57463,10 @@
             <a:prstDash val="solid"/>
           </a:ln>
         </p:spPr>
+        <p:txBody>
+          <a:bodyPr/>
+          <a:p/>
+        </p:txBody>
       </p:sp>
       <p:sp>
         <p:nvSpPr>
@@ -53081,6 +57657,10 @@
             <a:prstDash val="solid"/>
           </a:ln>
         </p:spPr>
+        <p:txBody>
+          <a:bodyPr/>
+          <a:p/>
+        </p:txBody>
       </p:sp>
       <p:sp>
         <p:nvSpPr>
@@ -53271,6 +57851,10 @@
             <a:prstDash val="solid"/>
           </a:ln>
         </p:spPr>
+        <p:txBody>
+          <a:bodyPr/>
+          <a:p/>
+        </p:txBody>
       </p:sp>
       <p:sp>
         <p:nvSpPr>
@@ -53441,6 +58025,10 @@
           </a:solidFill>
           <a:ln/>
         </p:spPr>
+        <p:txBody>
+          <a:bodyPr/>
+          <a:p/>
+        </p:txBody>
       </p:sp>
       <p:sp>
         <p:nvSpPr>
@@ -53619,6 +58207,10 @@
           </a:solidFill>
           <a:ln/>
         </p:spPr>
+        <p:txBody>
+          <a:bodyPr/>
+          <a:p/>
+        </p:txBody>
       </p:sp>
       <p:sp>
         <p:nvSpPr>
@@ -53854,6 +58446,10 @@
             <a:prstDash val="solid"/>
           </a:ln>
         </p:spPr>
+        <p:txBody>
+          <a:bodyPr/>
+          <a:p/>
+        </p:txBody>
       </p:sp>
       <p:sp>
         <p:nvSpPr>
@@ -53967,6 +58563,10 @@
           </a:solidFill>
           <a:ln/>
         </p:spPr>
+        <p:txBody>
+          <a:bodyPr/>
+          <a:p/>
+        </p:txBody>
       </p:sp>
       <p:sp>
         <p:nvSpPr>
@@ -54388,6 +58988,10 @@
             <a:prstDash val="solid"/>
           </a:ln>
         </p:spPr>
+        <p:txBody>
+          <a:bodyPr/>
+          <a:p/>
+        </p:txBody>
       </p:sp>
       <p:sp>
         <p:nvSpPr>
@@ -54411,6 +59015,10 @@
             <a:prstDash val="dash"/>
           </a:ln>
         </p:spPr>
+        <p:txBody>
+          <a:bodyPr/>
+          <a:p/>
+        </p:txBody>
       </p:sp>
       <p:sp>
         <p:nvSpPr>
@@ -54431,6 +59039,10 @@
           </a:solidFill>
           <a:ln/>
         </p:spPr>
+        <p:txBody>
+          <a:bodyPr/>
+          <a:p/>
+        </p:txBody>
       </p:sp>
       <p:sp>
         <p:nvSpPr>
@@ -54456,6 +59068,10 @@
             <a:prstDash val="solid"/>
           </a:ln>
         </p:spPr>
+        <p:txBody>
+          <a:bodyPr/>
+          <a:p/>
+        </p:txBody>
       </p:sp>
       <p:sp>
         <p:nvSpPr>
@@ -54479,6 +59095,10 @@
             <a:prstDash val="dash"/>
           </a:ln>
         </p:spPr>
+        <p:txBody>
+          <a:bodyPr/>
+          <a:p/>
+        </p:txBody>
       </p:sp>
       <p:sp>
         <p:nvSpPr>
@@ -54499,6 +59119,10 @@
           </a:solidFill>
           <a:ln/>
         </p:spPr>
+        <p:txBody>
+          <a:bodyPr/>
+          <a:p/>
+        </p:txBody>
       </p:sp>
       <p:sp>
         <p:nvSpPr>
@@ -54519,6 +59143,10 @@
           </a:solidFill>
           <a:ln/>
         </p:spPr>
+        <p:txBody>
+          <a:bodyPr/>
+          <a:p/>
+        </p:txBody>
       </p:sp>
       <p:sp>
         <p:nvSpPr>
@@ -54661,6 +59289,10 @@
             <a:prstDash val="solid"/>
           </a:ln>
         </p:spPr>
+        <p:txBody>
+          <a:bodyPr/>
+          <a:p/>
+        </p:txBody>
       </p:sp>
       <p:sp>
         <p:nvSpPr>
@@ -54684,6 +59316,10 @@
             <a:prstDash val="dash"/>
           </a:ln>
         </p:spPr>
+        <p:txBody>
+          <a:bodyPr/>
+          <a:p/>
+        </p:txBody>
       </p:sp>
       <p:sp>
         <p:nvSpPr>
@@ -54704,6 +59340,10 @@
           </a:solidFill>
           <a:ln/>
         </p:spPr>
+        <p:txBody>
+          <a:bodyPr/>
+          <a:p/>
+        </p:txBody>
       </p:sp>
       <p:sp>
         <p:nvSpPr>
@@ -54729,6 +59369,10 @@
             <a:prstDash val="solid"/>
           </a:ln>
         </p:spPr>
+        <p:txBody>
+          <a:bodyPr/>
+          <a:p/>
+        </p:txBody>
       </p:sp>
       <p:sp>
         <p:nvSpPr>
@@ -54752,6 +59396,10 @@
             <a:prstDash val="dash"/>
           </a:ln>
         </p:spPr>
+        <p:txBody>
+          <a:bodyPr/>
+          <a:p/>
+        </p:txBody>
       </p:sp>
       <p:sp>
         <p:nvSpPr>
@@ -54772,6 +59420,10 @@
           </a:solidFill>
           <a:ln/>
         </p:spPr>
+        <p:txBody>
+          <a:bodyPr/>
+          <a:p/>
+        </p:txBody>
       </p:sp>
       <p:sp>
         <p:nvSpPr>
@@ -54792,6 +59444,10 @@
           </a:solidFill>
           <a:ln/>
         </p:spPr>
+        <p:txBody>
+          <a:bodyPr/>
+          <a:p/>
+        </p:txBody>
       </p:sp>
       <p:sp>
         <p:nvSpPr>
@@ -54897,6 +59553,10 @@
             <a:prstDash val="solid"/>
           </a:ln>
         </p:spPr>
+        <p:txBody>
+          <a:bodyPr/>
+          <a:p/>
+        </p:txBody>
       </p:sp>
       <p:sp>
         <p:nvSpPr>
@@ -54983,6 +59643,10 @@
             <a:prstDash val="solid"/>
           </a:ln>
         </p:spPr>
+        <p:txBody>
+          <a:bodyPr/>
+          <a:p/>
+        </p:txBody>
       </p:sp>
       <p:sp>
         <p:nvSpPr>
@@ -55003,6 +59667,10 @@
           </a:solidFill>
           <a:ln/>
         </p:spPr>
+        <p:txBody>
+          <a:bodyPr/>
+          <a:p/>
+        </p:txBody>
       </p:sp>
       <p:sp>
         <p:nvSpPr>
@@ -55150,6 +59818,10 @@
             <a:prstDash val="solid"/>
           </a:ln>
         </p:spPr>
+        <p:txBody>
+          <a:bodyPr/>
+          <a:p/>
+        </p:txBody>
       </p:sp>
       <p:sp>
         <p:nvSpPr>
@@ -55170,6 +59842,10 @@
           </a:solidFill>
           <a:ln/>
         </p:spPr>
+        <p:txBody>
+          <a:bodyPr/>
+          <a:p/>
+        </p:txBody>
       </p:sp>
       <p:sp>
         <p:nvSpPr>
@@ -55317,6 +59993,10 @@
             <a:prstDash val="solid"/>
           </a:ln>
         </p:spPr>
+        <p:txBody>
+          <a:bodyPr/>
+          <a:p/>
+        </p:txBody>
       </p:sp>
       <p:sp>
         <p:nvSpPr>
@@ -55337,6 +60017,10 @@
           </a:solidFill>
           <a:ln/>
         </p:spPr>
+        <p:txBody>
+          <a:bodyPr/>
+          <a:p/>
+        </p:txBody>
       </p:sp>
       <p:sp>
         <p:nvSpPr>
